--- a/Kerangka_Presentasi_Peserta_IAKA_2026 (1).pptx
+++ b/Kerangka_Presentasi_Peserta_IAKA_2026 (1).pptx
@@ -13,7 +13,6 @@
     <p:sldId id="258" r:id="rId4"/>
     <p:sldId id="267" r:id="rId18"/>
     <p:sldId id="259" r:id="rId5"/>
-    <p:sldId id="268" r:id="rId19"/>
     <p:sldId id="260" r:id="rId6"/>
     <p:sldId id="261" r:id="rId7"/>
     <p:sldId id="262" r:id="rId8"/>
@@ -294,6 +293,346 @@
 </c:chartSpace>
 </file>
 
+<file path=ppt/charts/chart2.xml><?xml version="1.0" encoding="utf-8"?>
+<c:chartSpace xmlns:c="http://schemas.openxmlformats.org/drawingml/2006/chart" xmlns:a="http://schemas.openxmlformats.org/drawingml/2006/main" xmlns:r="http://schemas.openxmlformats.org/officeDocument/2006/relationships">
+  <c:date1904 val="0"/>
+  <c:chart>
+    <c:autoTitleDeleted val="0"/>
+    <c:plotArea>
+      <c:barChart>
+        <c:barDir val="col"/>
+        <c:grouping val="clustered"/>
+        <c:ser>
+          <c:idx val="0"/>
+          <c:order val="0"/>
+          <c:tx>
+            <c:strRef>
+              <c:f>Sheet1!$B$1</c:f>
+              <c:strCache>
+                <c:ptCount val="1"/>
+                <c:pt idx="0">
+                  <c:v>Inschiet (%)</c:v>
+                </c:pt>
+              </c:strCache>
+            </c:strRef>
+          </c:tx>
+          <c:spPr>
+            <a:solidFill>
+              <a:srgbClr val="6A2CC9"/>
+            </a:solidFill>
+          </c:spPr>
+          <c:cat>
+            <c:strRef>
+              <c:f>Sheet1!$A$2:$A$5</c:f>
+              <c:strCache>
+                <c:ptCount val="4"/>
+                <c:pt idx="0">
+                  <c:v>Q1 2025</c:v>
+                </c:pt>
+                <c:pt idx="1">
+                  <c:v>Q2 2025</c:v>
+                </c:pt>
+                <c:pt idx="2">
+                  <c:v>Q3 2025</c:v>
+                </c:pt>
+                <c:pt idx="3">
+                  <c:v>Q4 2025</c:v>
+                </c:pt>
+              </c:strCache>
+            </c:strRef>
+          </c:cat>
+          <c:val>
+            <c:numRef>
+              <c:f>Sheet1!$B$2:$B$5</c:f>
+              <c:numCache>
+                <c:formatCode>General</c:formatCode>
+                <c:ptCount val="4"/>
+                <c:pt idx="0">
+                  <c:v>4.72</c:v>
+                </c:pt>
+                <c:pt idx="1">
+                  <c:v>3.97</c:v>
+                </c:pt>
+                <c:pt idx="2">
+                  <c:v>4.64</c:v>
+                </c:pt>
+                <c:pt idx="3">
+                  <c:v>5.11</c:v>
+                </c:pt>
+              </c:numCache>
+            </c:numRef>
+          </c:val>
+        </c:ser>
+        <c:dLbls>
+          <c:txPr>
+            <a:bodyPr/>
+            <a:lstStyle/>
+            <a:p>
+              <a:pPr>
+                <a:defRPr sz="900" b="1">
+                  <a:solidFill>
+                    <a:srgbClr val="20288F"/>
+                  </a:solidFill>
+                  <a:latin typeface="Arial"/>
+                </a:defRPr>
+              </a:pPr>
+            </a:p>
+          </c:txPr>
+          <c:showLegendKey val="0"/>
+          <c:showVal val="1"/>
+          <c:showCatName val="0"/>
+          <c:showSerName val="0"/>
+          <c:showPercent val="0"/>
+          <c:showBubbleSize val="0"/>
+          <c:showLeaderLines val="1"/>
+        </c:dLbls>
+        <c:axId val="-2068027336"/>
+        <c:axId val="-2113994440"/>
+      </c:barChart>
+      <c:catAx>
+        <c:axId val="-2068027336"/>
+        <c:scaling>
+          <c:orientation val="minMax"/>
+        </c:scaling>
+        <c:delete val="0"/>
+        <c:axPos val="b"/>
+        <c:majorTickMark val="out"/>
+        <c:minorTickMark val="none"/>
+        <c:tickLblPos val="nextTo"/>
+        <c:txPr>
+          <a:bodyPr/>
+          <a:lstStyle/>
+          <a:p>
+            <a:pPr>
+              <a:defRPr sz="850" b="1">
+                <a:latin typeface="Arial"/>
+              </a:defRPr>
+            </a:pPr>
+          </a:p>
+        </c:txPr>
+        <c:crossAx val="-2113994440"/>
+        <c:crosses val="autoZero"/>
+        <c:auto val="1"/>
+        <c:lblAlgn val="ctr"/>
+        <c:lblOffset val="100"/>
+        <c:noMultiLvlLbl val="0"/>
+      </c:catAx>
+      <c:valAx>
+        <c:axId val="-2113994440"/>
+        <c:scaling>
+          <c:max val="6.0"/>
+          <c:min val="0.0"/>
+        </c:scaling>
+        <c:delete val="0"/>
+        <c:axPos val="l"/>
+        <c:majorGridlines/>
+        <c:majorTickMark val="out"/>
+        <c:minorTickMark val="none"/>
+        <c:tickLblPos val="nextTo"/>
+        <c:txPr>
+          <a:bodyPr/>
+          <a:lstStyle/>
+          <a:p>
+            <a:pPr>
+              <a:defRPr sz="800">
+                <a:latin typeface="Arial"/>
+              </a:defRPr>
+            </a:pPr>
+          </a:p>
+        </c:txPr>
+        <c:crossAx val="-2068027336"/>
+        <c:crosses val="autoZero"/>
+        <c:majorUnit val="1.0"/>
+      </c:valAx>
+    </c:plotArea>
+    <c:dispBlanksAs val="gap"/>
+  </c:chart>
+  <c:txPr>
+    <a:bodyPr/>
+    <a:lstStyle/>
+    <a:p>
+      <a:pPr>
+        <a:defRPr sz="1800"/>
+      </a:pPr>
+      <a:endParaRPr lang="en-US"/>
+    </a:p>
+  </c:txPr>
+  <c:externalData r:id="rId1">
+    <c:autoUpdate val="0"/>
+  </c:externalData>
+</c:chartSpace>
+</file>
+
+<file path=ppt/charts/chart3.xml><?xml version="1.0" encoding="utf-8"?>
+<c:chartSpace xmlns:c="http://schemas.openxmlformats.org/drawingml/2006/chart" xmlns:a="http://schemas.openxmlformats.org/drawingml/2006/main" xmlns:r="http://schemas.openxmlformats.org/officeDocument/2006/relationships">
+  <c:date1904 val="0"/>
+  <c:chart>
+    <c:autoTitleDeleted val="0"/>
+    <c:plotArea>
+      <c:barChart>
+        <c:barDir val="col"/>
+        <c:grouping val="clustered"/>
+        <c:ser>
+          <c:idx val="0"/>
+          <c:order val="0"/>
+          <c:tx>
+            <c:strRef>
+              <c:f>Sheet1!$B$1</c:f>
+              <c:strCache>
+                <c:ptCount val="1"/>
+                <c:pt idx="0">
+                  <c:v>Inschiet (%)</c:v>
+                </c:pt>
+              </c:strCache>
+            </c:strRef>
+          </c:tx>
+          <c:spPr>
+            <a:solidFill>
+              <a:srgbClr val="6A2CC9"/>
+            </a:solidFill>
+          </c:spPr>
+          <c:cat>
+            <c:strRef>
+              <c:f>Sheet1!$A$2:$A$5</c:f>
+              <c:strCache>
+                <c:ptCount val="4"/>
+                <c:pt idx="0">
+                  <c:v>Q1 2025</c:v>
+                </c:pt>
+                <c:pt idx="1">
+                  <c:v>Q2 2025</c:v>
+                </c:pt>
+                <c:pt idx="2">
+                  <c:v>Q3 2025</c:v>
+                </c:pt>
+                <c:pt idx="3">
+                  <c:v>Q4 2025</c:v>
+                </c:pt>
+              </c:strCache>
+            </c:strRef>
+          </c:cat>
+          <c:val>
+            <c:numRef>
+              <c:f>Sheet1!$B$2:$B$5</c:f>
+              <c:numCache>
+                <c:formatCode>General</c:formatCode>
+                <c:ptCount val="4"/>
+                <c:pt idx="0">
+                  <c:v>4.72</c:v>
+                </c:pt>
+                <c:pt idx="1">
+                  <c:v>3.97</c:v>
+                </c:pt>
+                <c:pt idx="2">
+                  <c:v>4.64</c:v>
+                </c:pt>
+                <c:pt idx="3">
+                  <c:v>5.11</c:v>
+                </c:pt>
+              </c:numCache>
+            </c:numRef>
+          </c:val>
+        </c:ser>
+        <c:dLbls>
+          <c:txPr>
+            <a:bodyPr/>
+            <a:lstStyle/>
+            <a:p>
+              <a:pPr>
+                <a:defRPr sz="850" b="1">
+                  <a:solidFill>
+                    <a:srgbClr val="20288F"/>
+                  </a:solidFill>
+                  <a:latin typeface="Arial"/>
+                </a:defRPr>
+              </a:pPr>
+            </a:p>
+          </c:txPr>
+          <c:showLegendKey val="0"/>
+          <c:showVal val="1"/>
+          <c:showCatName val="0"/>
+          <c:showSerName val="0"/>
+          <c:showPercent val="0"/>
+          <c:showBubbleSize val="0"/>
+          <c:showLeaderLines val="1"/>
+        </c:dLbls>
+        <c:axId val="-2068027336"/>
+        <c:axId val="-2113994440"/>
+      </c:barChart>
+      <c:catAx>
+        <c:axId val="-2068027336"/>
+        <c:scaling>
+          <c:orientation val="minMax"/>
+        </c:scaling>
+        <c:delete val="0"/>
+        <c:axPos val="b"/>
+        <c:majorTickMark val="out"/>
+        <c:minorTickMark val="none"/>
+        <c:tickLblPos val="nextTo"/>
+        <c:txPr>
+          <a:bodyPr/>
+          <a:lstStyle/>
+          <a:p>
+            <a:pPr>
+              <a:defRPr sz="800" b="1">
+                <a:latin typeface="Arial"/>
+              </a:defRPr>
+            </a:pPr>
+          </a:p>
+        </c:txPr>
+        <c:crossAx val="-2113994440"/>
+        <c:crosses val="autoZero"/>
+        <c:auto val="1"/>
+        <c:lblAlgn val="ctr"/>
+        <c:lblOffset val="100"/>
+        <c:noMultiLvlLbl val="0"/>
+      </c:catAx>
+      <c:valAx>
+        <c:axId val="-2113994440"/>
+        <c:scaling>
+          <c:max val="6.0"/>
+          <c:min val="0.0"/>
+        </c:scaling>
+        <c:delete val="0"/>
+        <c:axPos val="l"/>
+        <c:majorGridlines/>
+        <c:majorTickMark val="out"/>
+        <c:minorTickMark val="none"/>
+        <c:tickLblPos val="nextTo"/>
+        <c:txPr>
+          <a:bodyPr/>
+          <a:lstStyle/>
+          <a:p>
+            <a:pPr>
+              <a:defRPr sz="750">
+                <a:latin typeface="Arial"/>
+              </a:defRPr>
+            </a:pPr>
+          </a:p>
+        </c:txPr>
+        <c:crossAx val="-2068027336"/>
+        <c:crosses val="autoZero"/>
+        <c:majorUnit val="1.0"/>
+      </c:valAx>
+    </c:plotArea>
+    <c:dispBlanksAs val="gap"/>
+  </c:chart>
+  <c:txPr>
+    <a:bodyPr/>
+    <a:lstStyle/>
+    <a:p>
+      <a:pPr>
+        <a:defRPr sz="1800"/>
+      </a:pPr>
+      <a:endParaRPr lang="en-US"/>
+    </a:p>
+  </c:txPr>
+  <c:externalData r:id="rId1">
+    <c:autoUpdate val="0"/>
+  </c:externalData>
+</c:chartSpace>
+</file>
+
 <file path=ppt/notesMasters/notesMaster1.xml><?xml version="1.0" encoding="utf-8"?>
 <p:notesMaster xmlns:a="http://schemas.openxmlformats.org/drawingml/2006/main" xmlns:r="http://schemas.openxmlformats.org/officeDocument/2006/relationships" xmlns:p="http://schemas.openxmlformats.org/presentationml/2006/main">
   <p:cSld>
@@ -923,93 +1262,6 @@
             <a:fld id="{F7021451-1387-4CA6-816F-3879F97B5CBC}" type="slidenum">
               <a:rPr lang="en-US"/>
               <a:t>4</a:t>
-            </a:fld>
-            <a:endParaRPr lang="en-US"/>
-          </a:p>
-        </p:txBody>
-      </p:sp>
-    </p:spTree>
-    <p:extLst>
-      <p:ext uri="{BB962C8B-B14F-4D97-AF65-F5344CB8AC3E}">
-        <p14:creationId xmlns:p14="http://schemas.microsoft.com/office/powerpoint/2010/main" val="1024086991"/>
-      </p:ext>
-    </p:extLst>
-  </p:cSld>
-  <p:clrMapOvr>
-    <a:masterClrMapping/>
-  </p:clrMapOvr>
-</p:notes>
-</file>
-
-<file path=ppt/notesSlides/notesSlide5.xml><?xml version="1.0" encoding="utf-8"?>
-<p:notes xmlns:a="http://schemas.openxmlformats.org/drawingml/2006/main" xmlns:r="http://schemas.openxmlformats.org/officeDocument/2006/relationships" xmlns:p="http://schemas.openxmlformats.org/presentationml/2006/main">
-  <p:cSld>
-    <p:spTree>
-      <p:nvGrpSpPr>
-        <p:cNvPr id="1" name=""/>
-        <p:cNvGrpSpPr/>
-        <p:nvPr/>
-      </p:nvGrpSpPr>
-      <p:grpSpPr>
-        <a:xfrm>
-          <a:off x="0" y="0"/>
-          <a:ext cx="0" cy="0"/>
-          <a:chOff x="0" y="0"/>
-          <a:chExt cx="0" cy="0"/>
-        </a:xfrm>
-      </p:grpSpPr>
-      <p:sp>
-        <p:nvSpPr>
-          <p:cNvPr id="2" name="Slide Image Placeholder 1"/>
-          <p:cNvSpPr>
-            <a:spLocks noGrp="1" noRot="1" noChangeAspect="1"/>
-          </p:cNvSpPr>
-          <p:nvPr>
-            <p:ph type="sldImg"/>
-          </p:nvPr>
-        </p:nvSpPr>
-        <p:spPr/>
-      </p:sp>
-      <p:sp>
-        <p:nvSpPr>
-          <p:cNvPr id="3" name="Notes Placeholder 2"/>
-          <p:cNvSpPr>
-            <a:spLocks noGrp="1"/>
-          </p:cNvSpPr>
-          <p:nvPr>
-            <p:ph type="body" idx="1"/>
-          </p:nvPr>
-        </p:nvSpPr>
-        <p:spPr/>
-        <p:txBody>
-          <a:bodyPr/>
-          <a:lstStyle/>
-          <a:p>
-            <a:r>
-              <a:rPr lang="en-US" dirty="0"/>
-              <a:t>Isi wajib (BAB 2): akar masalah dengan metode sederhana (5 Why / fishbone). Solusi Anda nanti harus jelas menyerang akar masalah ini.</a:t>
-            </a:r>
-          </a:p>
-        </p:txBody>
-      </p:sp>
-      <p:sp>
-        <p:nvSpPr>
-          <p:cNvPr id="4" name="Slide Number Placeholder 3"/>
-          <p:cNvSpPr>
-            <a:spLocks noGrp="1"/>
-          </p:cNvSpPr>
-          <p:nvPr>
-            <p:ph type="sldNum" sz="quarter" idx="10"/>
-          </p:nvPr>
-        </p:nvSpPr>
-        <p:spPr/>
-        <p:txBody>
-          <a:bodyPr/>
-          <a:lstStyle/>
-          <a:p>
-            <a:fld id="{F7021451-1387-4CA6-816F-3879F97B5CBC}" type="slidenum">
-              <a:rPr lang="en-US"/>
-              <a:t>5</a:t>
             </a:fld>
             <a:endParaRPr lang="en-US"/>
           </a:p>
@@ -3161,1160 +3413,6 @@
 </p:sld>
 </file>
 
-<file path=ppt/slides/slide13.xml><?xml version="1.0" encoding="utf-8"?>
-<p:sld xmlns:a="http://schemas.openxmlformats.org/drawingml/2006/main" xmlns:p="http://schemas.openxmlformats.org/presentationml/2006/main" xmlns:r="http://schemas.openxmlformats.org/officeDocument/2006/relationships">
-  <p:cSld>
-    <p:spTree>
-      <p:nvGrpSpPr>
-        <p:cNvPr id="1" name=""/>
-        <p:cNvGrpSpPr/>
-        <p:nvPr/>
-      </p:nvGrpSpPr>
-      <p:grpSpPr/>
-      <p:pic>
-        <p:nvPicPr>
-          <p:cNvPr id="2" name="Picture 1" descr="image.png"/>
-          <p:cNvPicPr>
-            <a:picLocks noChangeAspect="1"/>
-          </p:cNvPicPr>
-          <p:nvPr/>
-        </p:nvPicPr>
-        <p:blipFill>
-          <a:blip r:embed="rId2"/>
-          <a:stretch>
-            <a:fillRect/>
-          </a:stretch>
-        </p:blipFill>
-        <p:spPr>
-          <a:xfrm>
-            <a:off x="-107899" y="-179222"/>
-            <a:ext cx="1448409" cy="814730"/>
-          </a:xfrm>
-          <a:prstGeom prst="rect">
-            <a:avLst/>
-          </a:prstGeom>
-        </p:spPr>
-      </p:pic>
-      <p:pic>
-        <p:nvPicPr>
-          <p:cNvPr id="3" name="Picture 2" descr="image.png"/>
-          <p:cNvPicPr>
-            <a:picLocks noChangeAspect="1"/>
-          </p:cNvPicPr>
-          <p:nvPr/>
-        </p:nvPicPr>
-        <p:blipFill>
-          <a:blip r:embed="rId3"/>
-          <a:stretch>
-            <a:fillRect/>
-          </a:stretch>
-        </p:blipFill>
-        <p:spPr>
-          <a:xfrm>
-            <a:off x="11055096" y="11887"/>
-            <a:ext cx="1140256" cy="634593"/>
-          </a:xfrm>
-          <a:prstGeom prst="rect">
-            <a:avLst/>
-          </a:prstGeom>
-        </p:spPr>
-      </p:pic>
-      <p:sp>
-        <p:nvSpPr>
-          <p:cNvPr id="4" name="Rounded Rectangle 3"/>
-          <p:cNvSpPr/>
-          <p:nvPr/>
-        </p:nvSpPr>
-        <p:spPr>
-          <a:xfrm>
-            <a:off x="548640" y="594360"/>
-            <a:ext cx="731520" cy="658368"/>
-          </a:xfrm>
-          <a:prstGeom prst="roundRect">
-            <a:avLst/>
-          </a:prstGeom>
-          <a:solidFill>
-            <a:srgbClr val="6A2CC9"/>
-          </a:solidFill>
-          <a:ln>
-            <a:noFill/>
-          </a:ln>
-        </p:spPr>
-        <p:style>
-          <a:lnRef idx="1">
-            <a:schemeClr val="accent1"/>
-          </a:lnRef>
-          <a:fillRef idx="3">
-            <a:schemeClr val="accent1"/>
-          </a:fillRef>
-          <a:effectRef idx="2">
-            <a:schemeClr val="accent1"/>
-          </a:effectRef>
-          <a:fontRef idx="minor">
-            <a:schemeClr val="lt1"/>
-          </a:fontRef>
-        </p:style>
-        <p:txBody>
-          <a:bodyPr rtlCol="0" anchor="ctr" wrap="none" lIns="0" tIns="0" rIns="0" bIns="0"/>
-          <a:lstStyle/>
-          <a:p>
-            <a:pPr algn="ctr"/>
-            <a:r>
-              <a:rPr sz="2000" b="1">
-                <a:solidFill>
-                  <a:srgbClr val="FFFFFF"/>
-                </a:solidFill>
-                <a:latin typeface="Arial"/>
-              </a:rPr>
-              <a:t>02.2</a:t>
-            </a:r>
-          </a:p>
-        </p:txBody>
-      </p:sp>
-      <p:sp>
-        <p:nvSpPr>
-          <p:cNvPr id="5" name="TextBox 4"/>
-          <p:cNvSpPr txBox="1"/>
-          <p:nvPr/>
-        </p:nvSpPr>
-        <p:spPr>
-          <a:xfrm>
-            <a:off x="1417320" y="548640"/>
-            <a:ext cx="9326880" cy="731520"/>
-          </a:xfrm>
-          <a:prstGeom prst="rect">
-            <a:avLst/>
-          </a:prstGeom>
-          <a:noFill/>
-        </p:spPr>
-        <p:txBody>
-          <a:bodyPr wrap="square" lIns="0" tIns="0" rIns="0" bIns="0">
-            <a:spAutoFit/>
-          </a:bodyPr>
-          <a:lstStyle/>
-          <a:p>
-            <a:pPr algn="l"/>
-            <a:r>
-              <a:rPr sz="2500" b="1">
-                <a:solidFill>
-                  <a:srgbClr val="20288F"/>
-                </a:solidFill>
-                <a:latin typeface="Arial"/>
-              </a:rPr>
-              <a:t>Masalah: Baseline Permasalahan &amp; Risiko Bila Dibiarkan</a:t>
-            </a:r>
-          </a:p>
-        </p:txBody>
-      </p:sp>
-      <p:sp>
-        <p:nvSpPr>
-          <p:cNvPr id="6" name="TextBox 5"/>
-          <p:cNvSpPr txBox="1"/>
-          <p:nvPr/>
-        </p:nvSpPr>
-        <p:spPr>
-          <a:xfrm>
-            <a:off x="548640" y="1353312"/>
-            <a:ext cx="10789920" cy="347472"/>
-          </a:xfrm>
-          <a:prstGeom prst="rect">
-            <a:avLst/>
-          </a:prstGeom>
-          <a:noFill/>
-        </p:spPr>
-        <p:txBody>
-          <a:bodyPr wrap="square" lIns="0" tIns="0" rIns="0" bIns="0">
-            <a:spAutoFit/>
-          </a:bodyPr>
-          <a:lstStyle/>
-          <a:p>
-            <a:r>
-              <a:rPr sz="1150" b="1">
-                <a:solidFill>
-                  <a:srgbClr val="6A2CC9"/>
-                </a:solidFill>
-                <a:latin typeface="Arial"/>
-              </a:rPr>
-              <a:t>Tujuan bagian ini:  </a:t>
-            </a:r>
-            <a:r>
-              <a:rPr sz="1150" b="0">
-                <a:solidFill>
-                  <a:srgbClr val="2A2A3D"/>
-                </a:solidFill>
-                <a:latin typeface="Arial"/>
-              </a:rPr>
-              <a:t>Tunjukkan baseline permasalahan operasional terukur dan dampak multidimensi jika kondisi dibiarkan tanpa intervensi.</a:t>
-            </a:r>
-          </a:p>
-        </p:txBody>
-      </p:sp>
-      <p:sp>
-        <p:nvSpPr>
-          <p:cNvPr id="7" name="TextBox 6"/>
-          <p:cNvSpPr txBox="1"/>
-          <p:nvPr/>
-        </p:nvSpPr>
-        <p:spPr>
-          <a:xfrm>
-            <a:off x="548640" y="6419088"/>
-            <a:ext cx="11091672" cy="256032"/>
-          </a:xfrm>
-          <a:prstGeom prst="rect">
-            <a:avLst/>
-          </a:prstGeom>
-          <a:noFill/>
-        </p:spPr>
-        <p:txBody>
-          <a:bodyPr wrap="square" lIns="0" tIns="0" rIns="0" bIns="0">
-            <a:spAutoFit/>
-          </a:bodyPr>
-          <a:lstStyle/>
-          <a:p>
-            <a:r>
-              <a:rPr sz="850">
-                <a:solidFill>
-                  <a:srgbClr val="6E6E82"/>
-                </a:solidFill>
-                <a:latin typeface="Arial"/>
-              </a:rPr>
-              <a:t>IAKA 2026 — Kerangka Presentasi Peserta  ·  DSS SIRINE 4.0 Unit Cetak Pita Cukai</a:t>
-            </a:r>
-          </a:p>
-        </p:txBody>
-      </p:sp>
-      <p:sp>
-        <p:nvSpPr>
-          <p:cNvPr id="8" name="Rounded Rectangle 7"/>
-          <p:cNvSpPr/>
-          <p:nvPr/>
-        </p:nvSpPr>
-        <p:spPr>
-          <a:xfrm>
-            <a:off x="548640" y="1755648"/>
-            <a:ext cx="2615184" cy="1024128"/>
-          </a:xfrm>
-          <a:prstGeom prst="roundRect">
-            <a:avLst/>
-          </a:prstGeom>
-          <a:solidFill>
-            <a:srgbClr val="FFF9E6"/>
-          </a:solidFill>
-          <a:ln w="19050">
-            <a:solidFill>
-              <a:srgbClr val="FFE082"/>
-            </a:solidFill>
-          </a:ln>
-        </p:spPr>
-        <p:style>
-          <a:lnRef idx="1">
-            <a:schemeClr val="accent1"/>
-          </a:lnRef>
-          <a:fillRef idx="3">
-            <a:schemeClr val="accent1"/>
-          </a:fillRef>
-          <a:effectRef idx="2">
-            <a:schemeClr val="accent1"/>
-          </a:effectRef>
-          <a:fontRef idx="minor">
-            <a:schemeClr val="lt1"/>
-          </a:fontRef>
-        </p:style>
-        <p:txBody>
-          <a:bodyPr rtlCol="0" anchor="ctr" wrap="square" tIns="91440"/>
-          <a:lstStyle/>
-          <a:p>
-            <a:pPr algn="ctr"/>
-            <a:r>
-              <a:rPr sz="850" b="1">
-                <a:solidFill>
-                  <a:srgbClr val="E65100"/>
-                </a:solidFill>
-                <a:latin typeface="Arial"/>
-              </a:rPr>
-              <a:t>BASELINE INSCHIET 2025</a:t>
-            </a:r>
-          </a:p>
-          <a:p>
-            <a:pPr algn="ctr"/>
-            <a:r>
-              <a:rPr sz="1600" b="1">
-                <a:solidFill>
-                  <a:srgbClr val="E65100"/>
-                </a:solidFill>
-                <a:latin typeface="Arial"/>
-              </a:rPr>
-              <a:t>4,61%</a:t>
-            </a:r>
-          </a:p>
-          <a:p>
-            <a:pPr algn="ctr"/>
-            <a:r>
-              <a:rPr sz="750">
-                <a:solidFill>
-                  <a:srgbClr val="2A2A3D"/>
-                </a:solidFill>
-                <a:latin typeface="Arial"/>
-              </a:rPr>
-              <a:t>Puncak Q4: 5,11% (Target &lt; 4,00%)</a:t>
-            </a:r>
-          </a:p>
-        </p:txBody>
-      </p:sp>
-      <p:sp>
-        <p:nvSpPr>
-          <p:cNvPr id="9" name="Rectangle 8"/>
-          <p:cNvSpPr/>
-          <p:nvPr/>
-        </p:nvSpPr>
-        <p:spPr>
-          <a:xfrm>
-            <a:off x="548640" y="1755648"/>
-            <a:ext cx="2615184" cy="54864"/>
-          </a:xfrm>
-          <a:prstGeom prst="rect">
-            <a:avLst/>
-          </a:prstGeom>
-          <a:solidFill>
-            <a:srgbClr val="E65100"/>
-          </a:solidFill>
-          <a:ln>
-            <a:noFill/>
-          </a:ln>
-        </p:spPr>
-        <p:style>
-          <a:lnRef idx="1">
-            <a:schemeClr val="accent1"/>
-          </a:lnRef>
-          <a:fillRef idx="3">
-            <a:schemeClr val="accent1"/>
-          </a:fillRef>
-          <a:effectRef idx="2">
-            <a:schemeClr val="accent1"/>
-          </a:effectRef>
-          <a:fontRef idx="minor">
-            <a:schemeClr val="lt1"/>
-          </a:fontRef>
-        </p:style>
-        <p:txBody>
-          <a:bodyPr rtlCol="0" anchor="ctr"/>
-          <a:lstStyle/>
-          <a:p>
-            <a:pPr algn="ctr"/>
-          </a:p>
-        </p:txBody>
-      </p:sp>
-      <p:sp>
-        <p:nvSpPr>
-          <p:cNvPr id="10" name="Rounded Rectangle 9"/>
-          <p:cNvSpPr/>
-          <p:nvPr/>
-        </p:nvSpPr>
-        <p:spPr>
-          <a:xfrm>
-            <a:off x="3374136" y="1755648"/>
-            <a:ext cx="2615184" cy="1024128"/>
-          </a:xfrm>
-          <a:prstGeom prst="roundRect">
-            <a:avLst/>
-          </a:prstGeom>
-          <a:solidFill>
-            <a:srgbClr val="FFF5F5"/>
-          </a:solidFill>
-          <a:ln w="19050">
-            <a:solidFill>
-              <a:srgbClr val="F5C2C2"/>
-            </a:solidFill>
-          </a:ln>
-        </p:spPr>
-        <p:style>
-          <a:lnRef idx="1">
-            <a:schemeClr val="accent1"/>
-          </a:lnRef>
-          <a:fillRef idx="3">
-            <a:schemeClr val="accent1"/>
-          </a:fillRef>
-          <a:effectRef idx="2">
-            <a:schemeClr val="accent1"/>
-          </a:effectRef>
-          <a:fontRef idx="minor">
-            <a:schemeClr val="lt1"/>
-          </a:fontRef>
-        </p:style>
-        <p:txBody>
-          <a:bodyPr rtlCol="0" anchor="ctr" wrap="square" tIns="91440"/>
-          <a:lstStyle/>
-          <a:p>
-            <a:pPr algn="ctr"/>
-            <a:r>
-              <a:rPr sz="850" b="1">
-                <a:solidFill>
-                  <a:srgbClr val="C62828"/>
-                </a:solidFill>
-                <a:latin typeface="Arial"/>
-              </a:rPr>
-              <a:t>DOWNTIME PERBAIKAN</a:t>
-            </a:r>
-          </a:p>
-          <a:p>
-            <a:pPr algn="ctr"/>
-            <a:r>
-              <a:rPr sz="1600" b="1">
-                <a:solidFill>
-                  <a:srgbClr val="C62828"/>
-                </a:solidFill>
-                <a:latin typeface="Arial"/>
-              </a:rPr>
-              <a:t>&gt; 8 Jam / Mesin</a:t>
-            </a:r>
-          </a:p>
-          <a:p>
-            <a:pPr algn="ctr"/>
-            <a:r>
-              <a:rPr sz="750">
-                <a:solidFill>
-                  <a:srgbClr val="2A2A3D"/>
-                </a:solidFill>
-                <a:latin typeface="Arial"/>
-              </a:rPr>
-              <a:t>Pemeriksaan spekulatif bergilir (&gt; 1 shift)</a:t>
-            </a:r>
-          </a:p>
-        </p:txBody>
-      </p:sp>
-      <p:sp>
-        <p:nvSpPr>
-          <p:cNvPr id="11" name="Rectangle 10"/>
-          <p:cNvSpPr/>
-          <p:nvPr/>
-        </p:nvSpPr>
-        <p:spPr>
-          <a:xfrm>
-            <a:off x="3374136" y="1755648"/>
-            <a:ext cx="2615184" cy="54864"/>
-          </a:xfrm>
-          <a:prstGeom prst="rect">
-            <a:avLst/>
-          </a:prstGeom>
-          <a:solidFill>
-            <a:srgbClr val="C62828"/>
-          </a:solidFill>
-          <a:ln>
-            <a:noFill/>
-          </a:ln>
-        </p:spPr>
-        <p:style>
-          <a:lnRef idx="1">
-            <a:schemeClr val="accent1"/>
-          </a:lnRef>
-          <a:fillRef idx="3">
-            <a:schemeClr val="accent1"/>
-          </a:fillRef>
-          <a:effectRef idx="2">
-            <a:schemeClr val="accent1"/>
-          </a:effectRef>
-          <a:fontRef idx="minor">
-            <a:schemeClr val="lt1"/>
-          </a:fontRef>
-        </p:style>
-        <p:txBody>
-          <a:bodyPr rtlCol="0" anchor="ctr"/>
-          <a:lstStyle/>
-          <a:p>
-            <a:pPr algn="ctr"/>
-          </a:p>
-        </p:txBody>
-      </p:sp>
-      <p:sp>
-        <p:nvSpPr>
-          <p:cNvPr id="12" name="Rounded Rectangle 11"/>
-          <p:cNvSpPr/>
-          <p:nvPr/>
-        </p:nvSpPr>
-        <p:spPr>
-          <a:xfrm>
-            <a:off x="6199632" y="1755648"/>
-            <a:ext cx="2615184" cy="1024128"/>
-          </a:xfrm>
-          <a:prstGeom prst="roundRect">
-            <a:avLst/>
-          </a:prstGeom>
-          <a:solidFill>
-            <a:srgbClr val="F4F7FE"/>
-          </a:solidFill>
-          <a:ln w="19050">
-            <a:solidFill>
-              <a:srgbClr val="D2DCF5"/>
-            </a:solidFill>
-          </a:ln>
-        </p:spPr>
-        <p:style>
-          <a:lnRef idx="1">
-            <a:schemeClr val="accent1"/>
-          </a:lnRef>
-          <a:fillRef idx="3">
-            <a:schemeClr val="accent1"/>
-          </a:fillRef>
-          <a:effectRef idx="2">
-            <a:schemeClr val="accent1"/>
-          </a:effectRef>
-          <a:fontRef idx="minor">
-            <a:schemeClr val="lt1"/>
-          </a:fontRef>
-        </p:style>
-        <p:txBody>
-          <a:bodyPr rtlCol="0" anchor="ctr" wrap="square" tIns="91440"/>
-          <a:lstStyle/>
-          <a:p>
-            <a:pPr algn="ctr"/>
-            <a:r>
-              <a:rPr sz="850" b="1">
-                <a:solidFill>
-                  <a:srgbClr val="20288F"/>
-                </a:solidFill>
-                <a:latin typeface="Arial"/>
-              </a:rPr>
-              <a:t>REKAP DATA MANUAL</a:t>
-            </a:r>
-          </a:p>
-          <a:p>
-            <a:pPr algn="ctr"/>
-            <a:r>
-              <a:rPr sz="1600" b="1">
-                <a:solidFill>
-                  <a:srgbClr val="20288F"/>
-                </a:solidFill>
-                <a:latin typeface="Arial"/>
-              </a:rPr>
-              <a:t>100% Buku Folio</a:t>
-            </a:r>
-          </a:p>
-          <a:p>
-            <a:pPr algn="ctr"/>
-            <a:r>
-              <a:rPr sz="750">
-                <a:solidFill>
-                  <a:srgbClr val="2A2A3D"/>
-                </a:solidFill>
-                <a:latin typeface="Arial"/>
-              </a:rPr>
-              <a:t>Baru direkap saat evaluasi berkala</a:t>
-            </a:r>
-          </a:p>
-        </p:txBody>
-      </p:sp>
-      <p:sp>
-        <p:nvSpPr>
-          <p:cNvPr id="13" name="Rectangle 12"/>
-          <p:cNvSpPr/>
-          <p:nvPr/>
-        </p:nvSpPr>
-        <p:spPr>
-          <a:xfrm>
-            <a:off x="6199632" y="1755648"/>
-            <a:ext cx="2615184" cy="54864"/>
-          </a:xfrm>
-          <a:prstGeom prst="rect">
-            <a:avLst/>
-          </a:prstGeom>
-          <a:solidFill>
-            <a:srgbClr val="20288F"/>
-          </a:solidFill>
-          <a:ln>
-            <a:noFill/>
-          </a:ln>
-        </p:spPr>
-        <p:style>
-          <a:lnRef idx="1">
-            <a:schemeClr val="accent1"/>
-          </a:lnRef>
-          <a:fillRef idx="3">
-            <a:schemeClr val="accent1"/>
-          </a:fillRef>
-          <a:effectRef idx="2">
-            <a:schemeClr val="accent1"/>
-          </a:effectRef>
-          <a:fontRef idx="minor">
-            <a:schemeClr val="lt1"/>
-          </a:fontRef>
-        </p:style>
-        <p:txBody>
-          <a:bodyPr rtlCol="0" anchor="ctr"/>
-          <a:lstStyle/>
-          <a:p>
-            <a:pPr algn="ctr"/>
-          </a:p>
-        </p:txBody>
-      </p:sp>
-      <p:sp>
-        <p:nvSpPr>
-          <p:cNvPr id="14" name="Rounded Rectangle 13"/>
-          <p:cNvSpPr/>
-          <p:nvPr/>
-        </p:nvSpPr>
-        <p:spPr>
-          <a:xfrm>
-            <a:off x="9025128" y="1755648"/>
-            <a:ext cx="2615184" cy="1024128"/>
-          </a:xfrm>
-          <a:prstGeom prst="roundRect">
-            <a:avLst/>
-          </a:prstGeom>
-          <a:solidFill>
-            <a:srgbClr val="F8F6FE"/>
-          </a:solidFill>
-          <a:ln w="19050">
-            <a:solidFill>
-              <a:srgbClr val="D9CEF7"/>
-            </a:solidFill>
-          </a:ln>
-        </p:spPr>
-        <p:style>
-          <a:lnRef idx="1">
-            <a:schemeClr val="accent1"/>
-          </a:lnRef>
-          <a:fillRef idx="3">
-            <a:schemeClr val="accent1"/>
-          </a:fillRef>
-          <a:effectRef idx="2">
-            <a:schemeClr val="accent1"/>
-          </a:effectRef>
-          <a:fontRef idx="minor">
-            <a:schemeClr val="lt1"/>
-          </a:fontRef>
-        </p:style>
-        <p:txBody>
-          <a:bodyPr rtlCol="0" anchor="ctr" wrap="square" tIns="91440"/>
-          <a:lstStyle/>
-          <a:p>
-            <a:pPr algn="ctr"/>
-            <a:r>
-              <a:rPr sz="850" b="1">
-                <a:solidFill>
-                  <a:srgbClr val="6A2CC9"/>
-                </a:solidFill>
-                <a:latin typeface="Arial"/>
-              </a:rPr>
-              <a:t>POTENSI BIAYA TERBUANG</a:t>
-            </a:r>
-          </a:p>
-          <a:p>
-            <a:pPr algn="ctr"/>
-            <a:r>
-              <a:rPr sz="1600" b="1">
-                <a:solidFill>
-                  <a:srgbClr val="6A2CC9"/>
-                </a:solidFill>
-                <a:latin typeface="Arial"/>
-              </a:rPr>
-              <a:t>Rp 24,56 Miliar/Thn</a:t>
-            </a:r>
-          </a:p>
-          <a:p>
-            <a:pPr algn="ctr"/>
-            <a:r>
-              <a:rPr sz="750">
-                <a:solidFill>
-                  <a:srgbClr val="2A2A3D"/>
-                </a:solidFill>
-                <a:latin typeface="Arial"/>
-              </a:rPr>
-              <a:t>8.189.062 lembar rusak (@ Rp 3.000)</a:t>
-            </a:r>
-          </a:p>
-        </p:txBody>
-      </p:sp>
-      <p:sp>
-        <p:nvSpPr>
-          <p:cNvPr id="15" name="Rectangle 14"/>
-          <p:cNvSpPr/>
-          <p:nvPr/>
-        </p:nvSpPr>
-        <p:spPr>
-          <a:xfrm>
-            <a:off x="9025128" y="1755648"/>
-            <a:ext cx="2615184" cy="54864"/>
-          </a:xfrm>
-          <a:prstGeom prst="rect">
-            <a:avLst/>
-          </a:prstGeom>
-          <a:solidFill>
-            <a:srgbClr val="6A2CC9"/>
-          </a:solidFill>
-          <a:ln>
-            <a:noFill/>
-          </a:ln>
-        </p:spPr>
-        <p:style>
-          <a:lnRef idx="1">
-            <a:schemeClr val="accent1"/>
-          </a:lnRef>
-          <a:fillRef idx="3">
-            <a:schemeClr val="accent1"/>
-          </a:fillRef>
-          <a:effectRef idx="2">
-            <a:schemeClr val="accent1"/>
-          </a:effectRef>
-          <a:fontRef idx="minor">
-            <a:schemeClr val="lt1"/>
-          </a:fontRef>
-        </p:style>
-        <p:txBody>
-          <a:bodyPr rtlCol="0" anchor="ctr"/>
-          <a:lstStyle/>
-          <a:p>
-            <a:pPr algn="ctr"/>
-          </a:p>
-        </p:txBody>
-      </p:sp>
-      <p:sp>
-        <p:nvSpPr>
-          <p:cNvPr id="16" name="Rectangle 15"/>
-          <p:cNvSpPr/>
-          <p:nvPr/>
-        </p:nvSpPr>
-        <p:spPr>
-          <a:xfrm>
-            <a:off x="548640" y="2907792"/>
-            <a:ext cx="5440680" cy="347472"/>
-          </a:xfrm>
-          <a:prstGeom prst="rect">
-            <a:avLst/>
-          </a:prstGeom>
-          <a:solidFill>
-            <a:srgbClr val="20288F"/>
-          </a:solidFill>
-          <a:ln>
-            <a:noFill/>
-          </a:ln>
-        </p:spPr>
-        <p:style>
-          <a:lnRef idx="1">
-            <a:schemeClr val="accent1"/>
-          </a:lnRef>
-          <a:fillRef idx="3">
-            <a:schemeClr val="accent1"/>
-          </a:fillRef>
-          <a:effectRef idx="2">
-            <a:schemeClr val="accent1"/>
-          </a:effectRef>
-          <a:fontRef idx="minor">
-            <a:schemeClr val="lt1"/>
-          </a:fontRef>
-        </p:style>
-        <p:txBody>
-          <a:bodyPr rtlCol="0" anchor="ctr"/>
-          <a:lstStyle/>
-          <a:p>
-            <a:pPr algn="ctr"/>
-            <a:r>
-              <a:rPr sz="1050" b="1">
-                <a:solidFill>
-                  <a:srgbClr val="FFFFFF"/>
-                </a:solidFill>
-                <a:latin typeface="Arial"/>
-              </a:rPr>
-              <a:t>BASELINE OPERASIONAL &amp; KESENJANGAN DATA</a:t>
-            </a:r>
-          </a:p>
-        </p:txBody>
-      </p:sp>
-      <p:sp>
-        <p:nvSpPr>
-          <p:cNvPr id="17" name="Rounded Rectangle 16"/>
-          <p:cNvSpPr/>
-          <p:nvPr/>
-        </p:nvSpPr>
-        <p:spPr>
-          <a:xfrm>
-            <a:off x="548640" y="3255264"/>
-            <a:ext cx="5440680" cy="3035808"/>
-          </a:xfrm>
-          <a:prstGeom prst="roundRect">
-            <a:avLst/>
-          </a:prstGeom>
-          <a:solidFill>
-            <a:srgbClr val="F4F7FE"/>
-          </a:solidFill>
-          <a:ln w="12700">
-            <a:solidFill>
-              <a:srgbClr val="D2DCF5"/>
-            </a:solidFill>
-          </a:ln>
-        </p:spPr>
-        <p:style>
-          <a:lnRef idx="1">
-            <a:schemeClr val="accent1"/>
-          </a:lnRef>
-          <a:fillRef idx="3">
-            <a:schemeClr val="accent1"/>
-          </a:fillRef>
-          <a:effectRef idx="2">
-            <a:schemeClr val="accent1"/>
-          </a:effectRef>
-          <a:fontRef idx="minor">
-            <a:schemeClr val="lt1"/>
-          </a:fontRef>
-        </p:style>
-        <p:txBody>
-          <a:bodyPr rtlCol="0" anchor="ctr" wrap="square" lIns="164592" rIns="164592" tIns="109728" bIns="91440"/>
-          <a:lstStyle/>
-          <a:p>
-            <a:pPr algn="ctr">
-              <a:spcAft>
-                <a:spcPts val="400"/>
-              </a:spcAft>
-            </a:pPr>
-            <a:r>
-              <a:rPr sz="950" b="1">
-                <a:solidFill>
-                  <a:srgbClr val="20288F"/>
-                </a:solidFill>
-                <a:latin typeface="Arial"/>
-              </a:rPr>
-              <a:t>• Volume Order 2025: </a:t>
-            </a:r>
-            <a:r>
-              <a:rPr sz="850">
-                <a:solidFill>
-                  <a:srgbClr val="2A2A3D"/>
-                </a:solidFill>
-                <a:latin typeface="Arial"/>
-              </a:rPr>
-              <a:t>177.636.930 Lembar Cetak (LK) — Sumber: SAP ZPPRSIPPC0012.</a:t>
-            </a:r>
-          </a:p>
-          <a:p>
-            <a:pPr>
-              <a:spcAft>
-                <a:spcPts val="400"/>
-              </a:spcAft>
-            </a:pPr>
-            <a:r>
-              <a:rPr sz="950" b="1">
-                <a:solidFill>
-                  <a:srgbClr val="20288F"/>
-                </a:solidFill>
-                <a:latin typeface="Arial"/>
-              </a:rPr>
-              <a:t>• Fluktuasi Inschiet 2025: </a:t>
-            </a:r>
-            <a:r>
-              <a:rPr sz="850">
-                <a:solidFill>
-                  <a:srgbClr val="2A2A3D"/>
-                </a:solidFill>
-                <a:latin typeface="Arial"/>
-              </a:rPr>
-              <a:t>Q1 (4,72%), Q2 (3,97%), Q3 (4,64%), Q4 (5,11%) — Rata-rata Baseline: 4,61%.</a:t>
-            </a:r>
-          </a:p>
-          <a:p>
-            <a:pPr>
-              <a:spcAft>
-                <a:spcPts val="400"/>
-              </a:spcAft>
-            </a:pPr>
-            <a:r>
-              <a:rPr sz="950" b="1">
-                <a:solidFill>
-                  <a:srgbClr val="20288F"/>
-                </a:solidFill>
-                <a:latin typeface="Arial"/>
-              </a:rPr>
-              <a:t>• Jumlah Lembar Rusak Eksisting: </a:t>
-            </a:r>
-            <a:r>
-              <a:rPr sz="850">
-                <a:solidFill>
-                  <a:srgbClr val="2A2A3D"/>
-                </a:solidFill>
-                <a:latin typeface="Arial"/>
-              </a:rPr>
-              <a:t>8.189.062 lembar/tahun (setara pemborosan biaya ~Rp 24,56 Miliar/tahun).</a:t>
-            </a:r>
-          </a:p>
-          <a:p>
-            <a:pPr>
-              <a:spcAft>
-                <a:spcPts val="400"/>
-              </a:spcAft>
-            </a:pPr>
-            <a:r>
-              <a:rPr sz="950" b="1">
-                <a:solidFill>
-                  <a:srgbClr val="20288F"/>
-                </a:solidFill>
-                <a:latin typeface="Arial"/>
-              </a:rPr>
-              <a:t>• Kondisi Pemisahan Data Eksisting: </a:t>
-            </a:r>
-            <a:r>
-              <a:rPr sz="850">
-                <a:solidFill>
-                  <a:srgbClr val="2A2A3D"/>
-                </a:solidFill>
-                <a:latin typeface="Arial"/>
-              </a:rPr>
-              <a:t>• Data SAP: Tabel mentah CSV di kantor tanpa grafik harian.
-• Data QC: Hanya total kerusakan umum tanpa rincian mesin/shift.
-• Data Lapangan: Tertulis di buku folio manual meja mesin.</a:t>
-            </a:r>
-          </a:p>
-          <a:p>
-            <a:pPr>
-              <a:spcAft>
-                <a:spcPts val="400"/>
-              </a:spcAft>
-            </a:pPr>
-            <a:r>
-              <a:rPr sz="950" b="1">
-                <a:solidFill>
-                  <a:srgbClr val="20288F"/>
-                </a:solidFill>
-                <a:latin typeface="Arial"/>
-              </a:rPr>
-              <a:t>• Akar Hambatan Utama: </a:t>
-            </a:r>
-            <a:r>
-              <a:rPr sz="850">
-                <a:solidFill>
-                  <a:srgbClr val="2A2A3D"/>
-                </a:solidFill>
-                <a:latin typeface="Arial"/>
-              </a:rPr>
-              <a:t>Belum ada sistem terintegrasi yang menghubungkan data jenis kerusakan dengan data mesin dan shift kerja di lapangan secara real-time.</a:t>
-            </a:r>
-          </a:p>
-        </p:txBody>
-      </p:sp>
-      <p:sp>
-        <p:nvSpPr>
-          <p:cNvPr id="18" name="Rectangle 17"/>
-          <p:cNvSpPr/>
-          <p:nvPr/>
-        </p:nvSpPr>
-        <p:spPr>
-          <a:xfrm>
-            <a:off x="6199632" y="2907792"/>
-            <a:ext cx="5440680" cy="347472"/>
-          </a:xfrm>
-          <a:prstGeom prst="rect">
-            <a:avLst/>
-          </a:prstGeom>
-          <a:solidFill>
-            <a:srgbClr val="C62828"/>
-          </a:solidFill>
-          <a:ln>
-            <a:noFill/>
-          </a:ln>
-        </p:spPr>
-        <p:style>
-          <a:lnRef idx="1">
-            <a:schemeClr val="accent1"/>
-          </a:lnRef>
-          <a:fillRef idx="3">
-            <a:schemeClr val="accent1"/>
-          </a:fillRef>
-          <a:effectRef idx="2">
-            <a:schemeClr val="accent1"/>
-          </a:effectRef>
-          <a:fontRef idx="minor">
-            <a:schemeClr val="lt1"/>
-          </a:fontRef>
-        </p:style>
-        <p:txBody>
-          <a:bodyPr rtlCol="0" anchor="ctr"/>
-          <a:lstStyle/>
-          <a:p>
-            <a:pPr algn="ctr"/>
-            <a:r>
-              <a:rPr sz="1050" b="1">
-                <a:solidFill>
-                  <a:srgbClr val="FFFFFF"/>
-                </a:solidFill>
-                <a:latin typeface="Arial"/>
-              </a:rPr>
-              <a:t>DAMPAK RISIKO BILA DIBIARKAN (5 PILAR)</a:t>
-            </a:r>
-          </a:p>
-        </p:txBody>
-      </p:sp>
-      <p:sp>
-        <p:nvSpPr>
-          <p:cNvPr id="19" name="Rounded Rectangle 18"/>
-          <p:cNvSpPr/>
-          <p:nvPr/>
-        </p:nvSpPr>
-        <p:spPr>
-          <a:xfrm>
-            <a:off x="6199632" y="3255264"/>
-            <a:ext cx="5440680" cy="3035808"/>
-          </a:xfrm>
-          <a:prstGeom prst="roundRect">
-            <a:avLst/>
-          </a:prstGeom>
-          <a:solidFill>
-            <a:srgbClr val="FFF5F5"/>
-          </a:solidFill>
-          <a:ln w="12700">
-            <a:solidFill>
-              <a:srgbClr val="F5C2C2"/>
-            </a:solidFill>
-          </a:ln>
-        </p:spPr>
-        <p:style>
-          <a:lnRef idx="1">
-            <a:schemeClr val="accent1"/>
-          </a:lnRef>
-          <a:fillRef idx="3">
-            <a:schemeClr val="accent1"/>
-          </a:fillRef>
-          <a:effectRef idx="2">
-            <a:schemeClr val="accent1"/>
-          </a:effectRef>
-          <a:fontRef idx="minor">
-            <a:schemeClr val="lt1"/>
-          </a:fontRef>
-        </p:style>
-        <p:txBody>
-          <a:bodyPr rtlCol="0" anchor="ctr" wrap="square" lIns="164592" rIns="164592" tIns="109728" bIns="91440"/>
-          <a:lstStyle/>
-          <a:p>
-            <a:pPr algn="ctr">
-              <a:spcAft>
-                <a:spcPts val="400"/>
-              </a:spcAft>
-            </a:pPr>
-            <a:r>
-              <a:rPr sz="950" b="1">
-                <a:solidFill>
-                  <a:srgbClr val="C62828"/>
-                </a:solidFill>
-                <a:latin typeface="Arial"/>
-              </a:rPr>
-              <a:t>• 1. Biaya (Cost): </a:t>
-            </a:r>
-            <a:r>
-              <a:rPr sz="850">
-                <a:solidFill>
-                  <a:srgbClr val="2A2A3D"/>
-                </a:solidFill>
-                <a:latin typeface="Arial"/>
-              </a:rPr>
-              <a:t>Akumulasi pemborosan biaya cetak hingga Rp 24,56 Miliar/tahun akibat bahan baku berharga tinggi dan jam kerja mesin yang terbuang.</a:t>
-            </a:r>
-          </a:p>
-          <a:p>
-            <a:pPr>
-              <a:spcAft>
-                <a:spcPts val="400"/>
-              </a:spcAft>
-            </a:pPr>
-            <a:r>
-              <a:rPr sz="950" b="1">
-                <a:solidFill>
-                  <a:srgbClr val="C62828"/>
-                </a:solidFill>
-                <a:latin typeface="Arial"/>
-              </a:rPr>
-              <a:t>• 2. Mutu (Quality): </a:t>
-            </a:r>
-            <a:r>
-              <a:rPr sz="850">
-                <a:solidFill>
-                  <a:srgbClr val="2A2A3D"/>
-                </a:solidFill>
-                <a:latin typeface="Arial"/>
-              </a:rPr>
-              <a:t>Inschiet berfluktuasi tanpa kendali (puncak 5,11%). Penanganan mesin bersifat sementara karena tidak menyentuh akar masalah.</a:t>
-            </a:r>
-          </a:p>
-          <a:p>
-            <a:pPr>
-              <a:spcAft>
-                <a:spcPts val="400"/>
-              </a:spcAft>
-            </a:pPr>
-            <a:r>
-              <a:rPr sz="950" b="1">
-                <a:solidFill>
-                  <a:srgbClr val="C62828"/>
-                </a:solidFill>
-                <a:latin typeface="Arial"/>
-              </a:rPr>
-              <a:t>• 3. Kepatuhan (Compliance): </a:t>
-            </a:r>
-            <a:r>
-              <a:rPr sz="850">
-                <a:solidFill>
-                  <a:srgbClr val="2A2A3D"/>
-                </a:solidFill>
-                <a:latin typeface="Arial"/>
-              </a:rPr>
-              <a:t>Akuntabilitas pelacakan (traceability) dokumen negara terhambat karena pencatatan manual di buku folio tidak dapat diaudit digital.</a:t>
-            </a:r>
-          </a:p>
-          <a:p>
-            <a:pPr>
-              <a:spcAft>
-                <a:spcPts val="400"/>
-              </a:spcAft>
-            </a:pPr>
-            <a:r>
-              <a:rPr sz="950" b="1">
-                <a:solidFill>
-                  <a:srgbClr val="C62828"/>
-                </a:solidFill>
-                <a:latin typeface="Arial"/>
-              </a:rPr>
-              <a:t>• 4. K3L &amp; Lingkungan (ESG): </a:t>
-            </a:r>
-            <a:r>
-              <a:rPr sz="850">
-                <a:solidFill>
-                  <a:srgbClr val="2A2A3D"/>
-                </a:solidFill>
-                <a:latin typeface="Arial"/>
-              </a:rPr>
-              <a:t>Timbulan limbah padat kertas sekuriti mencapai 8,18 Juta lembar/tahun (±60–65 ton kertas terbuang) dan peningkatan kelelahan operator di shift malam.</a:t>
-            </a:r>
-          </a:p>
-          <a:p>
-            <a:pPr>
-              <a:spcAft>
-                <a:spcPts val="400"/>
-              </a:spcAft>
-            </a:pPr>
-            <a:r>
-              <a:rPr sz="950" b="1">
-                <a:solidFill>
-                  <a:srgbClr val="C62828"/>
-                </a:solidFill>
-                <a:latin typeface="Arial"/>
-              </a:rPr>
-              <a:t>• 5. Layanan (Service SLA): </a:t>
-            </a:r>
-            <a:r>
-              <a:rPr sz="850">
-                <a:solidFill>
-                  <a:srgbClr val="2A2A3D"/>
-                </a:solidFill>
-                <a:latin typeface="Arial"/>
-              </a:rPr>
-              <a:t>Risiko keterlambatan serah terima pesanan ke DJBC akibat antrean cetak pengganti yang menurunkan skor kepuasan pelanggan.</a:t>
-            </a:r>
-          </a:p>
-        </p:txBody>
-      </p:sp>
-    </p:spTree>
-  </p:cSld>
-  <p:clrMapOvr>
-    <a:masterClrMapping/>
-  </p:clrMapOvr>
-</p:sld>
-</file>
-
 <file path=ppt/slides/slide2.xml><?xml version="1.0" encoding="utf-8"?>
 <p:sld xmlns:a="http://schemas.openxmlformats.org/drawingml/2006/main" xmlns:r="http://schemas.openxmlformats.org/officeDocument/2006/relationships" xmlns:p="http://schemas.openxmlformats.org/presentationml/2006/main">
   <p:cSld name="Slide 2">
@@ -5603,7 +4701,7 @@
           <p:nvPr/>
         </p:nvPicPr>
         <p:blipFill>
-          <a:blip r:embed="rId4"/>
+          <a:blip r:embed="rId5"/>
           <a:stretch>
             <a:fillRect/>
           </a:stretch>
@@ -5627,7 +4725,7 @@
           <p:nvPr/>
         </p:nvPicPr>
         <p:blipFill>
-          <a:blip r:embed="rId3"/>
+          <a:blip r:embed="rId6"/>
           <a:stretch>
             <a:fillRect/>
           </a:stretch>
@@ -5689,7 +4787,7 @@
                 </a:solidFill>
                 <a:latin typeface="Arial"/>
               </a:rPr>
-              <a:t>01.1</a:t>
+              <a:t>01</a:t>
             </a:r>
           </a:p>
         </p:txBody>
@@ -5718,13 +4816,13 @@
           <a:p>
             <a:pPr algn="l"/>
             <a:r>
-              <a:rPr sz="2500" b="1">
+              <a:rPr sz="2400" b="1">
                 <a:solidFill>
                   <a:srgbClr val="20288F"/>
                 </a:solidFill>
                 <a:latin typeface="Arial"/>
               </a:rPr>
-              <a:t>Latar Belakang: Kondisi Saat Ini di Unit Cetak Pita Cukai</a:t>
+              <a:t>Latar Belakang: Urgensi Stabilitas Mutu &amp; Pencatatan Unit Cetak</a:t>
             </a:r>
           </a:p>
         </p:txBody>
@@ -5767,7 +4865,7 @@
                 </a:solidFill>
                 <a:latin typeface="Arial"/>
               </a:rPr>
-              <a:t>Bangun konteks: mengapa perbaikan pencatatan &amp; stabilitas mutu penting bagi operasional dan perusahaan.</a:t>
+              <a:t>Bangun konteks: mengapa perbaikan sistem pencatatan &amp; stabilitas mutu penting bagi operasional dan perusahaan.</a:t>
             </a:r>
           </a:p>
         </p:txBody>
@@ -5853,7 +4951,7 @@
                 </a:solidFill>
                 <a:latin typeface="Arial"/>
               </a:rPr>
-              <a:t>1. OPERASIONAL &amp; URGENSI PRODUK</a:t>
+              <a:t>1. KONDISI SAAT INI DI UNIT CETAK</a:t>
             </a:r>
           </a:p>
         </p:txBody>
@@ -5901,7 +4999,7 @@
           <a:p>
             <a:pPr algn="ctr">
               <a:spcAft>
-                <a:spcPts val="600"/>
+                <a:spcPts val="700"/>
               </a:spcAft>
             </a:pPr>
             <a:r>
@@ -5911,7 +5009,7 @@
                 </a:solidFill>
                 <a:latin typeface="Arial"/>
               </a:rPr>
-              <a:t>• Tugas Strategis Unit Cetak: </a:t>
+              <a:t>• Operasional 24 Jam Non-stop: </a:t>
             </a:r>
             <a:r>
               <a:rPr sz="950">
@@ -5920,13 +5018,13 @@
                 </a:solidFill>
                 <a:latin typeface="Arial"/>
               </a:rPr>
-              <a:t>Mencetak dokumen sekuriti negara Pita Cukai (PCHT &amp; MMEA) di bawah kewenangan DJBC Kemenkeu RI.</a:t>
+              <a:t>Unit Cetak Pita Cukai beroperasi 3 shift per hari dengan 6 mesin cetak offset (4 Komori: KMR 1–4, 2 Ryobi: RYB 1–2) dan didukung ±42 operator.</a:t>
             </a:r>
           </a:p>
           <a:p>
             <a:pPr>
               <a:spcAft>
-                <a:spcPts val="600"/>
+                <a:spcPts val="700"/>
               </a:spcAft>
             </a:pPr>
             <a:r>
@@ -5936,7 +5034,7 @@
                 </a:solidFill>
                 <a:latin typeface="Arial"/>
               </a:rPr>
-              <a:t>• Fitur Pengamanan Khusus: </a:t>
+              <a:t>• Pencatatan Fisik di Mesin: </a:t>
             </a:r>
             <a:r>
               <a:rPr sz="950">
@@ -5945,13 +5043,13 @@
                 </a:solidFill>
                 <a:latin typeface="Arial"/>
               </a:rPr>
-              <a:t>Dicetak dengan kertas sekuriti khusus, tinta UV, guilloche, dan hologram foil.</a:t>
+              <a:t>Pencatatan hasil cetak tiap mesin dan operator masih dilakukan secara manual menggunakan buku folio di meja masing-masing mesin.</a:t>
             </a:r>
           </a:p>
           <a:p>
             <a:pPr>
               <a:spcAft>
-                <a:spcPts val="600"/>
+                <a:spcPts val="700"/>
               </a:spcAft>
             </a:pPr>
             <a:r>
@@ -5961,7 +5059,7 @@
                 </a:solidFill>
                 <a:latin typeface="Arial"/>
               </a:rPr>
-              <a:t>• Skala Produksi Tinggi: </a:t>
+              <a:t>• Rekapitulasi Manual Terpisah: </a:t>
             </a:r>
             <a:r>
               <a:rPr sz="950">
@@ -5970,13 +5068,13 @@
                 </a:solidFill>
                 <a:latin typeface="Arial"/>
               </a:rPr>
-              <a:t>Rata-rata 160 Juta Lembar Cetak/tahun (Realisasi 2025: 177.636.930 Lembar Cetak — Sumber: SAP ZPPRSIPPC0012).</a:t>
+              <a:t>Catatan buku folio baru direkap saat evaluasi berkala pegawai, sementara sistem SAP di kantor hanya menyajikan tabel angka mentah.</a:t>
             </a:r>
           </a:p>
           <a:p>
             <a:pPr>
               <a:spcAft>
-                <a:spcPts val="600"/>
+                <a:spcPts val="700"/>
               </a:spcAft>
             </a:pPr>
             <a:r>
@@ -5986,7 +5084,7 @@
                 </a:solidFill>
                 <a:latin typeface="Arial"/>
               </a:rPr>
-              <a:t>• Pola Kerja 24 Jam Non-stop: </a:t>
+              <a:t>• Laporan Mutu Terpusat: </a:t>
             </a:r>
             <a:r>
               <a:rPr sz="950">
@@ -5995,32 +5093,7 @@
                 </a:solidFill>
                 <a:latin typeface="Arial"/>
               </a:rPr>
-              <a:t>Berjalan 3 shift per hari (Pagi, Sore, Malam) dengan 6 mesin cetak utama (4 Komori: KMR 1–4, 2 Ryobi: RYB 1–2) dan ±42 operator.</a:t>
-            </a:r>
-          </a:p>
-          <a:p>
-            <a:pPr>
-              <a:spcAft>
-                <a:spcPts val="600"/>
-              </a:spcAft>
-            </a:pPr>
-            <a:r>
-              <a:rPr sz="950" b="1">
-                <a:solidFill>
-                  <a:srgbClr val="20288F"/>
-                </a:solidFill>
-                <a:latin typeface="Arial"/>
-              </a:rPr>
-              <a:t>• Komitmen Mutu &amp; SLA: </a:t>
-            </a:r>
-            <a:r>
-              <a:rPr sz="950">
-                <a:solidFill>
-                  <a:srgbClr val="2A2A3D"/>
-                </a:solidFill>
-                <a:latin typeface="Arial"/>
-              </a:rPr>
-              <a:t>Kualitas harus dijaga ketat agar tidak ada risiko retur/komplain dari Bea Cukai dan menekan pemborosan bahan baku bernilai tinggi.</a:t>
+              <a:t>Laporan kerusakan dari modul Verifikasi QC hanya menampilkan total kerusakan general di level unit tanpa rincian mesin maupun shift.</a:t>
             </a:r>
           </a:p>
         </p:txBody>
@@ -6072,7 +5145,7 @@
                 </a:solidFill>
                 <a:latin typeface="Arial"/>
               </a:rPr>
-              <a:t>2. PENCATATAN EKSISTING DI UNIT</a:t>
+              <a:t>2. MENGAPA INI PENTING BAGI PERUSAHAAN</a:t>
             </a:r>
           </a:p>
         </p:txBody>
@@ -6120,7 +5193,7 @@
           <a:p>
             <a:pPr algn="ctr">
               <a:spcAft>
-                <a:spcPts val="600"/>
+                <a:spcPts val="700"/>
               </a:spcAft>
             </a:pPr>
             <a:r>
@@ -6130,7 +5203,7 @@
                 </a:solidFill>
                 <a:latin typeface="Arial"/>
               </a:rPr>
-              <a:t>• Data Kuantitas Manual di Buku Folio: </a:t>
+              <a:t>• Produk Strategis Negara: </a:t>
             </a:r>
             <a:r>
               <a:rPr sz="950">
@@ -6139,13 +5212,13 @@
                 </a:solidFill>
                 <a:latin typeface="Arial"/>
               </a:rPr>
-              <a:t>Pencatatan hasil cetak tiap mesin dan operator masih ditulis tangan di buku folio meja mesin.</a:t>
+              <a:t>Mencetak dokumen sekuriti Pita Cukai (PCHT &amp; MMEA) di bawah mandat DJBC Kemenkeu RI dengan fitur kertas sekuriti, tinta khusus, dan hologram.</a:t>
             </a:r>
           </a:p>
           <a:p>
             <a:pPr>
               <a:spcAft>
-                <a:spcPts val="600"/>
+                <a:spcPts val="700"/>
               </a:spcAft>
             </a:pPr>
             <a:r>
@@ -6155,7 +5228,7 @@
                 </a:solidFill>
                 <a:latin typeface="Arial"/>
               </a:rPr>
-              <a:t>• Rekap Data Masih Manual: </a:t>
+              <a:t>• Skala Order Masif: </a:t>
             </a:r>
             <a:r>
               <a:rPr sz="950">
@@ -6164,13 +5237,13 @@
                 </a:solidFill>
                 <a:latin typeface="Arial"/>
               </a:rPr>
-              <a:t>Catatan buku folio baru direkap saat Penilaian Pegawai Kuartalan / Akhir Kontrak. Proses lambat, makan waktu, dan rentan salah catat (human error).</a:t>
+              <a:t>Volume order sangat besar dengan rata-rata 160 Juta Lembar per tahun (Realisasi 2025: 177.636.930 Lembar Cetak — SAP ZPPRSIPPC0012).</a:t>
             </a:r>
           </a:p>
           <a:p>
             <a:pPr>
               <a:spcAft>
-                <a:spcPts val="600"/>
+                <a:spcPts val="700"/>
               </a:spcAft>
             </a:pPr>
             <a:r>
@@ -6180,7 +5253,7 @@
                 </a:solidFill>
                 <a:latin typeface="Arial"/>
               </a:rPr>
-              <a:t>• Data Kualitas Masih General: </a:t>
+              <a:t>• Komitmen SLA &amp; Reputasi: </a:t>
             </a:r>
             <a:r>
               <a:rPr sz="950">
@@ -6189,13 +5262,13 @@
                 </a:solidFill>
                 <a:latin typeface="Arial"/>
               </a:rPr>
-              <a:t>Laporan inschiet dari SAP (ZPPRSIPPC0012) dan Verifikasi hanya menampilkan total kerusakan unit secara umum/general.</a:t>
+              <a:t>Ketepatan jadwal pengiriman dan kesempurnaan cetak adalah kunci menjaga kepercayaan Bea Cukai serta mengamankan penerimaan cukai negara.</a:t>
             </a:r>
           </a:p>
           <a:p>
             <a:pPr>
               <a:spcAft>
-                <a:spcPts val="600"/>
+                <a:spcPts val="700"/>
               </a:spcAft>
             </a:pPr>
             <a:r>
@@ -6205,7 +5278,7 @@
                 </a:solidFill>
                 <a:latin typeface="Arial"/>
               </a:rPr>
-              <a:t>• Tidak Ada Rincian Mesin &amp; Shift: </a:t>
+              <a:t>• Nilai Bahan Baku Tinggi: </a:t>
             </a:r>
             <a:r>
               <a:rPr sz="950">
@@ -6214,32 +5287,7 @@
                 </a:solidFill>
                 <a:latin typeface="Arial"/>
               </a:rPr>
-              <a:t>Data dari sistem tidak merinci mesin mana yang mencetak rusak, nomor PO mana, serta tim/shift mana yang bertugas.</a:t>
-            </a:r>
-          </a:p>
-          <a:p>
-            <a:pPr>
-              <a:spcAft>
-                <a:spcPts val="600"/>
-              </a:spcAft>
-            </a:pPr>
-            <a:r>
-              <a:rPr sz="950" b="1">
-                <a:solidFill>
-                  <a:srgbClr val="6A2CC9"/>
-                </a:solidFill>
-                <a:latin typeface="Arial"/>
-              </a:rPr>
-              <a:t>• Data Belum Terhubung: </a:t>
-            </a:r>
-            <a:r>
-              <a:rPr sz="950">
-                <a:solidFill>
-                  <a:srgbClr val="2A2A3D"/>
-                </a:solidFill>
-                <a:latin typeface="Arial"/>
-              </a:rPr>
-              <a:t>Pencatatan jumlah cetak di mesin terpisah dari data mutu di verifikasi, sehingga tidak bisa dianalisis bersamaan.</a:t>
+              <a:t>Tingginya harga kertas sekuriti dan tinta khusus menuntut efisiensi maksimal agar tidak terjadi pemborosan biaya cetak ulang.</a:t>
             </a:r>
           </a:p>
         </p:txBody>
@@ -6259,7 +5307,7 @@
             <a:avLst/>
           </a:prstGeom>
           <a:solidFill>
-            <a:srgbClr val="C62828"/>
+            <a:srgbClr val="E65100"/>
           </a:solidFill>
           <a:ln>
             <a:noFill/>
@@ -6291,7 +5339,7 @@
                 </a:solidFill>
                 <a:latin typeface="Arial"/>
               </a:rPr>
-              <a:t>3. IMPLIKASI NYATA DI LAPANGAN</a:t>
+              <a:t>3. DATA AWAL PEMICU INOVASI</a:t>
             </a:r>
           </a:p>
         </p:txBody>
@@ -6311,11 +5359,11 @@
             <a:avLst/>
           </a:prstGeom>
           <a:solidFill>
-            <a:srgbClr val="FFF5F5"/>
+            <a:srgbClr val="FFF9E6"/>
           </a:solidFill>
           <a:ln w="12700">
             <a:solidFill>
-              <a:srgbClr val="F5C2C2"/>
+              <a:srgbClr val="FFE082"/>
             </a:solidFill>
           </a:ln>
         </p:spPr>
@@ -6339,17 +5387,17 @@
           <a:p>
             <a:pPr algn="ctr">
               <a:spcAft>
-                <a:spcPts val="600"/>
+                <a:spcPts val="700"/>
               </a:spcAft>
             </a:pPr>
             <a:r>
               <a:rPr sz="950" b="1">
                 <a:solidFill>
-                  <a:srgbClr val="C62828"/>
-                </a:solidFill>
-                <a:latin typeface="Arial"/>
-              </a:rPr>
-              <a:t>• Penanganan Mesin Jadi Lambat: </a:t>
+                  <a:srgbClr val="E65100"/>
+                </a:solidFill>
+                <a:latin typeface="Arial"/>
+              </a:rPr>
+              <a:t>• Pencapaian SIRINE 2024: </a:t>
             </a:r>
             <a:r>
               <a:rPr sz="950">
@@ -6358,23 +5406,23 @@
                 </a:solidFill>
                 <a:latin typeface="Arial"/>
               </a:rPr>
-              <a:t>Saat ada jenis kerusakan dominan (misal: blobor), teknisi tidak tahu mesin mana sumber masalahnya. Pemeriksaan terpaksa dilakukan bergilir ke 6 mesin (&gt; 1 shift / &gt; 8 jam downtime per mesin).</a:t>
+              <a:t>Berhasil menurunkan inschiet tahunan dari 5,61% ke 4,06% dengan menyajikan data jenis kerusakan umum.</a:t>
             </a:r>
           </a:p>
           <a:p>
             <a:pPr>
               <a:spcAft>
-                <a:spcPts val="600"/>
+                <a:spcPts val="700"/>
               </a:spcAft>
             </a:pPr>
             <a:r>
               <a:rPr sz="950" b="1">
                 <a:solidFill>
-                  <a:srgbClr val="C62828"/>
-                </a:solidFill>
-                <a:latin typeface="Arial"/>
-              </a:rPr>
-              <a:t>• Evaluasi Operator Kurang Objektif: </a:t>
+                  <a:srgbClr val="E65100"/>
+                </a:solidFill>
+                <a:latin typeface="Arial"/>
+              </a:rPr>
+              <a:t>• Titik Jenuh &amp; Fluktuasi 2025: </a:t>
             </a:r>
             <a:r>
               <a:rPr sz="950">
@@ -6383,23 +5431,23 @@
                 </a:solidFill>
                 <a:latin typeface="Arial"/>
               </a:rPr>
-              <a:t>Kepala unit sulit memberi coaching atau feedback yang cepat karena rekam jejak kuantitas &amp; kualitas baru diketahui berbulan-bulan setelah pekerjaan selesai.</a:t>
+              <a:t>Sepanjang 2025 inschiet kembali berfluktuasi dengan rata-rata 4,61% dan puncaknya di Q4 mencapai 5,11% (Sumber: SAP ZPPRSIPPC0012).</a:t>
             </a:r>
           </a:p>
           <a:p>
             <a:pPr>
               <a:spcAft>
-                <a:spcPts val="600"/>
+                <a:spcPts val="700"/>
               </a:spcAft>
             </a:pPr>
             <a:r>
               <a:rPr sz="950" b="1">
                 <a:solidFill>
-                  <a:srgbClr val="C62828"/>
-                </a:solidFill>
-                <a:latin typeface="Arial"/>
-              </a:rPr>
-              <a:t>• Diagnosa Masalah Belum Tepat Sasaran: </a:t>
+                  <a:srgbClr val="E65100"/>
+                </a:solidFill>
+                <a:latin typeface="Arial"/>
+              </a:rPr>
+              <a:t>• Tantangan Volume Baru: </a:t>
             </a:r>
             <a:r>
               <a:rPr sz="950">
@@ -6408,23 +5456,23 @@
                 </a:solidFill>
                 <a:latin typeface="Arial"/>
               </a:rPr>
-              <a:t>Sulit membedakan apakah lonjakan inschiet murni karena kondisi komponen mesin (Machine) atau faktor variasi metode/kelelahan di shift tertentu (Man &amp; Method).</a:t>
+              <a:t>Saat order melonjak di Q4, sistem SIRINE 2024 tidak mampu mendeteksi mesin mana yang menjadi pemicu utama kenaikan kerusakan.</a:t>
             </a:r>
           </a:p>
           <a:p>
             <a:pPr>
               <a:spcAft>
-                <a:spcPts val="600"/>
+                <a:spcPts val="700"/>
               </a:spcAft>
             </a:pPr>
             <a:r>
               <a:rPr sz="950" b="1">
                 <a:solidFill>
-                  <a:srgbClr val="C62828"/>
-                </a:solidFill>
-                <a:latin typeface="Arial"/>
-              </a:rPr>
-              <a:t>• Potensi Kerugian Tambah Cetak: </a:t>
+                  <a:srgbClr val="E65100"/>
+                </a:solidFill>
+                <a:latin typeface="Arial"/>
+              </a:rPr>
+              <a:t>• Pemicu Kebutuhan DSS: </a:t>
             </a:r>
             <a:r>
               <a:rPr sz="950">
@@ -6433,7 +5481,7 @@
                 </a:solidFill>
                 <a:latin typeface="Arial"/>
               </a:rPr>
-              <a:t>Mesin yang bermasalah terlambat ditangani dan terus beroperasi menghasilkan lembar rusak bernilai miliaran rupiah.</a:t>
+              <a:t>Diperlukan sistem cerdas yang mampu menghubungkan data kerusakan QC dengan data mesin dan shift operasional secara real-time.</a:t>
             </a:r>
           </a:p>
         </p:txBody>
@@ -6465,7 +5513,7 @@
           <p:nvPr/>
         </p:nvPicPr>
         <p:blipFill>
-          <a:blip r:embed="rId2"/>
+          <a:blip r:embed="rId5"/>
           <a:stretch>
             <a:fillRect/>
           </a:stretch>
@@ -6489,7 +5537,7 @@
           <p:nvPr/>
         </p:nvPicPr>
         <p:blipFill>
-          <a:blip r:embed="rId3"/>
+          <a:blip r:embed="rId6"/>
           <a:stretch>
             <a:fillRect/>
           </a:stretch>
@@ -6551,7 +5599,7 @@
                 </a:solidFill>
                 <a:latin typeface="Arial"/>
               </a:rPr>
-              <a:t>01.2</a:t>
+              <a:t>02.1</a:t>
             </a:r>
           </a:p>
         </p:txBody>
@@ -6580,13 +5628,13 @@
           <a:p>
             <a:pPr algn="l"/>
             <a:r>
-              <a:rPr sz="2500" b="1">
+              <a:rPr sz="2400" b="1">
                 <a:solidFill>
                   <a:srgbClr val="20288F"/>
                 </a:solidFill>
                 <a:latin typeface="Arial"/>
               </a:rPr>
-              <a:t>Latar Belakang: Data Awal Inschiet 2025 &amp; Skala Dampak Finansial</a:t>
+              <a:t>Masalah: Keterbatasan Data Granular &amp; Titik Buta Operasional</a:t>
             </a:r>
           </a:p>
         </p:txBody>
@@ -6629,7 +5677,7 @@
                 </a:solidFill>
                 <a:latin typeface="Arial"/>
               </a:rPr>
-              <a:t>Data awal pemicu (angka, periode, sumber) dan kalkulasi potensi pemborosan biaya tambah cetak.</a:t>
+              <a:t>Nyatakan masalah operasional nyata dan terukur — apa yang terjadi, di unit mana, sejak kapan, dan siapa terdampak.</a:t>
             </a:r>
           </a:p>
         </p:txBody>
@@ -6670,25 +5718,23 @@
       </p:sp>
       <p:sp>
         <p:nvSpPr>
-          <p:cNvPr id="8" name="Rounded Rectangle 7"/>
+          <p:cNvPr id="8" name="Rectangle 7"/>
           <p:cNvSpPr/>
           <p:nvPr/>
         </p:nvSpPr>
         <p:spPr>
           <a:xfrm>
             <a:off x="548640" y="1755648"/>
-            <a:ext cx="2615184" cy="1024128"/>
-          </a:xfrm>
-          <a:prstGeom prst="roundRect">
+            <a:ext cx="3520440" cy="365760"/>
+          </a:xfrm>
+          <a:prstGeom prst="rect">
             <a:avLst/>
           </a:prstGeom>
           <a:solidFill>
-            <a:srgbClr val="F4F7FE"/>
+            <a:srgbClr val="20288F"/>
           </a:solidFill>
-          <a:ln w="19050">
-            <a:solidFill>
-              <a:srgbClr val="D2DCF5"/>
-            </a:solidFill>
+          <a:ln>
+            <a:noFill/>
           </a:ln>
         </p:spPr>
         <p:style>
@@ -6706,65 +5752,43 @@
           </a:fontRef>
         </p:style>
         <p:txBody>
-          <a:bodyPr rtlCol="0" anchor="ctr" wrap="square" tIns="91440"/>
+          <a:bodyPr rtlCol="0" anchor="ctr"/>
           <a:lstStyle/>
           <a:p>
             <a:pPr algn="ctr"/>
             <a:r>
-              <a:rPr sz="850" b="1">
-                <a:solidFill>
-                  <a:srgbClr val="20288F"/>
-                </a:solidFill>
-                <a:latin typeface="Arial"/>
-              </a:rPr>
-              <a:t>TOTAL ORDER 2025</a:t>
-            </a:r>
-          </a:p>
-          <a:p>
-            <a:pPr algn="ctr"/>
-            <a:r>
-              <a:rPr sz="1600" b="1">
-                <a:solidFill>
-                  <a:srgbClr val="20288F"/>
-                </a:solidFill>
-                <a:latin typeface="Arial"/>
-              </a:rPr>
-              <a:t>177.636.930 LK</a:t>
-            </a:r>
-          </a:p>
-          <a:p>
-            <a:pPr algn="ctr"/>
-            <a:r>
-              <a:rPr sz="750">
-                <a:solidFill>
-                  <a:srgbClr val="2A2A3D"/>
-                </a:solidFill>
-                <a:latin typeface="Arial"/>
-              </a:rPr>
-              <a:t>Sumber: SAP Production Order (ZPPRSIPPC0012)</a:t>
-            </a:r>
-          </a:p>
-        </p:txBody>
-      </p:sp>
-      <p:sp>
-        <p:nvSpPr>
-          <p:cNvPr id="9" name="Rectangle 8"/>
-          <p:cNvSpPr/>
-          <p:nvPr/>
-        </p:nvSpPr>
-        <p:spPr>
-          <a:xfrm>
-            <a:off x="548640" y="1755648"/>
-            <a:ext cx="2615184" cy="54864"/>
-          </a:xfrm>
-          <a:prstGeom prst="rect">
+              <a:rPr sz="1100" b="1">
+                <a:solidFill>
+                  <a:srgbClr val="FFFFFF"/>
+                </a:solidFill>
+                <a:latin typeface="Arial"/>
+              </a:rPr>
+              <a:t>1. TITIK BUTA PASCA-SIRINE 2024</a:t>
+            </a:r>
+          </a:p>
+        </p:txBody>
+      </p:sp>
+      <p:sp>
+        <p:nvSpPr>
+          <p:cNvPr id="9" name="Rounded Rectangle 8"/>
+          <p:cNvSpPr/>
+          <p:nvPr/>
+        </p:nvSpPr>
+        <p:spPr>
+          <a:xfrm>
+            <a:off x="548640" y="2121408"/>
+            <a:ext cx="3520440" cy="4160520"/>
+          </a:xfrm>
+          <a:prstGeom prst="roundRect">
             <a:avLst/>
           </a:prstGeom>
           <a:solidFill>
-            <a:srgbClr val="20288F"/>
+            <a:srgbClr val="F4F7FE"/>
           </a:solidFill>
-          <a:ln>
-            <a:noFill/>
+          <a:ln w="12700">
+            <a:solidFill>
+              <a:srgbClr val="D2DCF5"/>
+            </a:solidFill>
           </a:ln>
         </p:spPr>
         <p:style>
@@ -6782,34 +5806,129 @@
           </a:fontRef>
         </p:style>
         <p:txBody>
-          <a:bodyPr rtlCol="0" anchor="ctr"/>
-          <a:lstStyle/>
-          <a:p>
-            <a:pPr algn="ctr"/>
-          </a:p>
-        </p:txBody>
-      </p:sp>
-      <p:sp>
-        <p:nvSpPr>
-          <p:cNvPr id="10" name="Rounded Rectangle 9"/>
-          <p:cNvSpPr/>
-          <p:nvPr/>
-        </p:nvSpPr>
-        <p:spPr>
-          <a:xfrm>
-            <a:off x="3374136" y="1755648"/>
-            <a:ext cx="2615184" cy="1024128"/>
-          </a:xfrm>
-          <a:prstGeom prst="roundRect">
+          <a:bodyPr rtlCol="0" anchor="ctr" wrap="square" lIns="164592" rIns="164592" tIns="137160" bIns="137160"/>
+          <a:lstStyle/>
+          <a:p>
+            <a:pPr algn="ctr">
+              <a:spcAft>
+                <a:spcPts val="700"/>
+              </a:spcAft>
+            </a:pPr>
+            <a:r>
+              <a:rPr sz="950" b="1">
+                <a:solidFill>
+                  <a:srgbClr val="20288F"/>
+                </a:solidFill>
+                <a:latin typeface="Arial"/>
+              </a:rPr>
+              <a:t>• Capaian SIRINE 3.5 (2024): </a:t>
+            </a:r>
+            <a:r>
+              <a:rPr sz="950">
+                <a:solidFill>
+                  <a:srgbClr val="2A2A3D"/>
+                </a:solidFill>
+                <a:latin typeface="Arial"/>
+              </a:rPr>
+              <a:t>Berhasil menjawab 'jenis kerusakan apa' yang mendominasi dan menekan inschiet ke 4,06% di akhir 2024.</a:t>
+            </a:r>
+          </a:p>
+          <a:p>
+            <a:pPr>
+              <a:spcAft>
+                <a:spcPts val="700"/>
+              </a:spcAft>
+            </a:pPr>
+            <a:r>
+              <a:rPr sz="950" b="1">
+                <a:solidFill>
+                  <a:srgbClr val="20288F"/>
+                </a:solidFill>
+                <a:latin typeface="Arial"/>
+              </a:rPr>
+              <a:t>• Kesenjangan Baru di 2025: </a:t>
+            </a:r>
+            <a:r>
+              <a:rPr sz="950">
+                <a:solidFill>
+                  <a:srgbClr val="2A2A3D"/>
+                </a:solidFill>
+                <a:latin typeface="Arial"/>
+              </a:rPr>
+              <a:t>Data jenis kerusakan sudah ada, tetapi dengan 6 mesin cetak, belum ada data untuk tahu mesin mana yang menjadi sumber masalah utama.</a:t>
+            </a:r>
+          </a:p>
+          <a:p>
+            <a:pPr>
+              <a:spcAft>
+                <a:spcPts val="700"/>
+              </a:spcAft>
+            </a:pPr>
+            <a:r>
+              <a:rPr sz="950" b="1">
+                <a:solidFill>
+                  <a:srgbClr val="20288F"/>
+                </a:solidFill>
+                <a:latin typeface="Arial"/>
+              </a:rPr>
+              <a:t>• Ketiadaan Data Kondisi Kerja: </a:t>
+            </a:r>
+            <a:r>
+              <a:rPr sz="950">
+                <a:solidFill>
+                  <a:srgbClr val="2A2A3D"/>
+                </a:solidFill>
+                <a:latin typeface="Arial"/>
+              </a:rPr>
+              <a:t>Belum dapat diketahui apakah tingginya inschiet lebih dipengaruhi oleh faktor teknis mesin atau faktor kondisi kerja (shift, SOP, kelelahan).</a:t>
+            </a:r>
+          </a:p>
+          <a:p>
+            <a:pPr>
+              <a:spcAft>
+                <a:spcPts val="700"/>
+              </a:spcAft>
+            </a:pPr>
+            <a:r>
+              <a:rPr sz="950" b="1">
+                <a:solidFill>
+                  <a:srgbClr val="20288F"/>
+                </a:solidFill>
+                <a:latin typeface="Arial"/>
+              </a:rPr>
+              <a:t>• Lokasi &amp; Periode Masalah: </a:t>
+            </a:r>
+            <a:r>
+              <a:rPr sz="950">
+                <a:solidFill>
+                  <a:srgbClr val="2A2A3D"/>
+                </a:solidFill>
+                <a:latin typeface="Arial"/>
+              </a:rPr>
+              <a:t>Berpusat pada proses cetak sheet-fed offset di Unit Cetak Pita Cukai sejak Januari 2025.</a:t>
+            </a:r>
+          </a:p>
+        </p:txBody>
+      </p:sp>
+      <p:sp>
+        <p:nvSpPr>
+          <p:cNvPr id="10" name="Rectangle 9"/>
+          <p:cNvSpPr/>
+          <p:nvPr/>
+        </p:nvSpPr>
+        <p:spPr>
+          <a:xfrm>
+            <a:off x="4325112" y="1755648"/>
+            <a:ext cx="3520440" cy="365760"/>
+          </a:xfrm>
+          <a:prstGeom prst="rect">
             <a:avLst/>
           </a:prstGeom>
           <a:solidFill>
-            <a:srgbClr val="FFF9E6"/>
+            <a:srgbClr val="6A2CC9"/>
           </a:solidFill>
-          <a:ln w="19050">
-            <a:solidFill>
-              <a:srgbClr val="FFE082"/>
-            </a:solidFill>
+          <a:ln>
+            <a:noFill/>
           </a:ln>
         </p:spPr>
         <p:style>
@@ -6827,65 +5946,43 @@
           </a:fontRef>
         </p:style>
         <p:txBody>
-          <a:bodyPr rtlCol="0" anchor="ctr" wrap="square" tIns="91440"/>
+          <a:bodyPr rtlCol="0" anchor="ctr"/>
           <a:lstStyle/>
           <a:p>
             <a:pPr algn="ctr"/>
             <a:r>
-              <a:rPr sz="850" b="1">
-                <a:solidFill>
-                  <a:srgbClr val="E65100"/>
-                </a:solidFill>
-                <a:latin typeface="Arial"/>
-              </a:rPr>
-              <a:t>BASELINE INSCHIET 2025</a:t>
-            </a:r>
-          </a:p>
-          <a:p>
-            <a:pPr algn="ctr"/>
-            <a:r>
-              <a:rPr sz="1600" b="1">
-                <a:solidFill>
-                  <a:srgbClr val="E65100"/>
-                </a:solidFill>
-                <a:latin typeface="Arial"/>
-              </a:rPr>
-              <a:t>4,61%</a:t>
-            </a:r>
-          </a:p>
-          <a:p>
-            <a:pPr algn="ctr"/>
-            <a:r>
-              <a:rPr sz="750">
-                <a:solidFill>
-                  <a:srgbClr val="2A2A3D"/>
-                </a:solidFill>
-                <a:latin typeface="Arial"/>
-              </a:rPr>
-              <a:t>Rata-rata tahunan (Puncak Q4: 5,11%)</a:t>
-            </a:r>
-          </a:p>
-        </p:txBody>
-      </p:sp>
-      <p:sp>
-        <p:nvSpPr>
-          <p:cNvPr id="11" name="Rectangle 10"/>
-          <p:cNvSpPr/>
-          <p:nvPr/>
-        </p:nvSpPr>
-        <p:spPr>
-          <a:xfrm>
-            <a:off x="3374136" y="1755648"/>
-            <a:ext cx="2615184" cy="54864"/>
-          </a:xfrm>
-          <a:prstGeom prst="rect">
+              <a:rPr sz="1100" b="1">
+                <a:solidFill>
+                  <a:srgbClr val="FFFFFF"/>
+                </a:solidFill>
+                <a:latin typeface="Arial"/>
+              </a:rPr>
+              <a:t>2. DUA KASUS NYATA DI LAPANGAN</a:t>
+            </a:r>
+          </a:p>
+        </p:txBody>
+      </p:sp>
+      <p:sp>
+        <p:nvSpPr>
+          <p:cNvPr id="11" name="Rounded Rectangle 10"/>
+          <p:cNvSpPr/>
+          <p:nvPr/>
+        </p:nvSpPr>
+        <p:spPr>
+          <a:xfrm>
+            <a:off x="4325112" y="2121408"/>
+            <a:ext cx="3520440" cy="4160520"/>
+          </a:xfrm>
+          <a:prstGeom prst="roundRect">
             <a:avLst/>
           </a:prstGeom>
           <a:solidFill>
-            <a:srgbClr val="E65100"/>
+            <a:srgbClr val="F8F6FE"/>
           </a:solidFill>
-          <a:ln>
-            <a:noFill/>
+          <a:ln w="12700">
+            <a:solidFill>
+              <a:srgbClr val="D9CEF7"/>
+            </a:solidFill>
           </a:ln>
         </p:spPr>
         <p:style>
@@ -6903,34 +6000,129 @@
           </a:fontRef>
         </p:style>
         <p:txBody>
-          <a:bodyPr rtlCol="0" anchor="ctr"/>
-          <a:lstStyle/>
-          <a:p>
-            <a:pPr algn="ctr"/>
-          </a:p>
-        </p:txBody>
-      </p:sp>
-      <p:sp>
-        <p:nvSpPr>
-          <p:cNvPr id="12" name="Rounded Rectangle 11"/>
-          <p:cNvSpPr/>
-          <p:nvPr/>
-        </p:nvSpPr>
-        <p:spPr>
-          <a:xfrm>
-            <a:off x="6199632" y="1755648"/>
-            <a:ext cx="2615184" cy="1024128"/>
-          </a:xfrm>
-          <a:prstGeom prst="roundRect">
+          <a:bodyPr rtlCol="0" anchor="ctr" wrap="square" lIns="164592" rIns="164592" tIns="137160" bIns="137160"/>
+          <a:lstStyle/>
+          <a:p>
+            <a:pPr algn="ctr">
+              <a:spcAft>
+                <a:spcPts val="700"/>
+              </a:spcAft>
+            </a:pPr>
+            <a:r>
+              <a:rPr sz="950" b="1">
+                <a:solidFill>
+                  <a:srgbClr val="6A2CC9"/>
+                </a:solidFill>
+                <a:latin typeface="Arial"/>
+              </a:rPr>
+              <a:t>• Kasus 1 – Penelusuran Spekulatif: </a:t>
+            </a:r>
+            <a:r>
+              <a:rPr sz="950">
+                <a:solidFill>
+                  <a:srgbClr val="2A2A3D"/>
+                </a:solidFill>
+                <a:latin typeface="Arial"/>
+              </a:rPr>
+              <a:t>Bulan Juni 2025 kerusakan blobor mendominasi. Tanpa data per-mesin, teknisi memeriksa 6 mesin bergilir (trial-and-error).</a:t>
+            </a:r>
+          </a:p>
+          <a:p>
+            <a:pPr>
+              <a:spcAft>
+                <a:spcPts val="700"/>
+              </a:spcAft>
+            </a:pPr>
+            <a:r>
+              <a:rPr sz="950" b="1">
+                <a:solidFill>
+                  <a:srgbClr val="6A2CC9"/>
+                </a:solidFill>
+                <a:latin typeface="Arial"/>
+              </a:rPr>
+              <a:t>• Dampak Downtime Kasus 1: </a:t>
+            </a:r>
+            <a:r>
+              <a:rPr sz="950">
+                <a:solidFill>
+                  <a:srgbClr val="2A2A3D"/>
+                </a:solidFill>
+                <a:latin typeface="Arial"/>
+              </a:rPr>
+              <a:t>Sumber masalah ternyata di Komori 3 (KMR3). Diperiksa terakhir, timbul downtime &gt; 8 jam dan mesin terus mencetak lembar rusak.</a:t>
+            </a:r>
+          </a:p>
+          <a:p>
+            <a:pPr>
+              <a:spcAft>
+                <a:spcPts val="700"/>
+              </a:spcAft>
+            </a:pPr>
+            <a:r>
+              <a:rPr sz="950" b="1">
+                <a:solidFill>
+                  <a:srgbClr val="6A2CC9"/>
+                </a:solidFill>
+                <a:latin typeface="Arial"/>
+              </a:rPr>
+              <a:t>• Kasus 2 – Dilema Mesin vs Shift: </a:t>
+            </a:r>
+            <a:r>
+              <a:rPr sz="950">
+                <a:solidFill>
+                  <a:srgbClr val="2A2A3D"/>
+                </a:solidFill>
+                <a:latin typeface="Arial"/>
+              </a:rPr>
+              <a:t>Mesin KMR3 pada shift malam mencatat inschiet 8,5%, sedangkan shift pagi di mesin yang sama hanya 2,5%.</a:t>
+            </a:r>
+          </a:p>
+          <a:p>
+            <a:pPr>
+              <a:spcAft>
+                <a:spcPts val="700"/>
+              </a:spcAft>
+            </a:pPr>
+            <a:r>
+              <a:rPr sz="950" b="1">
+                <a:solidFill>
+                  <a:srgbClr val="6A2CC9"/>
+                </a:solidFill>
+                <a:latin typeface="Arial"/>
+              </a:rPr>
+              <a:t>• Salah Diagnosa Kasus 2: </a:t>
+            </a:r>
+            <a:r>
+              <a:rPr sz="950">
+                <a:solidFill>
+                  <a:srgbClr val="2A2A3D"/>
+                </a:solidFill>
+                <a:latin typeface="Arial"/>
+              </a:rPr>
+              <a:t>Tanpa data per-shift, perbaikan selalu fokus mengutak-atik mesin, padahal masalahnya ada pada variasi shift atau SOP penyetelan tinta.</a:t>
+            </a:r>
+          </a:p>
+        </p:txBody>
+      </p:sp>
+      <p:sp>
+        <p:nvSpPr>
+          <p:cNvPr id="12" name="Rectangle 11"/>
+          <p:cNvSpPr/>
+          <p:nvPr/>
+        </p:nvSpPr>
+        <p:spPr>
+          <a:xfrm>
+            <a:off x="8101584" y="1755648"/>
+            <a:ext cx="3520440" cy="365760"/>
+          </a:xfrm>
+          <a:prstGeom prst="rect">
             <a:avLst/>
           </a:prstGeom>
           <a:solidFill>
-            <a:srgbClr val="FFF5F5"/>
+            <a:srgbClr val="C62828"/>
           </a:solidFill>
-          <a:ln w="19050">
-            <a:solidFill>
-              <a:srgbClr val="F5C2C2"/>
-            </a:solidFill>
+          <a:ln>
+            <a:noFill/>
           </a:ln>
         </p:spPr>
         <p:style>
@@ -6948,65 +6140,43 @@
           </a:fontRef>
         </p:style>
         <p:txBody>
-          <a:bodyPr rtlCol="0" anchor="ctr" wrap="square" tIns="91440"/>
+          <a:bodyPr rtlCol="0" anchor="ctr"/>
           <a:lstStyle/>
           <a:p>
             <a:pPr algn="ctr"/>
             <a:r>
-              <a:rPr sz="850" b="1">
-                <a:solidFill>
-                  <a:srgbClr val="C62828"/>
-                </a:solidFill>
-                <a:latin typeface="Arial"/>
-              </a:rPr>
-              <a:t>LEMBAR RUSAK BASELINE</a:t>
-            </a:r>
-          </a:p>
-          <a:p>
-            <a:pPr algn="ctr"/>
-            <a:r>
-              <a:rPr sz="1600" b="1">
-                <a:solidFill>
-                  <a:srgbClr val="C62828"/>
-                </a:solidFill>
-                <a:latin typeface="Arial"/>
-              </a:rPr>
-              <a:t>8.189.062 Lembar</a:t>
-            </a:r>
-          </a:p>
-          <a:p>
-            <a:pPr algn="ctr"/>
-            <a:r>
-              <a:rPr sz="750">
-                <a:solidFill>
-                  <a:srgbClr val="2A2A3D"/>
-                </a:solidFill>
-                <a:latin typeface="Arial"/>
-              </a:rPr>
-              <a:t>Jumlah lembar rusak per tahun di baseline 4,61%</a:t>
-            </a:r>
-          </a:p>
-        </p:txBody>
-      </p:sp>
-      <p:sp>
-        <p:nvSpPr>
-          <p:cNvPr id="13" name="Rectangle 12"/>
-          <p:cNvSpPr/>
-          <p:nvPr/>
-        </p:nvSpPr>
-        <p:spPr>
-          <a:xfrm>
-            <a:off x="6199632" y="1755648"/>
-            <a:ext cx="2615184" cy="54864"/>
-          </a:xfrm>
-          <a:prstGeom prst="rect">
+              <a:rPr sz="1100" b="1">
+                <a:solidFill>
+                  <a:srgbClr val="FFFFFF"/>
+                </a:solidFill>
+                <a:latin typeface="Arial"/>
+              </a:rPr>
+              <a:t>3. PIHAK TERDAMPAK LANGSUNG</a:t>
+            </a:r>
+          </a:p>
+        </p:txBody>
+      </p:sp>
+      <p:sp>
+        <p:nvSpPr>
+          <p:cNvPr id="13" name="Rounded Rectangle 12"/>
+          <p:cNvSpPr/>
+          <p:nvPr/>
+        </p:nvSpPr>
+        <p:spPr>
+          <a:xfrm>
+            <a:off x="8101584" y="2121408"/>
+            <a:ext cx="3520440" cy="4160520"/>
+          </a:xfrm>
+          <a:prstGeom prst="roundRect">
             <a:avLst/>
           </a:prstGeom>
           <a:solidFill>
-            <a:srgbClr val="C62828"/>
+            <a:srgbClr val="FFF5F5"/>
           </a:solidFill>
-          <a:ln>
-            <a:noFill/>
+          <a:ln w="12700">
+            <a:solidFill>
+              <a:srgbClr val="F5C2C2"/>
+            </a:solidFill>
           </a:ln>
         </p:spPr>
         <p:style>
@@ -7024,516 +6194,131 @@
           </a:fontRef>
         </p:style>
         <p:txBody>
-          <a:bodyPr rtlCol="0" anchor="ctr"/>
-          <a:lstStyle/>
-          <a:p>
-            <a:pPr algn="ctr"/>
-          </a:p>
-        </p:txBody>
-      </p:sp>
-      <p:sp>
-        <p:nvSpPr>
-          <p:cNvPr id="14" name="Rounded Rectangle 13"/>
-          <p:cNvSpPr/>
-          <p:nvPr/>
-        </p:nvSpPr>
-        <p:spPr>
-          <a:xfrm>
-            <a:off x="9025128" y="1755648"/>
-            <a:ext cx="2615184" cy="1024128"/>
-          </a:xfrm>
-          <a:prstGeom prst="roundRect">
-            <a:avLst/>
-          </a:prstGeom>
-          <a:solidFill>
-            <a:srgbClr val="F8F6FE"/>
-          </a:solidFill>
-          <a:ln w="19050">
-            <a:solidFill>
-              <a:srgbClr val="D9CEF7"/>
-            </a:solidFill>
-          </a:ln>
-        </p:spPr>
-        <p:style>
-          <a:lnRef idx="1">
-            <a:schemeClr val="accent1"/>
-          </a:lnRef>
-          <a:fillRef idx="3">
-            <a:schemeClr val="accent1"/>
-          </a:fillRef>
-          <a:effectRef idx="2">
-            <a:schemeClr val="accent1"/>
-          </a:effectRef>
-          <a:fontRef idx="minor">
-            <a:schemeClr val="lt1"/>
-          </a:fontRef>
-        </p:style>
-        <p:txBody>
-          <a:bodyPr rtlCol="0" anchor="ctr" wrap="square" tIns="91440"/>
-          <a:lstStyle/>
-          <a:p>
-            <a:pPr algn="ctr"/>
-            <a:r>
-              <a:rPr sz="850" b="1">
-                <a:solidFill>
-                  <a:srgbClr val="6A2CC9"/>
-                </a:solidFill>
-                <a:latin typeface="Arial"/>
-              </a:rPr>
-              <a:t>POTENSI BIAYA TERBUANG</a:t>
-            </a:r>
-          </a:p>
-          <a:p>
-            <a:pPr algn="ctr"/>
-            <a:r>
-              <a:rPr sz="1600" b="1">
-                <a:solidFill>
-                  <a:srgbClr val="6A2CC9"/>
-                </a:solidFill>
-                <a:latin typeface="Arial"/>
-              </a:rPr>
-              <a:t>Rp 24,56 Miliar</a:t>
-            </a:r>
-          </a:p>
-          <a:p>
-            <a:pPr algn="ctr"/>
-            <a:r>
-              <a:rPr sz="750">
-                <a:solidFill>
-                  <a:srgbClr val="2A2A3D"/>
-                </a:solidFill>
-                <a:latin typeface="Arial"/>
-              </a:rPr>
-              <a:t>Estimasi biaya cetak @ Rp 3.000 / lembar</a:t>
-            </a:r>
-          </a:p>
-        </p:txBody>
-      </p:sp>
-      <p:sp>
-        <p:nvSpPr>
-          <p:cNvPr id="15" name="Rectangle 14"/>
-          <p:cNvSpPr/>
-          <p:nvPr/>
-        </p:nvSpPr>
-        <p:spPr>
-          <a:xfrm>
-            <a:off x="9025128" y="1755648"/>
-            <a:ext cx="2615184" cy="54864"/>
-          </a:xfrm>
-          <a:prstGeom prst="rect">
-            <a:avLst/>
-          </a:prstGeom>
-          <a:solidFill>
-            <a:srgbClr val="6A2CC9"/>
-          </a:solidFill>
-          <a:ln>
-            <a:noFill/>
-          </a:ln>
-        </p:spPr>
-        <p:style>
-          <a:lnRef idx="1">
-            <a:schemeClr val="accent1"/>
-          </a:lnRef>
-          <a:fillRef idx="3">
-            <a:schemeClr val="accent1"/>
-          </a:fillRef>
-          <a:effectRef idx="2">
-            <a:schemeClr val="accent1"/>
-          </a:effectRef>
-          <a:fontRef idx="minor">
-            <a:schemeClr val="lt1"/>
-          </a:fontRef>
-        </p:style>
-        <p:txBody>
-          <a:bodyPr rtlCol="0" anchor="ctr"/>
-          <a:lstStyle/>
-          <a:p>
-            <a:pPr algn="ctr"/>
-          </a:p>
-        </p:txBody>
-      </p:sp>
-      <p:sp>
-        <p:nvSpPr>
-          <p:cNvPr id="16" name="Rectangle 15"/>
-          <p:cNvSpPr/>
-          <p:nvPr/>
-        </p:nvSpPr>
-        <p:spPr>
-          <a:xfrm>
-            <a:off x="548640" y="2907792"/>
-            <a:ext cx="5440680" cy="347472"/>
-          </a:xfrm>
-          <a:prstGeom prst="rect">
-            <a:avLst/>
-          </a:prstGeom>
-          <a:solidFill>
-            <a:srgbClr val="20288F"/>
-          </a:solidFill>
-          <a:ln>
-            <a:noFill/>
-          </a:ln>
-        </p:spPr>
-        <p:style>
-          <a:lnRef idx="1">
-            <a:schemeClr val="accent1"/>
-          </a:lnRef>
-          <a:fillRef idx="3">
-            <a:schemeClr val="accent1"/>
-          </a:fillRef>
-          <a:effectRef idx="2">
-            <a:schemeClr val="accent1"/>
-          </a:effectRef>
-          <a:fontRef idx="minor">
-            <a:schemeClr val="lt1"/>
-          </a:fontRef>
-        </p:style>
-        <p:txBody>
-          <a:bodyPr rtlCol="0" anchor="ctr"/>
-          <a:lstStyle/>
-          <a:p>
-            <a:pPr algn="ctr"/>
-            <a:r>
-              <a:rPr sz="1050" b="1">
-                <a:solidFill>
-                  <a:srgbClr val="FFFFFF"/>
-                </a:solidFill>
-                <a:latin typeface="Arial"/>
-              </a:rPr>
-              <a:t>TREN INSCHIET CETAK PER KUARTAL 2025</a:t>
-            </a:r>
-          </a:p>
-        </p:txBody>
-      </p:sp>
-      <p:sp>
-        <p:nvSpPr>
-          <p:cNvPr id="17" name="Rounded Rectangle 16"/>
-          <p:cNvSpPr/>
-          <p:nvPr/>
-        </p:nvSpPr>
-        <p:spPr>
-          <a:xfrm>
-            <a:off x="548640" y="3255264"/>
-            <a:ext cx="5440680" cy="3035808"/>
-          </a:xfrm>
-          <a:prstGeom prst="roundRect">
-            <a:avLst/>
-          </a:prstGeom>
-          <a:solidFill>
-            <a:srgbClr val="F4F7FE"/>
-          </a:solidFill>
-          <a:ln w="12700">
-            <a:solidFill>
-              <a:srgbClr val="D2DCF5"/>
-            </a:solidFill>
-          </a:ln>
-        </p:spPr>
-        <p:style>
-          <a:lnRef idx="1">
-            <a:schemeClr val="accent1"/>
-          </a:lnRef>
-          <a:fillRef idx="3">
-            <a:schemeClr val="accent1"/>
-          </a:fillRef>
-          <a:effectRef idx="2">
-            <a:schemeClr val="accent1"/>
-          </a:effectRef>
-          <a:fontRef idx="minor">
-            <a:schemeClr val="lt1"/>
-          </a:fontRef>
-        </p:style>
-        <p:txBody>
-          <a:bodyPr rtlCol="0" anchor="ctr"/>
-          <a:lstStyle/>
-          <a:p>
-            <a:pPr algn="ctr"/>
-          </a:p>
-        </p:txBody>
-      </p:sp>
-      <p:graphicFrame>
-        <p:nvGraphicFramePr>
-          <p:cNvPr id="18" name="Chart 17"/>
-          <p:cNvGraphicFramePr>
-            <a:graphicFrameLocks noGrp="1"/>
-          </p:cNvGraphicFramePr>
-          <p:nvPr/>
-        </p:nvGraphicFramePr>
-        <p:xfrm>
-          <a:off x="685800" y="3319272"/>
-          <a:ext cx="5166360" cy="1874519"/>
-        </p:xfrm>
-        <a:graphic>
-          <a:graphicData uri="http://schemas.openxmlformats.org/drawingml/2006/chart">
-            <c:chart xmlns:c="http://schemas.openxmlformats.org/drawingml/2006/chart" r:id="rId4"/>
-          </a:graphicData>
-        </a:graphic>
-      </p:graphicFrame>
-      <p:sp>
-        <p:nvSpPr>
-          <p:cNvPr id="19" name="TextBox 18"/>
-          <p:cNvSpPr txBox="1"/>
-          <p:nvPr/>
-        </p:nvSpPr>
-        <p:spPr>
-          <a:xfrm>
-            <a:off x="713232" y="5239512"/>
-            <a:ext cx="5111496" cy="896112"/>
-          </a:xfrm>
-          <a:prstGeom prst="rect">
-            <a:avLst/>
-          </a:prstGeom>
-          <a:noFill/>
-        </p:spPr>
-        <p:txBody>
-          <a:bodyPr wrap="square" lIns="0" tIns="0" rIns="0" bIns="0">
-            <a:spAutoFit/>
-          </a:bodyPr>
-          <a:lstStyle/>
-          <a:p>
-            <a:r>
-              <a:rPr sz="900" b="1">
-                <a:solidFill>
-                  <a:srgbClr val="20288F"/>
-                </a:solidFill>
-                <a:latin typeface="Arial"/>
-              </a:rPr>
-              <a:t>Rata-rata Baseline Tahunan: 4,61%  |  Sumber: SAP ZPPRSIPPC0012 &amp; Verifikasi
-</a:t>
-            </a:r>
-          </a:p>
-          <a:p>
-            <a:r>
-              <a:rPr sz="850">
-                <a:solidFill>
-                  <a:srgbClr val="2A2A3D"/>
-                </a:solidFill>
-                <a:latin typeface="Arial"/>
-              </a:rPr>
-              <a:t>• Q2 (3,97%): Titik terendah — membuktikan lini cetak mampu mencapai inschiet &lt; 4,00%.
-• Q4 (5,11%): Puncak lonjakan (+1,14 pp vs Q2) akibat masuknya order desain baru dalam jumlah besar. Tanpa data mesin &amp; shift, lonjakan order selalu diiringi naiknya lembar rusak.</a:t>
-            </a:r>
-          </a:p>
-        </p:txBody>
-      </p:sp>
-      <p:sp>
-        <p:nvSpPr>
-          <p:cNvPr id="20" name="Rectangle 19"/>
-          <p:cNvSpPr/>
-          <p:nvPr/>
-        </p:nvSpPr>
-        <p:spPr>
-          <a:xfrm>
-            <a:off x="6199632" y="2907792"/>
-            <a:ext cx="5440680" cy="347472"/>
-          </a:xfrm>
-          <a:prstGeom prst="rect">
-            <a:avLst/>
-          </a:prstGeom>
-          <a:solidFill>
-            <a:srgbClr val="6A2CC9"/>
-          </a:solidFill>
-          <a:ln>
-            <a:noFill/>
-          </a:ln>
-        </p:spPr>
-        <p:style>
-          <a:lnRef idx="1">
-            <a:schemeClr val="accent1"/>
-          </a:lnRef>
-          <a:fillRef idx="3">
-            <a:schemeClr val="accent1"/>
-          </a:fillRef>
-          <a:effectRef idx="2">
-            <a:schemeClr val="accent1"/>
-          </a:effectRef>
-          <a:fontRef idx="minor">
-            <a:schemeClr val="lt1"/>
-          </a:fontRef>
-        </p:style>
-        <p:txBody>
-          <a:bodyPr rtlCol="0" anchor="ctr"/>
-          <a:lstStyle/>
-          <a:p>
-            <a:pPr algn="ctr"/>
-            <a:r>
-              <a:rPr sz="1050" b="1">
-                <a:solidFill>
-                  <a:srgbClr val="FFFFFF"/>
-                </a:solidFill>
-                <a:latin typeface="Arial"/>
-              </a:rPr>
-              <a:t>SKALA DAMPAK FINANSIAL &amp; VALUASI PENGHEMATAN</a:t>
-            </a:r>
-          </a:p>
-        </p:txBody>
-      </p:sp>
-      <p:sp>
-        <p:nvSpPr>
-          <p:cNvPr id="21" name="Rounded Rectangle 20"/>
-          <p:cNvSpPr/>
-          <p:nvPr/>
-        </p:nvSpPr>
-        <p:spPr>
-          <a:xfrm>
-            <a:off x="6199632" y="3255264"/>
-            <a:ext cx="5440680" cy="3035808"/>
-          </a:xfrm>
-          <a:prstGeom prst="roundRect">
-            <a:avLst/>
-          </a:prstGeom>
-          <a:solidFill>
-            <a:srgbClr val="F8F6FE"/>
-          </a:solidFill>
-          <a:ln w="12700">
-            <a:solidFill>
-              <a:srgbClr val="D9CEF7"/>
-            </a:solidFill>
-          </a:ln>
-        </p:spPr>
-        <p:style>
-          <a:lnRef idx="1">
-            <a:schemeClr val="accent1"/>
-          </a:lnRef>
-          <a:fillRef idx="3">
-            <a:schemeClr val="accent1"/>
-          </a:fillRef>
-          <a:effectRef idx="2">
-            <a:schemeClr val="accent1"/>
-          </a:effectRef>
-          <a:fontRef idx="minor">
-            <a:schemeClr val="lt1"/>
-          </a:fontRef>
-        </p:style>
-        <p:txBody>
-          <a:bodyPr rtlCol="0" anchor="ctr" wrap="square" lIns="164592" rIns="164592" tIns="109728" bIns="91440"/>
+          <a:bodyPr rtlCol="0" anchor="ctr" wrap="square" lIns="164592" rIns="164592" tIns="137160" bIns="137160"/>
           <a:lstStyle/>
           <a:p>
             <a:pPr algn="ctr">
               <a:spcAft>
-                <a:spcPts val="400"/>
+                <a:spcPts val="600"/>
               </a:spcAft>
             </a:pPr>
             <a:r>
               <a:rPr sz="950" b="1">
                 <a:solidFill>
-                  <a:srgbClr val="6A2CC9"/>
-                </a:solidFill>
-                <a:latin typeface="Arial"/>
-              </a:rPr>
-              <a:t>• Dasar Estimasi Biaya Cetak:
-  </a:t>
-            </a:r>
-            <a:r>
-              <a:rPr sz="850">
+                  <a:srgbClr val="C62828"/>
+                </a:solidFill>
+                <a:latin typeface="Arial"/>
+              </a:rPr>
+              <a:t>• Operator Cetak (±42 Orang): </a:t>
+            </a:r>
+            <a:r>
+              <a:rPr sz="950">
                 <a:solidFill>
                   <a:srgbClr val="2A2A3D"/>
                 </a:solidFill>
                 <a:latin typeface="Arial"/>
               </a:rPr>
-              <a:t>Rp 3.000* / lembar (Estimasi internal bahan baku kertas sekuriti &amp; tinta, operasional mesin, dan alokasi tenaga kerja — bukan rujukan resmi/confidential).</a:t>
+              <a:t>Sulit memantau hasil mutu hariannya secara mandiri dan kehilangan kesempatan memperoleh pembinaan (coaching) objektif.</a:t>
             </a:r>
           </a:p>
           <a:p>
             <a:pPr>
               <a:spcAft>
-                <a:spcPts val="400"/>
+                <a:spcPts val="600"/>
               </a:spcAft>
             </a:pPr>
             <a:r>
               <a:rPr sz="950" b="1">
                 <a:solidFill>
-                  <a:srgbClr val="6A2CC9"/>
-                </a:solidFill>
-                <a:latin typeface="Arial"/>
-              </a:rPr>
-              <a:t>• Potensi Kerugian Baseline Rata-rata (160 Juta Lembar):
-  </a:t>
-            </a:r>
-            <a:r>
-              <a:rPr sz="850">
+                  <a:srgbClr val="C62828"/>
+                </a:solidFill>
+                <a:latin typeface="Arial"/>
+              </a:rPr>
+              <a:t>• Kepala Kelompok &amp; Kepala Unit: </a:t>
+            </a:r>
+            <a:r>
+              <a:rPr sz="950">
                 <a:solidFill>
                   <a:srgbClr val="2A2A3D"/>
                 </a:solidFill>
                 <a:latin typeface="Arial"/>
               </a:rPr>
-              <a:t>160.000.000 × 4,61% = 7.376.000 lembar rusak × Rp 3.000 = Rp 22,13 Miliar / Tahun (~Rp 1,84 Miliar / Bulan).</a:t>
+              <a:t>Menanggung beban rekap manual buku folio dan kesulitan memberi feedback terarah kepada tim kerja.</a:t>
             </a:r>
           </a:p>
           <a:p>
             <a:pPr>
               <a:spcAft>
-                <a:spcPts val="400"/>
+                <a:spcPts val="600"/>
               </a:spcAft>
             </a:pPr>
             <a:r>
               <a:rPr sz="950" b="1">
                 <a:solidFill>
-                  <a:srgbClr val="6A2CC9"/>
-                </a:solidFill>
-                <a:latin typeface="Arial"/>
-              </a:rPr>
-              <a:t>• Potensi Kerugian Baseline Aktual 2025 (177,6 Juta Lembar):
-  </a:t>
-            </a:r>
-            <a:r>
-              <a:rPr sz="850">
+                  <a:srgbClr val="C62828"/>
+                </a:solidFill>
+                <a:latin typeface="Arial"/>
+              </a:rPr>
+              <a:t>• Teknisi Pemeliharaan (Maintenance): </a:t>
+            </a:r>
+            <a:r>
+              <a:rPr sz="950">
                 <a:solidFill>
                   <a:srgbClr val="2A2A3D"/>
                 </a:solidFill>
                 <a:latin typeface="Arial"/>
               </a:rPr>
-              <a:t>177.636.930 × 4,61% = 8.189.062 lembar rusak × Rp 3.000 = Rp 24,56 Miliar / Tahun (~Rp 2,05 Miliar / Bulan).</a:t>
+              <a:t>Kehilangan jam produktif (&gt; 8 jam per mesin) akibat mencari sumber masalah secara acak.</a:t>
             </a:r>
           </a:p>
           <a:p>
             <a:pPr>
               <a:spcAft>
-                <a:spcPts val="400"/>
+                <a:spcPts val="600"/>
               </a:spcAft>
             </a:pPr>
             <a:r>
               <a:rPr sz="950" b="1">
                 <a:solidFill>
-                  <a:srgbClr val="6A2CC9"/>
-                </a:solidFill>
-                <a:latin typeface="Arial"/>
-              </a:rPr>
-              <a:t>• Valuasi Tiap 1,00% Penurunan Inschiet:
-  </a:t>
-            </a:r>
-            <a:r>
-              <a:rPr sz="850">
+                  <a:srgbClr val="C62828"/>
+                </a:solidFill>
+                <a:latin typeface="Arial"/>
+              </a:rPr>
+              <a:t>• PPIC &amp; Manajemen: </a:t>
+            </a:r>
+            <a:r>
+              <a:rPr sz="950">
                 <a:solidFill>
                   <a:srgbClr val="2A2A3D"/>
                 </a:solidFill>
                 <a:latin typeface="Arial"/>
               </a:rPr>
-              <a:t>177.636.930 × 1,00% = 1.776.369 lembar diselamatkan × Rp 3.000 = Rp 5,33 Miliar / Tahun (~Rp 444 Juta / Bulan).</a:t>
+              <a:t>Sulit merencanakan alokasi mesin dan jadwal cetak presisi karena profil performa riil mesin tidak tersedia.</a:t>
             </a:r>
           </a:p>
           <a:p>
             <a:pPr>
-              <a:spcBef>
-                <a:spcPts val="400"/>
-              </a:spcBef>
+              <a:spcAft>
+                <a:spcPts val="600"/>
+              </a:spcAft>
             </a:pPr>
             <a:r>
               <a:rPr sz="950" b="1">
                 <a:solidFill>
-                  <a:srgbClr val="2E7D32"/>
-                </a:solidFill>
-                <a:latin typeface="Arial"/>
-              </a:rPr>
-              <a:t>HASIL AWAL IMPLEMENTASI SEMESTER 1 2026 (DSS SIRINE 4.0):
-</a:t>
-            </a:r>
-            <a:r>
-              <a:rPr sz="850" b="1">
+                  <a:srgbClr val="C62828"/>
+                </a:solidFill>
+                <a:latin typeface="Arial"/>
+              </a:rPr>
+              <a:t>• Pelanggan Utama (DJBC Kemenkeu): </a:t>
+            </a:r>
+            <a:r>
+              <a:rPr sz="950">
                 <a:solidFill>
                   <a:srgbClr val="2A2A3D"/>
                 </a:solidFill>
                 <a:latin typeface="Arial"/>
               </a:rPr>
-              <a:t>Inschiet berhasil turun menjadi 4,34% di Q1 dan 3,33% di Q2 (-1,28 pp). Dalam 6 bulan pertama, 743.234 lembar cetak berhasil diselamatkan dengan nilai penghematan nyata Rp 2,23 Miliar (Proyeksi tahunan: ~Rp 6,82 Miliar / tahun).</a:t>
+              <a:t>Menghadapi risiko keterlambatan pengiriman pita cukai akibat siklus cetak ulang lembar rusak.</a:t>
             </a:r>
           </a:p>
         </p:txBody>
@@ -7666,7 +6451,7 @@
                 </a:solidFill>
                 <a:latin typeface="Arial"/>
               </a:rPr>
-              <a:t>02.1</a:t>
+              <a:t>02.2</a:t>
             </a:r>
           </a:p>
         </p:txBody>
@@ -7695,13 +6480,13 @@
           <a:p>
             <a:pPr algn="l"/>
             <a:r>
-              <a:rPr sz="2500" b="1">
+              <a:rPr sz="2400" b="1">
                 <a:solidFill>
                   <a:srgbClr val="20288F"/>
                 </a:solidFill>
                 <a:latin typeface="Arial"/>
               </a:rPr>
-              <a:t>Masalah: Keterbatasan Data Granular &amp; Titik Buta Operasional</a:t>
+              <a:t>Masalah: Baseline Permasalahan &amp; Risiko Bila Dibiarkan</a:t>
             </a:r>
           </a:p>
         </p:txBody>
@@ -7744,64 +6529,32 @@
                 </a:solidFill>
                 <a:latin typeface="Arial"/>
               </a:rPr>
-              <a:t>Nyatakan masalah operasional nyata dan terukur — apa yang terjadi, di unit mana, sejak kapan, dan siapa terdampak.</a:t>
-            </a:r>
-          </a:p>
-        </p:txBody>
-      </p:sp>
-      <p:sp>
-        <p:nvSpPr>
-          <p:cNvPr id="7" name="TextBox 6"/>
-          <p:cNvSpPr txBox="1"/>
-          <p:nvPr/>
-        </p:nvSpPr>
-        <p:spPr>
-          <a:xfrm>
-            <a:off x="548640" y="6419088"/>
-            <a:ext cx="11091672" cy="256032"/>
-          </a:xfrm>
-          <a:prstGeom prst="rect">
-            <a:avLst/>
-          </a:prstGeom>
-          <a:noFill/>
-        </p:spPr>
-        <p:txBody>
-          <a:bodyPr wrap="square" lIns="0" tIns="0" rIns="0" bIns="0">
-            <a:spAutoFit/>
-          </a:bodyPr>
-          <a:lstStyle/>
-          <a:p>
-            <a:r>
-              <a:rPr sz="850">
-                <a:solidFill>
-                  <a:srgbClr val="6E6E82"/>
-                </a:solidFill>
-                <a:latin typeface="Arial"/>
-              </a:rPr>
-              <a:t>IAKA 2026 — Kerangka Presentasi Peserta  ·  DSS SIRINE 4.0 Unit Cetak Pita Cukai</a:t>
-            </a:r>
-          </a:p>
-        </p:txBody>
-      </p:sp>
-      <p:sp>
-        <p:nvSpPr>
-          <p:cNvPr id="8" name="Rectangle 7"/>
-          <p:cNvSpPr/>
-          <p:nvPr/>
-        </p:nvSpPr>
-        <p:spPr>
-          <a:xfrm>
-            <a:off x="548640" y="1755648"/>
-            <a:ext cx="3520440" cy="365760"/>
-          </a:xfrm>
-          <a:prstGeom prst="rect">
+              <a:t>Tunjukkan baseline permasalahan operasional terukur dan dampak multidimensi jika kondisi dibiarkan tanpa intervensi.</a:t>
+            </a:r>
+          </a:p>
+        </p:txBody>
+      </p:sp>
+      <p:sp>
+        <p:nvSpPr>
+          <p:cNvPr id="7" name="Rounded Rectangle 6"/>
+          <p:cNvSpPr/>
+          <p:nvPr/>
+        </p:nvSpPr>
+        <p:spPr>
+          <a:xfrm>
+            <a:off x="548640" y="1737360"/>
+            <a:ext cx="2615184" cy="987552"/>
+          </a:xfrm>
+          <a:prstGeom prst="roundRect">
             <a:avLst/>
           </a:prstGeom>
           <a:solidFill>
-            <a:srgbClr val="20288F"/>
+            <a:srgbClr val="FFF9E6"/>
           </a:solidFill>
-          <a:ln>
-            <a:noFill/>
+          <a:ln w="19050">
+            <a:solidFill>
+              <a:srgbClr val="FFE082"/>
+            </a:solidFill>
           </a:ln>
         </p:spPr>
         <p:style>
@@ -7819,43 +6572,65 @@
           </a:fontRef>
         </p:style>
         <p:txBody>
-          <a:bodyPr rtlCol="0" anchor="ctr"/>
+          <a:bodyPr rtlCol="0" anchor="ctr" wrap="square" tIns="73152" bIns="36576"/>
           <a:lstStyle/>
           <a:p>
             <a:pPr algn="ctr"/>
             <a:r>
-              <a:rPr sz="1100" b="1">
-                <a:solidFill>
-                  <a:srgbClr val="FFFFFF"/>
-                </a:solidFill>
-                <a:latin typeface="Arial"/>
-              </a:rPr>
-              <a:t>1. TITIK BUTA PASCA-SIRINE 2024</a:t>
-            </a:r>
-          </a:p>
-        </p:txBody>
-      </p:sp>
-      <p:sp>
-        <p:nvSpPr>
-          <p:cNvPr id="9" name="Rounded Rectangle 8"/>
-          <p:cNvSpPr/>
-          <p:nvPr/>
-        </p:nvSpPr>
-        <p:spPr>
-          <a:xfrm>
-            <a:off x="548640" y="2121408"/>
-            <a:ext cx="3520440" cy="4160520"/>
-          </a:xfrm>
-          <a:prstGeom prst="roundRect">
+              <a:rPr sz="850" b="1">
+                <a:solidFill>
+                  <a:srgbClr val="E65100"/>
+                </a:solidFill>
+                <a:latin typeface="Arial"/>
+              </a:rPr>
+              <a:t>BASELINE INSCHIET 2025</a:t>
+            </a:r>
+          </a:p>
+          <a:p>
+            <a:pPr algn="ctr"/>
+            <a:r>
+              <a:rPr sz="1550" b="1">
+                <a:solidFill>
+                  <a:srgbClr val="E65100"/>
+                </a:solidFill>
+                <a:latin typeface="Arial"/>
+              </a:rPr>
+              <a:t>4,61%</a:t>
+            </a:r>
+          </a:p>
+          <a:p>
+            <a:pPr algn="ctr"/>
+            <a:r>
+              <a:rPr sz="750">
+                <a:solidFill>
+                  <a:srgbClr val="2A2A3D"/>
+                </a:solidFill>
+                <a:latin typeface="Arial"/>
+              </a:rPr>
+              <a:t>Puncak Q4: 5,11% (SAP ZPPRSIPPC0012)</a:t>
+            </a:r>
+          </a:p>
+        </p:txBody>
+      </p:sp>
+      <p:sp>
+        <p:nvSpPr>
+          <p:cNvPr id="8" name="Rectangle 7"/>
+          <p:cNvSpPr/>
+          <p:nvPr/>
+        </p:nvSpPr>
+        <p:spPr>
+          <a:xfrm>
+            <a:off x="548640" y="1737360"/>
+            <a:ext cx="2615184" cy="54864"/>
+          </a:xfrm>
+          <a:prstGeom prst="rect">
             <a:avLst/>
           </a:prstGeom>
           <a:solidFill>
-            <a:srgbClr val="F4F7FE"/>
+            <a:srgbClr val="E65100"/>
           </a:solidFill>
-          <a:ln w="12700">
-            <a:solidFill>
-              <a:srgbClr val="D2DCF5"/>
-            </a:solidFill>
+          <a:ln>
+            <a:noFill/>
           </a:ln>
         </p:spPr>
         <p:style>
@@ -7873,129 +6648,34 @@
           </a:fontRef>
         </p:style>
         <p:txBody>
-          <a:bodyPr rtlCol="0" anchor="ctr" wrap="square" lIns="164592" rIns="164592" tIns="137160" bIns="137160"/>
-          <a:lstStyle/>
-          <a:p>
-            <a:pPr algn="ctr">
-              <a:spcAft>
-                <a:spcPts val="600"/>
-              </a:spcAft>
-            </a:pPr>
-            <a:r>
-              <a:rPr sz="950" b="1">
-                <a:solidFill>
-                  <a:srgbClr val="20288F"/>
-                </a:solidFill>
-                <a:latin typeface="Arial"/>
-              </a:rPr>
-              <a:t>• Capaian SIRINE 3.5 (2024): </a:t>
-            </a:r>
-            <a:r>
-              <a:rPr sz="950">
-                <a:solidFill>
-                  <a:srgbClr val="2A2A3D"/>
-                </a:solidFill>
-                <a:latin typeface="Arial"/>
-              </a:rPr>
-              <a:t>Berhasil memetakan jenis kerusakan dominan dan menekan rata-rata inschiet dari 5,61% menjadi 4,06% di akhir 2024.</a:t>
-            </a:r>
-          </a:p>
-          <a:p>
-            <a:pPr>
-              <a:spcAft>
-                <a:spcPts val="600"/>
-              </a:spcAft>
-            </a:pPr>
-            <a:r>
-              <a:rPr sz="950" b="1">
-                <a:solidFill>
-                  <a:srgbClr val="20288F"/>
-                </a:solidFill>
-                <a:latin typeface="Arial"/>
-              </a:rPr>
-              <a:t>• Tantangan Baru di 2025: </a:t>
-            </a:r>
-            <a:r>
-              <a:rPr sz="950">
-                <a:solidFill>
-                  <a:srgbClr val="2A2A3D"/>
-                </a:solidFill>
-                <a:latin typeface="Arial"/>
-              </a:rPr>
-              <a:t>Data jenis kerusakan sudah ada, tetapi dengan 6 mesin cetak yang berjalan, belum ada data untuk tahu mesin mana yang menjadi sumber masalah utama.</a:t>
-            </a:r>
-          </a:p>
-          <a:p>
-            <a:pPr>
-              <a:spcAft>
-                <a:spcPts val="600"/>
-              </a:spcAft>
-            </a:pPr>
-            <a:r>
-              <a:rPr sz="950" b="1">
-                <a:solidFill>
-                  <a:srgbClr val="20288F"/>
-                </a:solidFill>
-                <a:latin typeface="Arial"/>
-              </a:rPr>
-              <a:t>• Ketiadaan Data Kondisi Kerja: </a:t>
-            </a:r>
-            <a:r>
-              <a:rPr sz="950">
-                <a:solidFill>
-                  <a:srgbClr val="2A2A3D"/>
-                </a:solidFill>
-                <a:latin typeface="Arial"/>
-              </a:rPr>
-              <a:t>Belum dapat diketahui apakah tingginya inschiet lebih dipengaruhi oleh kondisi teknis mesin atau faktor kondisi kerja (perbedaan shift, SOP, kelelahan operator).</a:t>
-            </a:r>
-          </a:p>
-          <a:p>
-            <a:pPr>
-              <a:spcAft>
-                <a:spcPts val="600"/>
-              </a:spcAft>
-            </a:pPr>
-            <a:r>
-              <a:rPr sz="950" b="1">
-                <a:solidFill>
-                  <a:srgbClr val="20288F"/>
-                </a:solidFill>
-                <a:latin typeface="Arial"/>
-              </a:rPr>
-              <a:t>• Lokasi &amp; Periode Masalah: </a:t>
-            </a:r>
-            <a:r>
-              <a:rPr sz="950">
-                <a:solidFill>
-                  <a:srgbClr val="2A2A3D"/>
-                </a:solidFill>
-                <a:latin typeface="Arial"/>
-              </a:rPr>
-              <a:t>Berpusat pada proses cetak sheet-fed offset di Unit Cetak Pita Cukai sejak Januari 2025.</a:t>
-            </a:r>
-          </a:p>
-        </p:txBody>
-      </p:sp>
-      <p:sp>
-        <p:nvSpPr>
-          <p:cNvPr id="10" name="Rectangle 9"/>
-          <p:cNvSpPr/>
-          <p:nvPr/>
-        </p:nvSpPr>
-        <p:spPr>
-          <a:xfrm>
-            <a:off x="4325112" y="1755648"/>
-            <a:ext cx="3520440" cy="365760"/>
-          </a:xfrm>
-          <a:prstGeom prst="rect">
+          <a:bodyPr rtlCol="0" anchor="ctr"/>
+          <a:lstStyle/>
+          <a:p>
+            <a:pPr algn="ctr"/>
+          </a:p>
+        </p:txBody>
+      </p:sp>
+      <p:sp>
+        <p:nvSpPr>
+          <p:cNvPr id="9" name="Rounded Rectangle 8"/>
+          <p:cNvSpPr/>
+          <p:nvPr/>
+        </p:nvSpPr>
+        <p:spPr>
+          <a:xfrm>
+            <a:off x="3374136" y="1737360"/>
+            <a:ext cx="2615184" cy="987552"/>
+          </a:xfrm>
+          <a:prstGeom prst="roundRect">
             <a:avLst/>
           </a:prstGeom>
           <a:solidFill>
-            <a:srgbClr val="6A2CC9"/>
+            <a:srgbClr val="FFF5F5"/>
           </a:solidFill>
-          <a:ln>
-            <a:noFill/>
+          <a:ln w="19050">
+            <a:solidFill>
+              <a:srgbClr val="F5C2C2"/>
+            </a:solidFill>
           </a:ln>
         </p:spPr>
         <p:style>
@@ -8013,43 +6693,65 @@
           </a:fontRef>
         </p:style>
         <p:txBody>
-          <a:bodyPr rtlCol="0" anchor="ctr"/>
+          <a:bodyPr rtlCol="0" anchor="ctr" wrap="square" tIns="73152" bIns="36576"/>
           <a:lstStyle/>
           <a:p>
             <a:pPr algn="ctr"/>
             <a:r>
-              <a:rPr sz="1100" b="1">
-                <a:solidFill>
-                  <a:srgbClr val="FFFFFF"/>
-                </a:solidFill>
-                <a:latin typeface="Arial"/>
-              </a:rPr>
-              <a:t>2. DUA KASUS NYATA DI LAPANGAN</a:t>
-            </a:r>
-          </a:p>
-        </p:txBody>
-      </p:sp>
-      <p:sp>
-        <p:nvSpPr>
-          <p:cNvPr id="11" name="Rounded Rectangle 10"/>
-          <p:cNvSpPr/>
-          <p:nvPr/>
-        </p:nvSpPr>
-        <p:spPr>
-          <a:xfrm>
-            <a:off x="4325112" y="2121408"/>
-            <a:ext cx="3520440" cy="4160520"/>
-          </a:xfrm>
-          <a:prstGeom prst="roundRect">
+              <a:rPr sz="850" b="1">
+                <a:solidFill>
+                  <a:srgbClr val="C62828"/>
+                </a:solidFill>
+                <a:latin typeface="Arial"/>
+              </a:rPr>
+              <a:t>JUMLAH LEMBAR RUSAK</a:t>
+            </a:r>
+          </a:p>
+          <a:p>
+            <a:pPr algn="ctr"/>
+            <a:r>
+              <a:rPr sz="1550" b="1">
+                <a:solidFill>
+                  <a:srgbClr val="C62828"/>
+                </a:solidFill>
+                <a:latin typeface="Arial"/>
+              </a:rPr>
+              <a:t>8.189.062 LK</a:t>
+            </a:r>
+          </a:p>
+          <a:p>
+            <a:pPr algn="ctr"/>
+            <a:r>
+              <a:rPr sz="750">
+                <a:solidFill>
+                  <a:srgbClr val="2A2A3D"/>
+                </a:solidFill>
+                <a:latin typeface="Arial"/>
+              </a:rPr>
+              <a:t>Total order: 177.636.930 Lembar Cetak</a:t>
+            </a:r>
+          </a:p>
+        </p:txBody>
+      </p:sp>
+      <p:sp>
+        <p:nvSpPr>
+          <p:cNvPr id="10" name="Rectangle 9"/>
+          <p:cNvSpPr/>
+          <p:nvPr/>
+        </p:nvSpPr>
+        <p:spPr>
+          <a:xfrm>
+            <a:off x="3374136" y="1737360"/>
+            <a:ext cx="2615184" cy="54864"/>
+          </a:xfrm>
+          <a:prstGeom prst="rect">
             <a:avLst/>
           </a:prstGeom>
           <a:solidFill>
-            <a:srgbClr val="F8F6FE"/>
+            <a:srgbClr val="C62828"/>
           </a:solidFill>
-          <a:ln w="12700">
-            <a:solidFill>
-              <a:srgbClr val="D9CEF7"/>
-            </a:solidFill>
+          <a:ln>
+            <a:noFill/>
           </a:ln>
         </p:spPr>
         <p:style>
@@ -8067,129 +6769,34 @@
           </a:fontRef>
         </p:style>
         <p:txBody>
-          <a:bodyPr rtlCol="0" anchor="ctr" wrap="square" lIns="164592" rIns="164592" tIns="137160" bIns="137160"/>
-          <a:lstStyle/>
-          <a:p>
-            <a:pPr algn="ctr">
-              <a:spcAft>
-                <a:spcPts val="600"/>
-              </a:spcAft>
-            </a:pPr>
-            <a:r>
-              <a:rPr sz="950" b="1">
-                <a:solidFill>
-                  <a:srgbClr val="6A2CC9"/>
-                </a:solidFill>
-                <a:latin typeface="Arial"/>
-              </a:rPr>
-              <a:t>• Kasus 1 – Penelusuran Spekulatif: </a:t>
-            </a:r>
-            <a:r>
-              <a:rPr sz="950">
-                <a:solidFill>
-                  <a:srgbClr val="2A2A3D"/>
-                </a:solidFill>
-                <a:latin typeface="Arial"/>
-              </a:rPr>
-              <a:t>Bulan Juni 2025 jenis kerusakan blobor mendominasi. Karena tidak ada data per-mesin, teknisi harus memeriksa 6 mesin bergilir (trial-and-error).</a:t>
-            </a:r>
-          </a:p>
-          <a:p>
-            <a:pPr>
-              <a:spcAft>
-                <a:spcPts val="600"/>
-              </a:spcAft>
-            </a:pPr>
-            <a:r>
-              <a:rPr sz="950" b="1">
-                <a:solidFill>
-                  <a:srgbClr val="6A2CC9"/>
-                </a:solidFill>
-                <a:latin typeface="Arial"/>
-              </a:rPr>
-              <a:t>• Dampak Downtime Kasus 1: </a:t>
-            </a:r>
-            <a:r>
-              <a:rPr sz="950">
-                <a:solidFill>
-                  <a:srgbClr val="2A2A3D"/>
-                </a:solidFill>
-                <a:latin typeface="Arial"/>
-              </a:rPr>
-              <a:t>Sumber masalah ternyata di Komori 3 (KMR3). Karena diperiksa terakhir, terjadi downtime &gt; 1 shift (&gt; 8 jam) dan mesin KMR3 terus mencetak ribuan lembar rusak.</a:t>
-            </a:r>
-          </a:p>
-          <a:p>
-            <a:pPr>
-              <a:spcAft>
-                <a:spcPts val="600"/>
-              </a:spcAft>
-            </a:pPr>
-            <a:r>
-              <a:rPr sz="950" b="1">
-                <a:solidFill>
-                  <a:srgbClr val="6A2CC9"/>
-                </a:solidFill>
-                <a:latin typeface="Arial"/>
-              </a:rPr>
-              <a:t>• Kasus 2 – Dilema Mesin vs Shift: </a:t>
-            </a:r>
-            <a:r>
-              <a:rPr sz="950">
-                <a:solidFill>
-                  <a:srgbClr val="2A2A3D"/>
-                </a:solidFill>
-                <a:latin typeface="Arial"/>
-              </a:rPr>
-              <a:t>Mesin KMR3 pada shift malam mencatat inschiet 8,5%, sedangkan shift pagi di mesin yang sama hanya 2,5%.</a:t>
-            </a:r>
-          </a:p>
-          <a:p>
-            <a:pPr>
-              <a:spcAft>
-                <a:spcPts val="600"/>
-              </a:spcAft>
-            </a:pPr>
-            <a:r>
-              <a:rPr sz="950" b="1">
-                <a:solidFill>
-                  <a:srgbClr val="6A2CC9"/>
-                </a:solidFill>
-                <a:latin typeface="Arial"/>
-              </a:rPr>
-              <a:t>• Salah Diagnosa Kasus 2: </a:t>
-            </a:r>
-            <a:r>
-              <a:rPr sz="950">
-                <a:solidFill>
-                  <a:srgbClr val="2A2A3D"/>
-                </a:solidFill>
-                <a:latin typeface="Arial"/>
-              </a:rPr>
-              <a:t>Tanpa data per-shift, tindakan perbaikan selalu mengutak-atik mesin, padahal masalahnya ada pada faktor kelelahan shift malam atau ketidakseragaman SOP penyetelan tinta.</a:t>
-            </a:r>
-          </a:p>
-        </p:txBody>
-      </p:sp>
-      <p:sp>
-        <p:nvSpPr>
-          <p:cNvPr id="12" name="Rectangle 11"/>
-          <p:cNvSpPr/>
-          <p:nvPr/>
-        </p:nvSpPr>
-        <p:spPr>
-          <a:xfrm>
-            <a:off x="8101584" y="1755648"/>
-            <a:ext cx="3520440" cy="365760"/>
-          </a:xfrm>
-          <a:prstGeom prst="rect">
+          <a:bodyPr rtlCol="0" anchor="ctr"/>
+          <a:lstStyle/>
+          <a:p>
+            <a:pPr algn="ctr"/>
+          </a:p>
+        </p:txBody>
+      </p:sp>
+      <p:sp>
+        <p:nvSpPr>
+          <p:cNvPr id="11" name="Rounded Rectangle 10"/>
+          <p:cNvSpPr/>
+          <p:nvPr/>
+        </p:nvSpPr>
+        <p:spPr>
+          <a:xfrm>
+            <a:off x="6199632" y="1737360"/>
+            <a:ext cx="2615184" cy="987552"/>
+          </a:xfrm>
+          <a:prstGeom prst="roundRect">
             <a:avLst/>
           </a:prstGeom>
           <a:solidFill>
-            <a:srgbClr val="C62828"/>
+            <a:srgbClr val="F8F6FE"/>
           </a:solidFill>
-          <a:ln>
-            <a:noFill/>
+          <a:ln w="19050">
+            <a:solidFill>
+              <a:srgbClr val="D9CEF7"/>
+            </a:solidFill>
           </a:ln>
         </p:spPr>
         <p:style>
@@ -8207,43 +6814,65 @@
           </a:fontRef>
         </p:style>
         <p:txBody>
-          <a:bodyPr rtlCol="0" anchor="ctr"/>
+          <a:bodyPr rtlCol="0" anchor="ctr" wrap="square" tIns="73152" bIns="36576"/>
           <a:lstStyle/>
           <a:p>
             <a:pPr algn="ctr"/>
             <a:r>
-              <a:rPr sz="1100" b="1">
-                <a:solidFill>
-                  <a:srgbClr val="FFFFFF"/>
-                </a:solidFill>
-                <a:latin typeface="Arial"/>
-              </a:rPr>
-              <a:t>3. PIHAK TERDAMPAK LANGSUNG</a:t>
-            </a:r>
-          </a:p>
-        </p:txBody>
-      </p:sp>
-      <p:sp>
-        <p:nvSpPr>
-          <p:cNvPr id="13" name="Rounded Rectangle 12"/>
-          <p:cNvSpPr/>
-          <p:nvPr/>
-        </p:nvSpPr>
-        <p:spPr>
-          <a:xfrm>
-            <a:off x="8101584" y="2121408"/>
-            <a:ext cx="3520440" cy="4160520"/>
-          </a:xfrm>
-          <a:prstGeom prst="roundRect">
+              <a:rPr sz="850" b="1">
+                <a:solidFill>
+                  <a:srgbClr val="6A2CC9"/>
+                </a:solidFill>
+                <a:latin typeface="Arial"/>
+              </a:rPr>
+              <a:t>POTENSI BIAYA TERBUANG*</a:t>
+            </a:r>
+          </a:p>
+          <a:p>
+            <a:pPr algn="ctr"/>
+            <a:r>
+              <a:rPr sz="1550" b="1">
+                <a:solidFill>
+                  <a:srgbClr val="6A2CC9"/>
+                </a:solidFill>
+                <a:latin typeface="Arial"/>
+              </a:rPr>
+              <a:t>Rp 24,56 Miliar*</a:t>
+            </a:r>
+          </a:p>
+          <a:p>
+            <a:pPr algn="ctr"/>
+            <a:r>
+              <a:rPr sz="750">
+                <a:solidFill>
+                  <a:srgbClr val="2A2A3D"/>
+                </a:solidFill>
+                <a:latin typeface="Arial"/>
+              </a:rPr>
+              <a:t>*Simulasi estimasi @ Rp 3.000 / LK</a:t>
+            </a:r>
+          </a:p>
+        </p:txBody>
+      </p:sp>
+      <p:sp>
+        <p:nvSpPr>
+          <p:cNvPr id="12" name="Rectangle 11"/>
+          <p:cNvSpPr/>
+          <p:nvPr/>
+        </p:nvSpPr>
+        <p:spPr>
+          <a:xfrm>
+            <a:off x="6199632" y="1737360"/>
+            <a:ext cx="2615184" cy="54864"/>
+          </a:xfrm>
+          <a:prstGeom prst="rect">
             <a:avLst/>
           </a:prstGeom>
           <a:solidFill>
-            <a:srgbClr val="FFF5F5"/>
+            <a:srgbClr val="6A2CC9"/>
           </a:solidFill>
-          <a:ln w="12700">
-            <a:solidFill>
-              <a:srgbClr val="F5C2C2"/>
-            </a:solidFill>
+          <a:ln>
+            <a:noFill/>
           </a:ln>
         </p:spPr>
         <p:style>
@@ -8261,131 +6890,612 @@
           </a:fontRef>
         </p:style>
         <p:txBody>
-          <a:bodyPr rtlCol="0" anchor="ctr" wrap="square" lIns="164592" rIns="164592" tIns="137160" bIns="137160"/>
+          <a:bodyPr rtlCol="0" anchor="ctr"/>
+          <a:lstStyle/>
+          <a:p>
+            <a:pPr algn="ctr"/>
+          </a:p>
+        </p:txBody>
+      </p:sp>
+      <p:sp>
+        <p:nvSpPr>
+          <p:cNvPr id="13" name="Rounded Rectangle 12"/>
+          <p:cNvSpPr/>
+          <p:nvPr/>
+        </p:nvSpPr>
+        <p:spPr>
+          <a:xfrm>
+            <a:off x="9025128" y="1737360"/>
+            <a:ext cx="2615184" cy="987552"/>
+          </a:xfrm>
+          <a:prstGeom prst="roundRect">
+            <a:avLst/>
+          </a:prstGeom>
+          <a:solidFill>
+            <a:srgbClr val="F4F7FE"/>
+          </a:solidFill>
+          <a:ln w="19050">
+            <a:solidFill>
+              <a:srgbClr val="D2DCF5"/>
+            </a:solidFill>
+          </a:ln>
+        </p:spPr>
+        <p:style>
+          <a:lnRef idx="1">
+            <a:schemeClr val="accent1"/>
+          </a:lnRef>
+          <a:fillRef idx="3">
+            <a:schemeClr val="accent1"/>
+          </a:fillRef>
+          <a:effectRef idx="2">
+            <a:schemeClr val="accent1"/>
+          </a:effectRef>
+          <a:fontRef idx="minor">
+            <a:schemeClr val="lt1"/>
+          </a:fontRef>
+        </p:style>
+        <p:txBody>
+          <a:bodyPr rtlCol="0" anchor="ctr" wrap="square" tIns="73152" bIns="36576"/>
+          <a:lstStyle/>
+          <a:p>
+            <a:pPr algn="ctr"/>
+            <a:r>
+              <a:rPr sz="850" b="1">
+                <a:solidFill>
+                  <a:srgbClr val="20288F"/>
+                </a:solidFill>
+                <a:latin typeface="Arial"/>
+              </a:rPr>
+              <a:t>DOWNTIME PERBAIKAN</a:t>
+            </a:r>
+          </a:p>
+          <a:p>
+            <a:pPr algn="ctr"/>
+            <a:r>
+              <a:rPr sz="1550" b="1">
+                <a:solidFill>
+                  <a:srgbClr val="20288F"/>
+                </a:solidFill>
+                <a:latin typeface="Arial"/>
+              </a:rPr>
+              <a:t>&gt; 8 Jam / Mesin</a:t>
+            </a:r>
+          </a:p>
+          <a:p>
+            <a:pPr algn="ctr"/>
+            <a:r>
+              <a:rPr sz="750">
+                <a:solidFill>
+                  <a:srgbClr val="2A2A3D"/>
+                </a:solidFill>
+                <a:latin typeface="Arial"/>
+              </a:rPr>
+              <a:t>Pemeriksaan spekulatif bergilir (&gt; 1 shift)</a:t>
+            </a:r>
+          </a:p>
+        </p:txBody>
+      </p:sp>
+      <p:sp>
+        <p:nvSpPr>
+          <p:cNvPr id="14" name="Rectangle 13"/>
+          <p:cNvSpPr/>
+          <p:nvPr/>
+        </p:nvSpPr>
+        <p:spPr>
+          <a:xfrm>
+            <a:off x="9025128" y="1737360"/>
+            <a:ext cx="2615184" cy="54864"/>
+          </a:xfrm>
+          <a:prstGeom prst="rect">
+            <a:avLst/>
+          </a:prstGeom>
+          <a:solidFill>
+            <a:srgbClr val="20288F"/>
+          </a:solidFill>
+          <a:ln>
+            <a:noFill/>
+          </a:ln>
+        </p:spPr>
+        <p:style>
+          <a:lnRef idx="1">
+            <a:schemeClr val="accent1"/>
+          </a:lnRef>
+          <a:fillRef idx="3">
+            <a:schemeClr val="accent1"/>
+          </a:fillRef>
+          <a:effectRef idx="2">
+            <a:schemeClr val="accent1"/>
+          </a:effectRef>
+          <a:fontRef idx="minor">
+            <a:schemeClr val="lt1"/>
+          </a:fontRef>
+        </p:style>
+        <p:txBody>
+          <a:bodyPr rtlCol="0" anchor="ctr"/>
+          <a:lstStyle/>
+          <a:p>
+            <a:pPr algn="ctr"/>
+          </a:p>
+        </p:txBody>
+      </p:sp>
+      <p:sp>
+        <p:nvSpPr>
+          <p:cNvPr id="15" name="Rectangle 14"/>
+          <p:cNvSpPr/>
+          <p:nvPr/>
+        </p:nvSpPr>
+        <p:spPr>
+          <a:xfrm>
+            <a:off x="548640" y="2816352"/>
+            <a:ext cx="5440680" cy="329184"/>
+          </a:xfrm>
+          <a:prstGeom prst="rect">
+            <a:avLst/>
+          </a:prstGeom>
+          <a:solidFill>
+            <a:srgbClr val="20288F"/>
+          </a:solidFill>
+          <a:ln>
+            <a:noFill/>
+          </a:ln>
+        </p:spPr>
+        <p:style>
+          <a:lnRef idx="1">
+            <a:schemeClr val="accent1"/>
+          </a:lnRef>
+          <a:fillRef idx="3">
+            <a:schemeClr val="accent1"/>
+          </a:fillRef>
+          <a:effectRef idx="2">
+            <a:schemeClr val="accent1"/>
+          </a:effectRef>
+          <a:fontRef idx="minor">
+            <a:schemeClr val="lt1"/>
+          </a:fontRef>
+        </p:style>
+        <p:txBody>
+          <a:bodyPr rtlCol="0" anchor="ctr"/>
+          <a:lstStyle/>
+          <a:p>
+            <a:pPr algn="ctr"/>
+            <a:r>
+              <a:rPr sz="1000" b="1">
+                <a:solidFill>
+                  <a:srgbClr val="FFFFFF"/>
+                </a:solidFill>
+                <a:latin typeface="Arial"/>
+              </a:rPr>
+              <a:t>TREN INSCHIET BASELINE PER KUARTAL 2025</a:t>
+            </a:r>
+          </a:p>
+        </p:txBody>
+      </p:sp>
+      <p:sp>
+        <p:nvSpPr>
+          <p:cNvPr id="16" name="Rounded Rectangle 15"/>
+          <p:cNvSpPr/>
+          <p:nvPr/>
+        </p:nvSpPr>
+        <p:spPr>
+          <a:xfrm>
+            <a:off x="548640" y="3145536"/>
+            <a:ext cx="5440680" cy="2761488"/>
+          </a:xfrm>
+          <a:prstGeom prst="roundRect">
+            <a:avLst/>
+          </a:prstGeom>
+          <a:solidFill>
+            <a:srgbClr val="F4F7FE"/>
+          </a:solidFill>
+          <a:ln w="12700">
+            <a:solidFill>
+              <a:srgbClr val="D2DCF5"/>
+            </a:solidFill>
+          </a:ln>
+        </p:spPr>
+        <p:style>
+          <a:lnRef idx="1">
+            <a:schemeClr val="accent1"/>
+          </a:lnRef>
+          <a:fillRef idx="3">
+            <a:schemeClr val="accent1"/>
+          </a:fillRef>
+          <a:effectRef idx="2">
+            <a:schemeClr val="accent1"/>
+          </a:effectRef>
+          <a:fontRef idx="minor">
+            <a:schemeClr val="lt1"/>
+          </a:fontRef>
+        </p:style>
+        <p:txBody>
+          <a:bodyPr rtlCol="0" anchor="ctr"/>
+          <a:lstStyle/>
+          <a:p>
+            <a:pPr algn="ctr"/>
+          </a:p>
+        </p:txBody>
+      </p:sp>
+      <p:graphicFrame>
+        <p:nvGraphicFramePr>
+          <p:cNvPr id="17" name="Chart 16"/>
+          <p:cNvGraphicFramePr>
+            <a:graphicFrameLocks noGrp="1"/>
+          </p:cNvGraphicFramePr>
+          <p:nvPr/>
+        </p:nvGraphicFramePr>
+        <p:xfrm>
+          <a:off x="685800" y="3200400"/>
+          <a:ext cx="5166360" cy="1691640"/>
+        </p:xfrm>
+        <a:graphic>
+          <a:graphicData uri="http://schemas.openxmlformats.org/drawingml/2006/chart">
+            <c:chart xmlns:c="http://schemas.openxmlformats.org/drawingml/2006/chart" r:id="rId8"/>
+          </a:graphicData>
+        </a:graphic>
+      </p:graphicFrame>
+      <p:sp>
+        <p:nvSpPr>
+          <p:cNvPr id="18" name="TextBox 17"/>
+          <p:cNvSpPr txBox="1"/>
+          <p:nvPr/>
+        </p:nvSpPr>
+        <p:spPr>
+          <a:xfrm>
+            <a:off x="713232" y="4965192"/>
+            <a:ext cx="5111496" cy="914400"/>
+          </a:xfrm>
+          <a:prstGeom prst="rect">
+            <a:avLst/>
+          </a:prstGeom>
+          <a:noFill/>
+        </p:spPr>
+        <p:txBody>
+          <a:bodyPr wrap="square" lIns="0" rIns="0" tIns="0" bIns="0">
+            <a:spAutoFit/>
+          </a:bodyPr>
+          <a:lstStyle/>
+          <a:p>
+            <a:r>
+              <a:rPr sz="800" b="1">
+                <a:solidFill>
+                  <a:srgbClr val="20288F"/>
+                </a:solidFill>
+                <a:latin typeface="Arial"/>
+              </a:rPr>
+              <a:t>Rata-rata Tahunan: 4,61%  |  Sumber: SAP ZPPRSIPPC0012 &amp; QC Verifikasi</a:t>
+            </a:r>
+          </a:p>
+          <a:p>
+            <a:pPr>
+              <a:spcBef>
+                <a:spcPts val="200"/>
+              </a:spcBef>
+            </a:pPr>
+            <a:r>
+              <a:rPr sz="750">
+                <a:solidFill>
+                  <a:srgbClr val="2A2A3D"/>
+                </a:solidFill>
+                <a:latin typeface="Arial"/>
+              </a:rPr>
+              <a:t>• Q2 (3,97%): Bukti lini cetak mampu mencapai target &lt; 4,00%.
+• Q4 (5,11%): Lonjakan saat order desain baru masuk. Ketiadaan data mesin &amp; shift membuat lonjakan order selalu diiringi naiknya lembar rusak.</a:t>
+            </a:r>
+          </a:p>
+        </p:txBody>
+      </p:sp>
+      <p:sp>
+        <p:nvSpPr>
+          <p:cNvPr id="19" name="Rectangle 18"/>
+          <p:cNvSpPr/>
+          <p:nvPr/>
+        </p:nvSpPr>
+        <p:spPr>
+          <a:xfrm>
+            <a:off x="6199632" y="2816352"/>
+            <a:ext cx="5440680" cy="329184"/>
+          </a:xfrm>
+          <a:prstGeom prst="rect">
+            <a:avLst/>
+          </a:prstGeom>
+          <a:solidFill>
+            <a:srgbClr val="C62828"/>
+          </a:solidFill>
+          <a:ln>
+            <a:noFill/>
+          </a:ln>
+        </p:spPr>
+        <p:style>
+          <a:lnRef idx="1">
+            <a:schemeClr val="accent1"/>
+          </a:lnRef>
+          <a:fillRef idx="3">
+            <a:schemeClr val="accent1"/>
+          </a:fillRef>
+          <a:effectRef idx="2">
+            <a:schemeClr val="accent1"/>
+          </a:effectRef>
+          <a:fontRef idx="minor">
+            <a:schemeClr val="lt1"/>
+          </a:fontRef>
+        </p:style>
+        <p:txBody>
+          <a:bodyPr rtlCol="0" anchor="ctr"/>
+          <a:lstStyle/>
+          <a:p>
+            <a:pPr algn="ctr"/>
+            <a:r>
+              <a:rPr sz="1000" b="1">
+                <a:solidFill>
+                  <a:srgbClr val="FFFFFF"/>
+                </a:solidFill>
+                <a:latin typeface="Arial"/>
+              </a:rPr>
+              <a:t>DAMPAK RISIKO BILA DIBIARKAN (5 PILAR)</a:t>
+            </a:r>
+          </a:p>
+        </p:txBody>
+      </p:sp>
+      <p:sp>
+        <p:nvSpPr>
+          <p:cNvPr id="20" name="Rounded Rectangle 19"/>
+          <p:cNvSpPr/>
+          <p:nvPr/>
+        </p:nvSpPr>
+        <p:spPr>
+          <a:xfrm>
+            <a:off x="6199632" y="3145536"/>
+            <a:ext cx="5440680" cy="2761488"/>
+          </a:xfrm>
+          <a:prstGeom prst="roundRect">
+            <a:avLst/>
+          </a:prstGeom>
+          <a:solidFill>
+            <a:srgbClr val="FFF5F5"/>
+          </a:solidFill>
+          <a:ln w="12700">
+            <a:solidFill>
+              <a:srgbClr val="F5C2C2"/>
+            </a:solidFill>
+          </a:ln>
+        </p:spPr>
+        <p:style>
+          <a:lnRef idx="1">
+            <a:schemeClr val="accent1"/>
+          </a:lnRef>
+          <a:fillRef idx="3">
+            <a:schemeClr val="accent1"/>
+          </a:fillRef>
+          <a:effectRef idx="2">
+            <a:schemeClr val="accent1"/>
+          </a:effectRef>
+          <a:fontRef idx="minor">
+            <a:schemeClr val="lt1"/>
+          </a:fontRef>
+        </p:style>
+        <p:txBody>
+          <a:bodyPr rtlCol="0" anchor="ctr" wrap="square" lIns="164592" rIns="164592" tIns="91440" bIns="73152"/>
           <a:lstStyle/>
           <a:p>
             <a:pPr algn="ctr">
               <a:spcAft>
-                <a:spcPts val="500"/>
+                <a:spcPts val="350"/>
               </a:spcAft>
             </a:pPr>
             <a:r>
-              <a:rPr sz="950" b="1">
+              <a:rPr sz="850" b="1">
                 <a:solidFill>
                   <a:srgbClr val="C62828"/>
                 </a:solidFill>
                 <a:latin typeface="Arial"/>
               </a:rPr>
-              <a:t>• Operator Cetak (±42 Orang): </a:t>
-            </a:r>
-            <a:r>
-              <a:rPr sz="950">
+              <a:t>• 1. Biaya (Cost): </a:t>
+            </a:r>
+            <a:r>
+              <a:rPr sz="800">
                 <a:solidFill>
                   <a:srgbClr val="2A2A3D"/>
                 </a:solidFill>
                 <a:latin typeface="Arial"/>
               </a:rPr>
-              <a:t>Sulit memantau hasil mutu hariannya secara mandiri dan kehilangan kesempatan memperoleh coaching objektif.</a:t>
+              <a:t>Akumulasi pemborosan biaya cetak mencapai Rp 24,56 Miliar/tahun (8.189.062 LK × asumsi Rp 3.000*) dan potensi saving Rp 5,33 Miliar per tiap 1% penurunan inschiet.</a:t>
             </a:r>
           </a:p>
           <a:p>
             <a:pPr>
               <a:spcAft>
-                <a:spcPts val="500"/>
+                <a:spcPts val="350"/>
               </a:spcAft>
             </a:pPr>
             <a:r>
-              <a:rPr sz="950" b="1">
+              <a:rPr sz="850" b="1">
                 <a:solidFill>
                   <a:srgbClr val="C62828"/>
                 </a:solidFill>
                 <a:latin typeface="Arial"/>
               </a:rPr>
-              <a:t>• Kepala Kelompok &amp; Kepala Unit: </a:t>
-            </a:r>
-            <a:r>
-              <a:rPr sz="950">
+              <a:t>• 2. Mutu (Quality): </a:t>
+            </a:r>
+            <a:r>
+              <a:rPr sz="800">
                 <a:solidFill>
                   <a:srgbClr val="2A2A3D"/>
                 </a:solidFill>
                 <a:latin typeface="Arial"/>
               </a:rPr>
-              <a:t>Menanggung beban rekap manual buku folio dan kesulitan memberi feedback terarah kepada tim.</a:t>
+              <a:t>Inschiet berfluktuasi tanpa kendali (puncak 5,11%). Penanganan mesin bersifat sementara karena tidak menyentuh akar masalah per-mesin.</a:t>
             </a:r>
           </a:p>
           <a:p>
             <a:pPr>
               <a:spcAft>
-                <a:spcPts val="500"/>
+                <a:spcPts val="350"/>
               </a:spcAft>
             </a:pPr>
             <a:r>
-              <a:rPr sz="950" b="1">
+              <a:rPr sz="850" b="1">
                 <a:solidFill>
                   <a:srgbClr val="C62828"/>
                 </a:solidFill>
                 <a:latin typeface="Arial"/>
               </a:rPr>
-              <a:t>• Teknisi Pemeliharaan (Maintenance): </a:t>
-            </a:r>
-            <a:r>
-              <a:rPr sz="950">
+              <a:t>• 3. Kepatuhan (Compliance): </a:t>
+            </a:r>
+            <a:r>
+              <a:rPr sz="800">
                 <a:solidFill>
                   <a:srgbClr val="2A2A3D"/>
                 </a:solidFill>
                 <a:latin typeface="Arial"/>
               </a:rPr>
-              <a:t>Kehilangan jam kerja produktif (&gt; 8 jam per mesin) akibat mencari sumber masalah secara acak.</a:t>
+              <a:t>Akuntabilitas pelacakan (traceability) dokumen negara terhambat karena pencatatan manual di buku folio tidak dapat diaudit digital (ISO 9001).</a:t>
             </a:r>
           </a:p>
           <a:p>
             <a:pPr>
               <a:spcAft>
-                <a:spcPts val="500"/>
+                <a:spcPts val="350"/>
               </a:spcAft>
             </a:pPr>
             <a:r>
-              <a:rPr sz="950" b="1">
+              <a:rPr sz="850" b="1">
                 <a:solidFill>
                   <a:srgbClr val="C62828"/>
                 </a:solidFill>
                 <a:latin typeface="Arial"/>
               </a:rPr>
-              <a:t>• PPIC &amp; Manajemen: </a:t>
-            </a:r>
-            <a:r>
-              <a:rPr sz="950">
+              <a:t>• 4. K3L &amp; Lingkungan (ESG): </a:t>
+            </a:r>
+            <a:r>
+              <a:rPr sz="800">
                 <a:solidFill>
                   <a:srgbClr val="2A2A3D"/>
                 </a:solidFill>
                 <a:latin typeface="Arial"/>
               </a:rPr>
-              <a:t>Sulit merencanakan alokasi mesin dan jadwal cetak presisi karena profil performa riil mesin tidak tersedia.</a:t>
+              <a:t>Timbulan limbah padat kertas sekuriti mencapai 8,18 Juta LK/tahun (±60–65 ton kertas terbuang) dan peningkatan kelelahan operator di shift malam.</a:t>
             </a:r>
           </a:p>
           <a:p>
             <a:pPr>
               <a:spcAft>
-                <a:spcPts val="500"/>
+                <a:spcPts val="350"/>
               </a:spcAft>
             </a:pPr>
             <a:r>
-              <a:rPr sz="950" b="1">
+              <a:rPr sz="850" b="1">
                 <a:solidFill>
                   <a:srgbClr val="C62828"/>
                 </a:solidFill>
                 <a:latin typeface="Arial"/>
               </a:rPr>
-              <a:t>• Pelanggan Utama (DJBC Kemenkeu): </a:t>
-            </a:r>
-            <a:r>
-              <a:rPr sz="950">
+              <a:t>• 5. Layanan (Service SLA): </a:t>
+            </a:r>
+            <a:r>
+              <a:rPr sz="800">
                 <a:solidFill>
                   <a:srgbClr val="2A2A3D"/>
                 </a:solidFill>
                 <a:latin typeface="Arial"/>
               </a:rPr>
-              <a:t>Menghadapi risiko keterlambatan pengiriman pita cukai akibat tingginya siklus cetak ulang lembar rusak.</a:t>
+              <a:t>Risiko keterlambatan serah terima pesanan ke DJBC akibat antrean cetak ulang lembar rusak yang mengancam reputasi SLA perusahaan.</a:t>
+            </a:r>
+          </a:p>
+        </p:txBody>
+      </p:sp>
+      <p:sp>
+        <p:nvSpPr>
+          <p:cNvPr id="21" name="Rounded Rectangle 20"/>
+          <p:cNvSpPr/>
+          <p:nvPr/>
+        </p:nvSpPr>
+        <p:spPr>
+          <a:xfrm>
+            <a:off x="548640" y="5961888"/>
+            <a:ext cx="11091672" cy="402336"/>
+          </a:xfrm>
+          <a:prstGeom prst="roundRect">
+            <a:avLst/>
+          </a:prstGeom>
+          <a:solidFill>
+            <a:srgbClr val="FFF9E6"/>
+          </a:solidFill>
+          <a:ln w="12700">
+            <a:solidFill>
+              <a:srgbClr val="FFE082"/>
+            </a:solidFill>
+          </a:ln>
+        </p:spPr>
+        <p:style>
+          <a:lnRef idx="1">
+            <a:schemeClr val="accent1"/>
+          </a:lnRef>
+          <a:fillRef idx="3">
+            <a:schemeClr val="accent1"/>
+          </a:fillRef>
+          <a:effectRef idx="2">
+            <a:schemeClr val="accent1"/>
+          </a:effectRef>
+          <a:fontRef idx="minor">
+            <a:schemeClr val="lt1"/>
+          </a:fontRef>
+        </p:style>
+        <p:txBody>
+          <a:bodyPr rtlCol="0" anchor="ctr" wrap="square" lIns="137160" rIns="137160" tIns="36576" bIns="36576"/>
+          <a:lstStyle/>
+          <a:p>
+            <a:pPr algn="l"/>
+            <a:r>
+              <a:rPr sz="750" b="1">
+                <a:solidFill>
+                  <a:srgbClr val="E65100"/>
+                </a:solidFill>
+                <a:latin typeface="Arial"/>
+              </a:rPr>
+              <a:t>*Catatan Asumsi Finansial (Confidentiality Protection): </a:t>
+            </a:r>
+            <a:r>
+              <a:rPr sz="750" i="1">
+                <a:solidFill>
+                  <a:srgbClr val="2A2A3D"/>
+                </a:solidFill>
+                <a:latin typeface="Arial"/>
+              </a:rPr>
+              <a:t>Nilai Rp 3.000/lembar adalah estimasi internal (kertas sekuriti, tinta khusus, depresiasi &amp; operasional mesin, tenaga kerja) semata-mata untuk simulasi dampak inovasi (cost avoidance), BUKAN harga jual resmi atau rincian biaya pokok produksi resmi dari Perum Peruri yang bersifat rahasia perusahaan.</a:t>
+            </a:r>
+          </a:p>
+        </p:txBody>
+      </p:sp>
+      <p:sp>
+        <p:nvSpPr>
+          <p:cNvPr id="22" name="TextBox 21"/>
+          <p:cNvSpPr txBox="1"/>
+          <p:nvPr/>
+        </p:nvSpPr>
+        <p:spPr>
+          <a:xfrm>
+            <a:off x="548640" y="6419088"/>
+            <a:ext cx="11091672" cy="219456"/>
+          </a:xfrm>
+          <a:prstGeom prst="rect">
+            <a:avLst/>
+          </a:prstGeom>
+          <a:noFill/>
+        </p:spPr>
+        <p:txBody>
+          <a:bodyPr wrap="square" lIns="0" tIns="0" rIns="0" bIns="0">
+            <a:spAutoFit/>
+          </a:bodyPr>
+          <a:lstStyle/>
+          <a:p>
+            <a:r>
+              <a:rPr sz="850">
+                <a:solidFill>
+                  <a:srgbClr val="6E6E82"/>
+                </a:solidFill>
+                <a:latin typeface="Arial"/>
+              </a:rPr>
+              <a:t>IAKA 2026 — Kerangka Presentasi Peserta  ·  DSS SIRINE 4.0 Unit Cetak Pita Cukai</a:t>
             </a:r>
           </a:p>
         </p:txBody>
@@ -8399,400 +7509,42 @@
 </file>
 
 <file path=ppt/slides/slide6.xml><?xml version="1.0" encoding="utf-8"?>
-<p:sld xmlns:a="http://schemas.openxmlformats.org/drawingml/2006/main" xmlns:r="http://schemas.openxmlformats.org/officeDocument/2006/relationships" xmlns:p="http://schemas.openxmlformats.org/presentationml/2006/main">
-  <p:cSld name="Slide 5">
-    <p:bg>
-      <p:bgPr>
-        <a:solidFill>
-          <a:srgbClr val="FFFFFF"/>
-        </a:solidFill>
-        <a:effectLst/>
-      </p:bgPr>
-    </p:bg>
+<p:sld xmlns:a="http://schemas.openxmlformats.org/drawingml/2006/main" xmlns:p="http://schemas.openxmlformats.org/presentationml/2006/main" xmlns:r="http://schemas.openxmlformats.org/officeDocument/2006/relationships">
+  <p:cSld>
     <p:spTree>
       <p:nvGrpSpPr>
         <p:cNvPr id="1" name=""/>
         <p:cNvGrpSpPr/>
         <p:nvPr/>
       </p:nvGrpSpPr>
-      <p:grpSpPr>
-        <a:xfrm>
-          <a:off x="0" y="0"/>
-          <a:ext cx="0" cy="0"/>
-          <a:chOff x="0" y="0"/>
-          <a:chExt cx="0" cy="0"/>
-        </a:xfrm>
-      </p:grpSpPr>
-      <p:sp>
-        <p:nvSpPr>
-          <p:cNvPr id="3" name="Shape 1"/>
-          <p:cNvSpPr/>
-          <p:nvPr/>
-        </p:nvSpPr>
-        <p:spPr>
-          <a:xfrm>
-            <a:off x="548640" y="669173"/>
-            <a:ext cx="731520" cy="731520"/>
-          </a:xfrm>
-          <a:prstGeom prst="ellipse">
-            <a:avLst/>
-          </a:prstGeom>
-          <a:solidFill>
-            <a:srgbClr val="6A2CC9"/>
-          </a:solidFill>
-          <a:ln/>
-          <a:effectLst>
-            <a:outerShdw blurRad="101600" dist="25400" dir="5400000" algn="bl" rotWithShape="0">
-              <a:srgbClr val="6A2CC9">
-                <a:alpha val="28000"/>
-              </a:srgbClr>
-            </a:outerShdw>
-          </a:effectLst>
-        </p:spPr>
-      </p:sp>
-      <p:sp>
-        <p:nvSpPr>
-          <p:cNvPr id="4" name="Text 2"/>
-          <p:cNvSpPr/>
-          <p:nvPr/>
-        </p:nvSpPr>
-        <p:spPr>
-          <a:xfrm>
-            <a:off x="548640" y="669173"/>
-            <a:ext cx="731520" cy="731520"/>
-          </a:xfrm>
-          <a:prstGeom prst="rect">
-            <a:avLst/>
-          </a:prstGeom>
-          <a:noFill/>
-          <a:ln/>
-        </p:spPr>
-        <p:txBody>
-          <a:bodyPr wrap="square" lIns="0" tIns="0" rIns="0" bIns="0" rtlCol="0" anchor="ctr"/>
-          <a:lstStyle/>
-          <a:p>
-            <a:pPr marL="0" indent="0" algn="ctr">
-              <a:buNone/>
-            </a:pPr>
-            <a:r>
-              <a:rPr lang="en-US" sz="2200" b="1" dirty="0">
-                <a:solidFill>
-                  <a:srgbClr val="FFFFFF"/>
-                </a:solidFill>
-                <a:latin typeface="Arial" pitchFamily="34" charset="0"/>
-                <a:ea typeface="Arial" pitchFamily="34" charset="-122"/>
-                <a:cs typeface="Arial" pitchFamily="34" charset="-120"/>
-              </a:rPr>
-              <a:t>03</a:t>
-            </a:r>
-            <a:endParaRPr lang="en-US" sz="2200" dirty="0"/>
-          </a:p>
-        </p:txBody>
-      </p:sp>
-      <p:sp>
-        <p:nvSpPr>
-          <p:cNvPr id="5" name="Text 3"/>
-          <p:cNvSpPr/>
-          <p:nvPr/>
-        </p:nvSpPr>
-        <p:spPr>
-          <a:xfrm>
-            <a:off x="1463040" y="683721"/>
-            <a:ext cx="7498080" cy="777240"/>
-          </a:xfrm>
-          <a:prstGeom prst="rect">
-            <a:avLst/>
-          </a:prstGeom>
-          <a:noFill/>
-          <a:ln/>
-        </p:spPr>
-        <p:txBody>
-          <a:bodyPr wrap="square" lIns="0" tIns="0" rIns="0" bIns="0" rtlCol="0" anchor="ctr"/>
-          <a:lstStyle/>
-          <a:p>
-            <a:pPr marL="0" indent="0">
-              <a:buNone/>
-            </a:pPr>
-            <a:r>
-              <a:rPr lang="en-US" sz="3400" b="1" dirty="0">
-                <a:solidFill>
-                  <a:srgbClr val="20288F"/>
-                </a:solidFill>
-                <a:latin typeface="Arial" pitchFamily="34" charset="0"/>
-                <a:ea typeface="Arial" pitchFamily="34" charset="-122"/>
-                <a:cs typeface="Arial" pitchFamily="34" charset="-120"/>
-              </a:rPr>
-              <a:t>Analisis Penyebab</a:t>
-            </a:r>
-            <a:endParaRPr lang="en-US" sz="3400" dirty="0"/>
-          </a:p>
-        </p:txBody>
-      </p:sp>
-      <p:sp>
-        <p:nvSpPr>
-          <p:cNvPr id="8" name="Text 6"/>
-          <p:cNvSpPr/>
-          <p:nvPr/>
-        </p:nvSpPr>
-        <p:spPr>
-          <a:xfrm>
-            <a:off x="548640" y="1417320"/>
-            <a:ext cx="8229600" cy="548640"/>
-          </a:xfrm>
-          <a:prstGeom prst="rect">
-            <a:avLst/>
-          </a:prstGeom>
-          <a:noFill/>
-          <a:ln/>
-        </p:spPr>
-        <p:txBody>
-          <a:bodyPr wrap="square" lIns="0" tIns="0" rIns="0" bIns="0" rtlCol="0" anchor="ctr"/>
-          <a:lstStyle/>
-          <a:p>
-            <a:pPr marL="0" indent="0">
-              <a:buNone/>
-            </a:pPr>
-            <a:r>
-              <a:rPr lang="en-US" sz="1450" b="1" i="1" dirty="0">
-                <a:solidFill>
-                  <a:srgbClr val="6A2CC9"/>
-                </a:solidFill>
-                <a:latin typeface="Arial" pitchFamily="34" charset="0"/>
-                <a:ea typeface="Arial" pitchFamily="34" charset="-122"/>
-                <a:cs typeface="Arial" pitchFamily="34" charset="-120"/>
-              </a:rPr>
-              <a:t>Tujuan bagian ini:  </a:t>
-            </a:r>
-            <a:r>
-              <a:rPr lang="en-US" sz="1450" i="1" dirty="0">
-                <a:solidFill>
-                  <a:srgbClr val="33334D"/>
-                </a:solidFill>
-                <a:latin typeface="Arial" pitchFamily="34" charset="0"/>
-                <a:ea typeface="Arial" pitchFamily="34" charset="-122"/>
-                <a:cs typeface="Arial" pitchFamily="34" charset="-120"/>
-              </a:rPr>
-              <a:t>Tunjukkan akar masalah, bukan sekadar gejalanya.</a:t>
-            </a:r>
-            <a:endParaRPr lang="en-US" sz="1450" dirty="0"/>
-          </a:p>
-        </p:txBody>
-      </p:sp>
-      <p:sp>
-        <p:nvSpPr>
-          <p:cNvPr id="9" name="Shape 7"/>
-          <p:cNvSpPr/>
-          <p:nvPr/>
-        </p:nvSpPr>
-        <p:spPr>
-          <a:xfrm>
-            <a:off x="548640" y="2148840"/>
-            <a:ext cx="7955280" cy="3703320"/>
-          </a:xfrm>
-          <a:prstGeom prst="roundRect">
-            <a:avLst>
-              <a:gd name="adj" fmla="val 2963"/>
-            </a:avLst>
-          </a:prstGeom>
-          <a:solidFill>
-            <a:srgbClr val="F5F1FF"/>
-          </a:solidFill>
-          <a:ln w="12700">
-            <a:solidFill>
-              <a:srgbClr val="EFE7FF"/>
-            </a:solidFill>
-            <a:prstDash val="solid"/>
-          </a:ln>
-          <a:effectLst>
-            <a:outerShdw blurRad="101600" dist="25400" dir="5400000" algn="bl" rotWithShape="0">
-              <a:srgbClr val="C9BEE8">
-                <a:alpha val="30000"/>
-              </a:srgbClr>
-            </a:outerShdw>
-          </a:effectLst>
-        </p:spPr>
-      </p:sp>
-      <p:sp>
-        <p:nvSpPr>
-          <p:cNvPr id="10" name="Text 8"/>
-          <p:cNvSpPr/>
-          <p:nvPr/>
-        </p:nvSpPr>
-        <p:spPr>
-          <a:xfrm>
-            <a:off x="868680" y="2377440"/>
-            <a:ext cx="7315200" cy="365760"/>
-          </a:xfrm>
-          <a:prstGeom prst="rect">
-            <a:avLst/>
-          </a:prstGeom>
-          <a:noFill/>
-          <a:ln/>
-        </p:spPr>
-        <p:txBody>
-          <a:bodyPr wrap="square" lIns="0" tIns="0" rIns="0" bIns="0" rtlCol="0" anchor="ctr"/>
-          <a:lstStyle/>
-          <a:p>
-            <a:pPr marL="0" indent="0">
-              <a:buNone/>
-            </a:pPr>
-            <a:r>
-              <a:rPr lang="en-US" sz="1600" b="1" dirty="0">
-                <a:solidFill>
-                  <a:srgbClr val="6A2CC9"/>
-                </a:solidFill>
-                <a:latin typeface="Arial" pitchFamily="34" charset="0"/>
-                <a:ea typeface="Arial" pitchFamily="34" charset="-122"/>
-                <a:cs typeface="Arial" pitchFamily="34" charset="-120"/>
-              </a:rPr>
-              <a:t>Yang harus disampaikan</a:t>
-            </a:r>
-            <a:endParaRPr lang="en-US" sz="1600" dirty="0"/>
-          </a:p>
-        </p:txBody>
-      </p:sp>
-      <p:sp>
-        <p:nvSpPr>
-          <p:cNvPr id="11" name="Text 9"/>
-          <p:cNvSpPr/>
-          <p:nvPr/>
-        </p:nvSpPr>
-        <p:spPr>
-          <a:xfrm>
-            <a:off x="914400" y="2880360"/>
-            <a:ext cx="7223760" cy="2697480"/>
-          </a:xfrm>
-          <a:prstGeom prst="rect">
-            <a:avLst/>
-          </a:prstGeom>
-          <a:noFill/>
-          <a:ln/>
-        </p:spPr>
-        <p:txBody>
-          <a:bodyPr wrap="square" lIns="0" tIns="0" rIns="0" bIns="0" rtlCol="0" anchor="t"/>
-          <a:lstStyle/>
-          <a:p>
-            <a:pPr marL="203200" indent="-203200">
-              <a:lnSpc>
-                <a:spcPct val="105000"/>
-              </a:lnSpc>
-              <a:spcAft>
-                <a:spcPts val="1200"/>
-              </a:spcAft>
-              <a:buSzPct val="100000"/>
-              <a:buChar char="•"/>
-            </a:pPr>
-            <a:r>
-              <a:rPr lang="en-US" sz="1450" dirty="0">
-                <a:solidFill>
-                  <a:srgbClr val="33334D"/>
-                </a:solidFill>
-                <a:latin typeface="Arial" pitchFamily="34" charset="0"/>
-                <a:ea typeface="Arial" pitchFamily="34" charset="-122"/>
-                <a:cs typeface="Arial" pitchFamily="34" charset="-120"/>
-              </a:rPr>
-              <a:t>Metode analisis: 5 Why atau Fishbone (cukup satu gambar ringkas).</a:t>
-            </a:r>
-            <a:endParaRPr lang="en-US" sz="1450" dirty="0"/>
-          </a:p>
-          <a:p>
-            <a:pPr marL="203200" indent="-203200">
-              <a:lnSpc>
-                <a:spcPct val="105000"/>
-              </a:lnSpc>
-              <a:spcAft>
-                <a:spcPts val="1200"/>
-              </a:spcAft>
-              <a:buSzPct val="100000"/>
-              <a:buChar char="•"/>
-            </a:pPr>
-            <a:r>
-              <a:rPr lang="en-US" sz="1450" dirty="0">
-                <a:solidFill>
-                  <a:srgbClr val="33334D"/>
-                </a:solidFill>
-                <a:latin typeface="Arial" pitchFamily="34" charset="0"/>
-                <a:ea typeface="Arial" pitchFamily="34" charset="-122"/>
-                <a:cs typeface="Arial" pitchFamily="34" charset="-120"/>
-              </a:rPr>
-              <a:t>Akar masalah utama yang akan diselesaikan.</a:t>
-            </a:r>
-            <a:endParaRPr lang="en-US" sz="1450" dirty="0"/>
-          </a:p>
-          <a:p>
-            <a:pPr marL="203200" indent="-203200">
-              <a:lnSpc>
-                <a:spcPct val="105000"/>
-              </a:lnSpc>
-              <a:spcAft>
-                <a:spcPts val="1200"/>
-              </a:spcAft>
-              <a:buSzPct val="100000"/>
-              <a:buChar char="•"/>
-            </a:pPr>
-            <a:r>
-              <a:rPr lang="en-US" sz="1450" dirty="0">
-                <a:solidFill>
-                  <a:srgbClr val="33334D"/>
-                </a:solidFill>
-                <a:latin typeface="Arial" pitchFamily="34" charset="0"/>
-                <a:ea typeface="Arial" pitchFamily="34" charset="-122"/>
-                <a:cs typeface="Arial" pitchFamily="34" charset="-120"/>
-              </a:rPr>
-              <a:t>Temuan / bukti yang mendukung akar masalah tersebut.</a:t>
-            </a:r>
-            <a:endParaRPr lang="en-US" sz="1450" dirty="0"/>
-          </a:p>
-        </p:txBody>
-      </p:sp>
-      <p:sp>
-        <p:nvSpPr>
-          <p:cNvPr id="12" name="Text 10"/>
-          <p:cNvSpPr/>
-          <p:nvPr/>
-        </p:nvSpPr>
-        <p:spPr>
-          <a:xfrm>
-            <a:off x="548640" y="6400800"/>
-            <a:ext cx="11094415" cy="274320"/>
-          </a:xfrm>
-          <a:prstGeom prst="rect">
-            <a:avLst/>
-          </a:prstGeom>
-          <a:noFill/>
-          <a:ln/>
-        </p:spPr>
-        <p:txBody>
-          <a:bodyPr wrap="square" lIns="0" tIns="0" rIns="0" bIns="0" rtlCol="0" anchor="ctr"/>
-          <a:lstStyle/>
-          <a:p>
-            <a:pPr marL="0" indent="0" algn="l">
-              <a:buNone/>
-            </a:pPr>
-            <a:r>
-              <a:rPr lang="en-US" sz="950" i="1" dirty="0">
-                <a:solidFill>
-                  <a:srgbClr val="8A8A9A"/>
-                </a:solidFill>
-                <a:latin typeface="Arial" pitchFamily="34" charset="0"/>
-                <a:ea typeface="Arial" pitchFamily="34" charset="-122"/>
-                <a:cs typeface="Arial" pitchFamily="34" charset="-120"/>
-              </a:rPr>
-              <a:t>Ganti poin di atas dengan konten proyek Anda (grafik, tabel, foto, atau diagram).  ·  IAKA 2026 — Kerangka Presentasi Peserta</a:t>
-            </a:r>
-            <a:endParaRPr lang="en-US" sz="950" dirty="0"/>
-          </a:p>
-        </p:txBody>
-      </p:sp>
+      <p:grpSpPr/>
       <p:pic>
         <p:nvPicPr>
-          <p:cNvPr id="14" name="Picture 13">
-            <a:extLst>
-              <a:ext uri="{FF2B5EF4-FFF2-40B4-BE49-F238E27FC236}">
-                <a16:creationId xmlns:a16="http://schemas.microsoft.com/office/drawing/2014/main" id="{92748BE0-A4CA-0729-44E4-106E9392E7F5}"/>
-              </a:ext>
-            </a:extLst>
-          </p:cNvPr>
+          <p:cNvPr id="2" name="Picture 1" descr="image.png"/>
+          <p:cNvPicPr>
+            <a:picLocks noChangeAspect="1"/>
+          </p:cNvPicPr>
+          <p:nvPr/>
+        </p:nvPicPr>
+        <p:blipFill>
+          <a:blip r:embed="rId2"/>
+          <a:stretch>
+            <a:fillRect/>
+          </a:stretch>
+        </p:blipFill>
+        <p:spPr>
+          <a:xfrm>
+            <a:off x="-107899" y="-179222"/>
+            <a:ext cx="1448409" cy="814730"/>
+          </a:xfrm>
+          <a:prstGeom prst="rect">
+            <a:avLst/>
+          </a:prstGeom>
+        </p:spPr>
+      </p:pic>
+      <p:pic>
+        <p:nvPicPr>
+          <p:cNvPr id="3" name="Picture 2" descr="image.png"/>
           <p:cNvPicPr>
             <a:picLocks noChangeAspect="1"/>
           </p:cNvPicPr>
@@ -8806,44 +7558,280 @@
         </p:blipFill>
         <p:spPr>
           <a:xfrm>
-            <a:off x="11056239" y="11533"/>
-            <a:ext cx="1140374" cy="634767"/>
+            <a:off x="11055096" y="11887"/>
+            <a:ext cx="1140256" cy="634593"/>
           </a:xfrm>
           <a:prstGeom prst="rect">
             <a:avLst/>
           </a:prstGeom>
         </p:spPr>
       </p:pic>
-      <p:pic>
-        <p:nvPicPr>
-          <p:cNvPr id="16" name="Picture 15">
-            <a:extLst>
-              <a:ext uri="{FF2B5EF4-FFF2-40B4-BE49-F238E27FC236}">
-                <a16:creationId xmlns:a16="http://schemas.microsoft.com/office/drawing/2014/main" id="{5B6D5AAC-C76D-1890-13E0-0F084C57EB97}"/>
-              </a:ext>
-            </a:extLst>
-          </p:cNvPr>
-          <p:cNvPicPr>
-            <a:picLocks noChangeAspect="1"/>
-          </p:cNvPicPr>
-          <p:nvPr/>
-        </p:nvPicPr>
-        <p:blipFill>
-          <a:blip r:embed="rId4"/>
-          <a:stretch>
-            <a:fillRect/>
-          </a:stretch>
-        </p:blipFill>
-        <p:spPr>
-          <a:xfrm>
-            <a:off x="-108068" y="-179554"/>
-            <a:ext cx="1448261" cy="814647"/>
-          </a:xfrm>
-          <a:prstGeom prst="rect">
-            <a:avLst/>
-          </a:prstGeom>
-        </p:spPr>
-      </p:pic>
+      <p:sp>
+        <p:nvSpPr>
+          <p:cNvPr id="4" name="Rounded Rectangle 3"/>
+          <p:cNvSpPr/>
+          <p:nvPr/>
+        </p:nvSpPr>
+        <p:spPr>
+          <a:xfrm>
+            <a:off x="548640" y="594360"/>
+            <a:ext cx="731520" cy="658368"/>
+          </a:xfrm>
+          <a:prstGeom prst="roundRect">
+            <a:avLst/>
+          </a:prstGeom>
+          <a:solidFill>
+            <a:srgbClr val="6A2CC9"/>
+          </a:solidFill>
+          <a:ln>
+            <a:noFill/>
+          </a:ln>
+        </p:spPr>
+        <p:style>
+          <a:lnRef idx="1">
+            <a:schemeClr val="accent1"/>
+          </a:lnRef>
+          <a:fillRef idx="3">
+            <a:schemeClr val="accent1"/>
+          </a:fillRef>
+          <a:effectRef idx="2">
+            <a:schemeClr val="accent1"/>
+          </a:effectRef>
+          <a:fontRef idx="minor">
+            <a:schemeClr val="lt1"/>
+          </a:fontRef>
+        </p:style>
+        <p:txBody>
+          <a:bodyPr rtlCol="0" anchor="ctr" wrap="none" lIns="0" tIns="0" rIns="0" bIns="0"/>
+          <a:lstStyle/>
+          <a:p>
+            <a:pPr algn="ctr"/>
+            <a:r>
+              <a:rPr sz="2000" b="1">
+                <a:solidFill>
+                  <a:srgbClr val="FFFFFF"/>
+                </a:solidFill>
+                <a:latin typeface="Arial"/>
+              </a:rPr>
+              <a:t>03</a:t>
+            </a:r>
+          </a:p>
+        </p:txBody>
+      </p:sp>
+      <p:sp>
+        <p:nvSpPr>
+          <p:cNvPr id="5" name="TextBox 4"/>
+          <p:cNvSpPr txBox="1"/>
+          <p:nvPr/>
+        </p:nvSpPr>
+        <p:spPr>
+          <a:xfrm>
+            <a:off x="1417320" y="548640"/>
+            <a:ext cx="9326880" cy="731520"/>
+          </a:xfrm>
+          <a:prstGeom prst="rect">
+            <a:avLst/>
+          </a:prstGeom>
+          <a:noFill/>
+        </p:spPr>
+        <p:txBody>
+          <a:bodyPr wrap="square" lIns="0" tIns="0" rIns="0" bIns="0">
+            <a:spAutoFit/>
+          </a:bodyPr>
+          <a:lstStyle/>
+          <a:p>
+            <a:pPr algn="l"/>
+            <a:r>
+              <a:rPr sz="2400" b="1">
+                <a:solidFill>
+                  <a:srgbClr val="20288F"/>
+                </a:solidFill>
+                <a:latin typeface="Arial"/>
+              </a:rPr>
+              <a:t>Analisis Penyebab</a:t>
+            </a:r>
+          </a:p>
+        </p:txBody>
+      </p:sp>
+      <p:sp>
+        <p:nvSpPr>
+          <p:cNvPr id="6" name="TextBox 5"/>
+          <p:cNvSpPr txBox="1"/>
+          <p:nvPr/>
+        </p:nvSpPr>
+        <p:spPr>
+          <a:xfrm>
+            <a:off x="548640" y="1353312"/>
+            <a:ext cx="10789920" cy="347472"/>
+          </a:xfrm>
+          <a:prstGeom prst="rect">
+            <a:avLst/>
+          </a:prstGeom>
+          <a:noFill/>
+        </p:spPr>
+        <p:txBody>
+          <a:bodyPr wrap="square" lIns="0" tIns="0" rIns="0" bIns="0">
+            <a:spAutoFit/>
+          </a:bodyPr>
+          <a:lstStyle/>
+          <a:p>
+            <a:r>
+              <a:rPr sz="1150" b="1">
+                <a:solidFill>
+                  <a:srgbClr val="6A2CC9"/>
+                </a:solidFill>
+                <a:latin typeface="Arial"/>
+              </a:rPr>
+              <a:t>Tujuan bagian ini:  </a:t>
+            </a:r>
+            <a:r>
+              <a:rPr sz="1150" b="0">
+                <a:solidFill>
+                  <a:srgbClr val="2A2A3D"/>
+                </a:solidFill>
+                <a:latin typeface="Arial"/>
+              </a:rPr>
+              <a:t>Tunjukkan akar masalah, bukan sekadar gejalanya.</a:t>
+            </a:r>
+          </a:p>
+        </p:txBody>
+      </p:sp>
+      <p:sp>
+        <p:nvSpPr>
+          <p:cNvPr id="7" name="Rounded Rectangle 6"/>
+          <p:cNvSpPr/>
+          <p:nvPr/>
+        </p:nvSpPr>
+        <p:spPr>
+          <a:xfrm>
+            <a:off x="548640" y="2011680"/>
+            <a:ext cx="7955279" cy="3840480"/>
+          </a:xfrm>
+          <a:prstGeom prst="roundRect">
+            <a:avLst/>
+          </a:prstGeom>
+          <a:solidFill>
+            <a:srgbClr val="F8F6FE"/>
+          </a:solidFill>
+          <a:ln w="12700">
+            <a:solidFill>
+              <a:srgbClr val="D9CEF7"/>
+            </a:solidFill>
+          </a:ln>
+        </p:spPr>
+        <p:style>
+          <a:lnRef idx="1">
+            <a:schemeClr val="accent1"/>
+          </a:lnRef>
+          <a:fillRef idx="3">
+            <a:schemeClr val="accent1"/>
+          </a:fillRef>
+          <a:effectRef idx="2">
+            <a:schemeClr val="accent1"/>
+          </a:effectRef>
+          <a:fontRef idx="minor">
+            <a:schemeClr val="lt1"/>
+          </a:fontRef>
+        </p:style>
+        <p:txBody>
+          <a:bodyPr rtlCol="0" anchor="ctr" wrap="square" lIns="228600" rIns="228600" tIns="228600" bIns="182880"/>
+          <a:lstStyle/>
+          <a:p>
+            <a:pPr algn="ctr"/>
+            <a:r>
+              <a:rPr sz="1300" b="1">
+                <a:solidFill>
+                  <a:srgbClr val="6A2CC9"/>
+                </a:solidFill>
+                <a:latin typeface="Arial"/>
+              </a:rPr>
+              <a:t>Yang harus disampaikan</a:t>
+            </a:r>
+          </a:p>
+          <a:p>
+            <a:pPr>
+              <a:spcBef>
+                <a:spcPts val="1200"/>
+              </a:spcBef>
+            </a:pPr>
+            <a:r>
+              <a:rPr sz="1100">
+                <a:solidFill>
+                  <a:srgbClr val="2A2A3D"/>
+                </a:solidFill>
+                <a:latin typeface="Arial"/>
+              </a:rPr>
+              <a:t>•  Metode analisis: 5 Why atau Fishbone (cukup satu gambar ringkas).</a:t>
+            </a:r>
+          </a:p>
+          <a:p>
+            <a:pPr>
+              <a:spcBef>
+                <a:spcPts val="1200"/>
+              </a:spcBef>
+            </a:pPr>
+            <a:r>
+              <a:rPr sz="1100">
+                <a:solidFill>
+                  <a:srgbClr val="2A2A3D"/>
+                </a:solidFill>
+                <a:latin typeface="Arial"/>
+              </a:rPr>
+              <a:t>•  Akar masalah utama yang akan diselesaikan.</a:t>
+            </a:r>
+          </a:p>
+          <a:p>
+            <a:pPr>
+              <a:spcBef>
+                <a:spcPts val="1200"/>
+              </a:spcBef>
+            </a:pPr>
+            <a:r>
+              <a:rPr sz="1100">
+                <a:solidFill>
+                  <a:srgbClr val="2A2A3D"/>
+                </a:solidFill>
+                <a:latin typeface="Arial"/>
+              </a:rPr>
+              <a:t>•  Temuan / bukti yang mendukung akar masalah tersebut.</a:t>
+            </a:r>
+          </a:p>
+        </p:txBody>
+      </p:sp>
+      <p:sp>
+        <p:nvSpPr>
+          <p:cNvPr id="8" name="TextBox 7"/>
+          <p:cNvSpPr txBox="1"/>
+          <p:nvPr/>
+        </p:nvSpPr>
+        <p:spPr>
+          <a:xfrm>
+            <a:off x="548640" y="6419088"/>
+            <a:ext cx="11091672" cy="219456"/>
+          </a:xfrm>
+          <a:prstGeom prst="rect">
+            <a:avLst/>
+          </a:prstGeom>
+          <a:noFill/>
+        </p:spPr>
+        <p:txBody>
+          <a:bodyPr wrap="square" lIns="0" tIns="0" rIns="0" bIns="0">
+            <a:spAutoFit/>
+          </a:bodyPr>
+          <a:lstStyle/>
+          <a:p>
+            <a:r>
+              <a:rPr sz="850">
+                <a:solidFill>
+                  <a:srgbClr val="6E6E82"/>
+                </a:solidFill>
+                <a:latin typeface="Arial"/>
+              </a:rPr>
+              <a:t>Ganti poin di atas dengan konten proyek Anda (grafik, tabel, foto, atau diagram).  ·  IAKA 2026 — Kerangka Presentasi Peserta</a:t>
+            </a:r>
+          </a:p>
+        </p:txBody>
+      </p:sp>
     </p:spTree>
   </p:cSld>
   <p:clrMapOvr>

--- a/Kerangka_Presentasi_Peserta_IAKA_2026 (1).pptx
+++ b/Kerangka_Presentasi_Peserta_IAKA_2026 (1).pptx
@@ -14,6 +14,7 @@
     <p:sldId id="267" r:id="rId18"/>
     <p:sldId id="259" r:id="rId5"/>
     <p:sldId id="260" r:id="rId6"/>
+    <p:sldId id="268" r:id="rId20"/>
     <p:sldId id="261" r:id="rId7"/>
     <p:sldId id="262" r:id="rId8"/>
     <p:sldId id="263" r:id="rId9"/>
@@ -2265,6 +2266,484 @@
 
 <file path=ppt/slides/slide10.xml><?xml version="1.0" encoding="utf-8"?>
 <p:sld xmlns:a="http://schemas.openxmlformats.org/drawingml/2006/main" xmlns:r="http://schemas.openxmlformats.org/officeDocument/2006/relationships" xmlns:p="http://schemas.openxmlformats.org/presentationml/2006/main">
+  <p:cSld name="Slide 8">
+    <p:bg>
+      <p:bgPr>
+        <a:solidFill>
+          <a:srgbClr val="FFFFFF"/>
+        </a:solidFill>
+        <a:effectLst/>
+      </p:bgPr>
+    </p:bg>
+    <p:spTree>
+      <p:nvGrpSpPr>
+        <p:cNvPr id="1" name=""/>
+        <p:cNvGrpSpPr/>
+        <p:nvPr/>
+      </p:nvGrpSpPr>
+      <p:grpSpPr>
+        <a:xfrm>
+          <a:off x="0" y="0"/>
+          <a:ext cx="0" cy="0"/>
+          <a:chOff x="0" y="0"/>
+          <a:chExt cx="0" cy="0"/>
+        </a:xfrm>
+      </p:grpSpPr>
+      <p:sp>
+        <p:nvSpPr>
+          <p:cNvPr id="3" name="Shape 1"/>
+          <p:cNvSpPr/>
+          <p:nvPr/>
+        </p:nvSpPr>
+        <p:spPr>
+          <a:xfrm>
+            <a:off x="548640" y="619299"/>
+            <a:ext cx="731520" cy="731520"/>
+          </a:xfrm>
+          <a:prstGeom prst="ellipse">
+            <a:avLst/>
+          </a:prstGeom>
+          <a:solidFill>
+            <a:srgbClr val="6A2CC9"/>
+          </a:solidFill>
+          <a:ln/>
+          <a:effectLst>
+            <a:outerShdw blurRad="101600" dist="25400" dir="5400000" algn="bl" rotWithShape="0">
+              <a:srgbClr val="6A2CC9">
+                <a:alpha val="28000"/>
+              </a:srgbClr>
+            </a:outerShdw>
+          </a:effectLst>
+        </p:spPr>
+      </p:sp>
+      <p:sp>
+        <p:nvSpPr>
+          <p:cNvPr id="4" name="Text 2"/>
+          <p:cNvSpPr/>
+          <p:nvPr/>
+        </p:nvSpPr>
+        <p:spPr>
+          <a:xfrm>
+            <a:off x="548640" y="619299"/>
+            <a:ext cx="731520" cy="731520"/>
+          </a:xfrm>
+          <a:prstGeom prst="rect">
+            <a:avLst/>
+          </a:prstGeom>
+          <a:noFill/>
+          <a:ln/>
+        </p:spPr>
+        <p:txBody>
+          <a:bodyPr wrap="square" lIns="0" tIns="0" rIns="0" bIns="0" rtlCol="0" anchor="ctr"/>
+          <a:lstStyle/>
+          <a:p>
+            <a:pPr marL="0" indent="0" algn="ctr">
+              <a:buNone/>
+            </a:pPr>
+            <a:r>
+              <a:rPr lang="en-US" sz="2200" b="1" dirty="0">
+                <a:solidFill>
+                  <a:srgbClr val="FFFFFF"/>
+                </a:solidFill>
+                <a:latin typeface="Arial" pitchFamily="34" charset="0"/>
+                <a:ea typeface="Arial" pitchFamily="34" charset="-122"/>
+                <a:cs typeface="Arial" pitchFamily="34" charset="-120"/>
+              </a:rPr>
+              <a:t>06</a:t>
+            </a:r>
+            <a:endParaRPr lang="en-US" sz="2200" dirty="0"/>
+          </a:p>
+        </p:txBody>
+      </p:sp>
+      <p:sp>
+        <p:nvSpPr>
+          <p:cNvPr id="5" name="Text 3"/>
+          <p:cNvSpPr/>
+          <p:nvPr/>
+        </p:nvSpPr>
+        <p:spPr>
+          <a:xfrm>
+            <a:off x="1463040" y="606829"/>
+            <a:ext cx="7498080" cy="777240"/>
+          </a:xfrm>
+          <a:prstGeom prst="rect">
+            <a:avLst/>
+          </a:prstGeom>
+          <a:noFill/>
+          <a:ln/>
+        </p:spPr>
+        <p:txBody>
+          <a:bodyPr wrap="square" lIns="0" tIns="0" rIns="0" bIns="0" rtlCol="0" anchor="ctr"/>
+          <a:lstStyle/>
+          <a:p>
+            <a:pPr marL="0" indent="0">
+              <a:buNone/>
+            </a:pPr>
+            <a:r>
+              <a:rPr lang="en-US" sz="3400" b="1" dirty="0">
+                <a:solidFill>
+                  <a:srgbClr val="20288F"/>
+                </a:solidFill>
+                <a:latin typeface="Arial" pitchFamily="34" charset="0"/>
+                <a:ea typeface="Arial" pitchFamily="34" charset="-122"/>
+                <a:cs typeface="Arial" pitchFamily="34" charset="-120"/>
+              </a:rPr>
+              <a:t>Dampak</a:t>
+            </a:r>
+            <a:endParaRPr lang="en-US" sz="3400" dirty="0"/>
+          </a:p>
+        </p:txBody>
+      </p:sp>
+      <p:sp>
+        <p:nvSpPr>
+          <p:cNvPr id="8" name="Text 6"/>
+          <p:cNvSpPr/>
+          <p:nvPr/>
+        </p:nvSpPr>
+        <p:spPr>
+          <a:xfrm>
+            <a:off x="548640" y="1417320"/>
+            <a:ext cx="8229600" cy="548640"/>
+          </a:xfrm>
+          <a:prstGeom prst="rect">
+            <a:avLst/>
+          </a:prstGeom>
+          <a:noFill/>
+          <a:ln/>
+        </p:spPr>
+        <p:txBody>
+          <a:bodyPr wrap="square" lIns="0" tIns="0" rIns="0" bIns="0" rtlCol="0" anchor="ctr"/>
+          <a:lstStyle/>
+          <a:p>
+            <a:pPr marL="0" indent="0">
+              <a:buNone/>
+            </a:pPr>
+            <a:r>
+              <a:rPr lang="en-US" sz="1450" b="1" i="1" dirty="0">
+                <a:solidFill>
+                  <a:srgbClr val="6A2CC9"/>
+                </a:solidFill>
+                <a:latin typeface="Arial" pitchFamily="34" charset="0"/>
+                <a:ea typeface="Arial" pitchFamily="34" charset="-122"/>
+                <a:cs typeface="Arial" pitchFamily="34" charset="-120"/>
+              </a:rPr>
+              <a:t>Tujuan bagian ini:  </a:t>
+            </a:r>
+            <a:r>
+              <a:rPr lang="en-US" sz="1450" i="1" dirty="0">
+                <a:solidFill>
+                  <a:srgbClr val="33334D"/>
+                </a:solidFill>
+                <a:latin typeface="Arial" pitchFamily="34" charset="0"/>
+                <a:ea typeface="Arial" pitchFamily="34" charset="-122"/>
+                <a:cs typeface="Arial" pitchFamily="34" charset="-120"/>
+              </a:rPr>
+              <a:t>Sajikan dampak yang sudah tervalidasi — finansial dan non-finansial.</a:t>
+            </a:r>
+            <a:endParaRPr lang="en-US" sz="1450" dirty="0"/>
+          </a:p>
+        </p:txBody>
+      </p:sp>
+      <p:sp>
+        <p:nvSpPr>
+          <p:cNvPr id="9" name="Shape 7"/>
+          <p:cNvSpPr/>
+          <p:nvPr/>
+        </p:nvSpPr>
+        <p:spPr>
+          <a:xfrm>
+            <a:off x="548640" y="2148840"/>
+            <a:ext cx="7955280" cy="3703320"/>
+          </a:xfrm>
+          <a:prstGeom prst="roundRect">
+            <a:avLst>
+              <a:gd name="adj" fmla="val 2963"/>
+            </a:avLst>
+          </a:prstGeom>
+          <a:solidFill>
+            <a:srgbClr val="F5F1FF"/>
+          </a:solidFill>
+          <a:ln w="12700">
+            <a:solidFill>
+              <a:srgbClr val="EFE7FF"/>
+            </a:solidFill>
+            <a:prstDash val="solid"/>
+          </a:ln>
+          <a:effectLst>
+            <a:outerShdw blurRad="101600" dist="25400" dir="5400000" algn="bl" rotWithShape="0">
+              <a:srgbClr val="C9BEE8">
+                <a:alpha val="30000"/>
+              </a:srgbClr>
+            </a:outerShdw>
+          </a:effectLst>
+        </p:spPr>
+      </p:sp>
+      <p:sp>
+        <p:nvSpPr>
+          <p:cNvPr id="10" name="Text 8"/>
+          <p:cNvSpPr/>
+          <p:nvPr/>
+        </p:nvSpPr>
+        <p:spPr>
+          <a:xfrm>
+            <a:off x="868680" y="2377440"/>
+            <a:ext cx="7315200" cy="365760"/>
+          </a:xfrm>
+          <a:prstGeom prst="rect">
+            <a:avLst/>
+          </a:prstGeom>
+          <a:noFill/>
+          <a:ln/>
+        </p:spPr>
+        <p:txBody>
+          <a:bodyPr wrap="square" lIns="0" tIns="0" rIns="0" bIns="0" rtlCol="0" anchor="ctr"/>
+          <a:lstStyle/>
+          <a:p>
+            <a:pPr marL="0" indent="0">
+              <a:buNone/>
+            </a:pPr>
+            <a:r>
+              <a:rPr lang="en-US" sz="1600" b="1" dirty="0">
+                <a:solidFill>
+                  <a:srgbClr val="6A2CC9"/>
+                </a:solidFill>
+                <a:latin typeface="Arial" pitchFamily="34" charset="0"/>
+                <a:ea typeface="Arial" pitchFamily="34" charset="-122"/>
+                <a:cs typeface="Arial" pitchFamily="34" charset="-120"/>
+              </a:rPr>
+              <a:t>Yang harus disampaikan</a:t>
+            </a:r>
+            <a:endParaRPr lang="en-US" sz="1600" dirty="0"/>
+          </a:p>
+        </p:txBody>
+      </p:sp>
+      <p:sp>
+        <p:nvSpPr>
+          <p:cNvPr id="11" name="Text 9"/>
+          <p:cNvSpPr/>
+          <p:nvPr/>
+        </p:nvSpPr>
+        <p:spPr>
+          <a:xfrm>
+            <a:off x="914400" y="2880360"/>
+            <a:ext cx="7223760" cy="2697480"/>
+          </a:xfrm>
+          <a:prstGeom prst="rect">
+            <a:avLst/>
+          </a:prstGeom>
+          <a:noFill/>
+          <a:ln/>
+        </p:spPr>
+        <p:txBody>
+          <a:bodyPr wrap="square" lIns="0" tIns="0" rIns="0" bIns="0" rtlCol="0" anchor="t"/>
+          <a:lstStyle/>
+          <a:p>
+            <a:pPr marL="203200" indent="-203200">
+              <a:lnSpc>
+                <a:spcPct val="105000"/>
+              </a:lnSpc>
+              <a:spcAft>
+                <a:spcPts val="1200"/>
+              </a:spcAft>
+              <a:buSzPct val="100000"/>
+              <a:buChar char="•"/>
+            </a:pPr>
+            <a:r>
+              <a:rPr lang="en-US" sz="1450" dirty="0">
+                <a:solidFill>
+                  <a:srgbClr val="33334D"/>
+                </a:solidFill>
+                <a:latin typeface="Arial" pitchFamily="34" charset="0"/>
+                <a:ea typeface="Arial" pitchFamily="34" charset="-122"/>
+                <a:cs typeface="Arial" pitchFamily="34" charset="-120"/>
+              </a:rPr>
+              <a:t>Cost saving / cost avoidance / revenue, diukur vs baseline terverifikasi.</a:t>
+            </a:r>
+            <a:endParaRPr lang="en-US" sz="1450" dirty="0"/>
+          </a:p>
+          <a:p>
+            <a:pPr marL="203200" indent="-203200">
+              <a:lnSpc>
+                <a:spcPct val="105000"/>
+              </a:lnSpc>
+              <a:spcAft>
+                <a:spcPts val="1200"/>
+              </a:spcAft>
+              <a:buSzPct val="100000"/>
+              <a:buChar char="•"/>
+            </a:pPr>
+            <a:r>
+              <a:rPr lang="en-US" sz="1450" dirty="0">
+                <a:solidFill>
+                  <a:srgbClr val="33334D"/>
+                </a:solidFill>
+                <a:latin typeface="Arial" pitchFamily="34" charset="0"/>
+                <a:ea typeface="Arial" pitchFamily="34" charset="-122"/>
+                <a:cs typeface="Arial" pitchFamily="34" charset="-120"/>
+              </a:rPr>
+              <a:t>Nilai bersih &amp; payback period .</a:t>
+            </a:r>
+            <a:endParaRPr lang="en-US" sz="1450" dirty="0"/>
+          </a:p>
+          <a:p>
+            <a:pPr marL="203200" indent="-203200">
+              <a:lnSpc>
+                <a:spcPct val="105000"/>
+              </a:lnSpc>
+              <a:spcAft>
+                <a:spcPts val="1200"/>
+              </a:spcAft>
+              <a:buSzPct val="100000"/>
+              <a:buChar char="•"/>
+            </a:pPr>
+            <a:r>
+              <a:rPr lang="en-US" sz="1450" dirty="0">
+                <a:solidFill>
+                  <a:srgbClr val="33334D"/>
+                </a:solidFill>
+                <a:latin typeface="Arial" pitchFamily="34" charset="0"/>
+                <a:ea typeface="Arial" pitchFamily="34" charset="-122"/>
+                <a:cs typeface="Arial" pitchFamily="34" charset="-120"/>
+              </a:rPr>
+              <a:t>Dampak non-finansial: mutu, K3L, kepatuhan, kepuasan pengguna.</a:t>
+            </a:r>
+            <a:endParaRPr lang="en-US" sz="1450" dirty="0"/>
+          </a:p>
+          <a:p>
+            <a:pPr marL="203200" indent="-203200">
+              <a:lnSpc>
+                <a:spcPct val="105000"/>
+              </a:lnSpc>
+              <a:spcAft>
+                <a:spcPts val="1200"/>
+              </a:spcAft>
+              <a:buSzPct val="100000"/>
+              <a:buChar char="•"/>
+            </a:pPr>
+            <a:r>
+              <a:rPr lang="en-US" sz="1450" dirty="0">
+                <a:solidFill>
+                  <a:srgbClr val="33334D"/>
+                </a:solidFill>
+                <a:latin typeface="Arial" pitchFamily="34" charset="0"/>
+                <a:ea typeface="Arial" pitchFamily="34" charset="-122"/>
+                <a:cs typeface="Arial" pitchFamily="34" charset="-120"/>
+              </a:rPr>
+              <a:t>Keterkaitan dengan strategi perusahaan &amp; potensi replikasi.</a:t>
+            </a:r>
+            <a:endParaRPr lang="en-US" sz="1450" dirty="0"/>
+          </a:p>
+        </p:txBody>
+      </p:sp>
+      <p:sp>
+        <p:nvSpPr>
+          <p:cNvPr id="12" name="Text 10"/>
+          <p:cNvSpPr/>
+          <p:nvPr/>
+        </p:nvSpPr>
+        <p:spPr>
+          <a:xfrm>
+            <a:off x="548640" y="6400800"/>
+            <a:ext cx="11094415" cy="274320"/>
+          </a:xfrm>
+          <a:prstGeom prst="rect">
+            <a:avLst/>
+          </a:prstGeom>
+          <a:noFill/>
+          <a:ln/>
+        </p:spPr>
+        <p:txBody>
+          <a:bodyPr wrap="square" lIns="0" tIns="0" rIns="0" bIns="0" rtlCol="0" anchor="ctr"/>
+          <a:lstStyle/>
+          <a:p>
+            <a:pPr marL="0" indent="0" algn="l">
+              <a:buNone/>
+            </a:pPr>
+            <a:r>
+              <a:rPr lang="en-US" sz="950" i="1" dirty="0">
+                <a:solidFill>
+                  <a:srgbClr val="8A8A9A"/>
+                </a:solidFill>
+                <a:latin typeface="Arial" pitchFamily="34" charset="0"/>
+                <a:ea typeface="Arial" pitchFamily="34" charset="-122"/>
+                <a:cs typeface="Arial" pitchFamily="34" charset="-120"/>
+              </a:rPr>
+              <a:t>Ganti poin di atas dengan konten proyek Anda (grafik, tabel, foto, atau diagram).  ·  IAKA 2026 — Kerangka Presentasi Peserta</a:t>
+            </a:r>
+            <a:endParaRPr lang="en-US" sz="950" dirty="0"/>
+          </a:p>
+        </p:txBody>
+      </p:sp>
+      <p:pic>
+        <p:nvPicPr>
+          <p:cNvPr id="14" name="Picture 13">
+            <a:extLst>
+              <a:ext uri="{FF2B5EF4-FFF2-40B4-BE49-F238E27FC236}">
+                <a16:creationId xmlns:a16="http://schemas.microsoft.com/office/drawing/2014/main" id="{113CABC3-586E-7F22-C24E-7E3D7593E669}"/>
+              </a:ext>
+            </a:extLst>
+          </p:cNvPr>
+          <p:cNvPicPr>
+            <a:picLocks noChangeAspect="1"/>
+          </p:cNvPicPr>
+          <p:nvPr/>
+        </p:nvPicPr>
+        <p:blipFill>
+          <a:blip r:embed="rId3"/>
+          <a:stretch>
+            <a:fillRect/>
+          </a:stretch>
+        </p:blipFill>
+        <p:spPr>
+          <a:xfrm>
+            <a:off x="11056239" y="11533"/>
+            <a:ext cx="1140374" cy="634767"/>
+          </a:xfrm>
+          <a:prstGeom prst="rect">
+            <a:avLst/>
+          </a:prstGeom>
+        </p:spPr>
+      </p:pic>
+      <p:pic>
+        <p:nvPicPr>
+          <p:cNvPr id="16" name="Picture 15">
+            <a:extLst>
+              <a:ext uri="{FF2B5EF4-FFF2-40B4-BE49-F238E27FC236}">
+                <a16:creationId xmlns:a16="http://schemas.microsoft.com/office/drawing/2014/main" id="{A9D540F0-33FD-3602-4087-CD7695575FC6}"/>
+              </a:ext>
+            </a:extLst>
+          </p:cNvPr>
+          <p:cNvPicPr>
+            <a:picLocks noChangeAspect="1"/>
+          </p:cNvPicPr>
+          <p:nvPr/>
+        </p:nvPicPr>
+        <p:blipFill>
+          <a:blip r:embed="rId4"/>
+          <a:stretch>
+            <a:fillRect/>
+          </a:stretch>
+        </p:blipFill>
+        <p:spPr>
+          <a:xfrm>
+            <a:off x="-108068" y="-179554"/>
+            <a:ext cx="1448261" cy="814647"/>
+          </a:xfrm>
+          <a:prstGeom prst="rect">
+            <a:avLst/>
+          </a:prstGeom>
+        </p:spPr>
+      </p:pic>
+    </p:spTree>
+  </p:cSld>
+  <p:clrMapOvr>
+    <a:masterClrMapping/>
+  </p:clrMapOvr>
+</p:sld>
+</file>
+
+<file path=ppt/slides/slide11.xml><?xml version="1.0" encoding="utf-8"?>
+<p:sld xmlns:a="http://schemas.openxmlformats.org/drawingml/2006/main" xmlns:r="http://schemas.openxmlformats.org/officeDocument/2006/relationships" xmlns:p="http://schemas.openxmlformats.org/presentationml/2006/main">
   <p:cSld name="Slide 9">
     <p:bg>
       <p:bgPr>
@@ -2759,7 +3238,7 @@
 </p:sld>
 </file>
 
-<file path=ppt/slides/slide11.xml><?xml version="1.0" encoding="utf-8"?>
+<file path=ppt/slides/slide12.xml><?xml version="1.0" encoding="utf-8"?>
 <p:sld xmlns:a="http://schemas.openxmlformats.org/drawingml/2006/main" xmlns:r="http://schemas.openxmlformats.org/officeDocument/2006/relationships" xmlns:p="http://schemas.openxmlformats.org/presentationml/2006/main">
   <p:cSld name="Slide 10">
     <p:bg>
@@ -3237,7 +3716,7 @@
 </p:sld>
 </file>
 
-<file path=ppt/slides/slide12.xml><?xml version="1.0" encoding="utf-8"?>
+<file path=ppt/slides/slide13.xml><?xml version="1.0" encoding="utf-8"?>
 <p:sld xmlns:a="http://schemas.openxmlformats.org/drawingml/2006/main" xmlns:r="http://schemas.openxmlformats.org/officeDocument/2006/relationships" xmlns:p="http://schemas.openxmlformats.org/presentationml/2006/main">
   <p:cSld name="Slide 11">
     <p:bg>
@@ -7613,7 +8092,7 @@
                 </a:solidFill>
                 <a:latin typeface="Arial"/>
               </a:rPr>
-              <a:t>03</a:t>
+              <a:t>03.1</a:t>
             </a:r>
           </a:p>
         </p:txBody>
@@ -7648,7 +8127,7 @@
                 </a:solidFill>
                 <a:latin typeface="Arial"/>
               </a:rPr>
-              <a:t>Analisis Penyebab</a:t>
+              <a:t>Analisis Penyebab: Diagram Fishbone 4M &amp; Bukti Data Silo</a:t>
             </a:r>
           </a:p>
         </p:txBody>
@@ -7691,32 +8170,64 @@
                 </a:solidFill>
                 <a:latin typeface="Arial"/>
               </a:rPr>
-              <a:t>Tunjukkan akar masalah, bukan sekadar gejalanya.</a:t>
-            </a:r>
-          </a:p>
-        </p:txBody>
-      </p:sp>
-      <p:sp>
-        <p:nvSpPr>
-          <p:cNvPr id="7" name="Rounded Rectangle 6"/>
-          <p:cNvSpPr/>
-          <p:nvPr/>
-        </p:nvSpPr>
-        <p:spPr>
-          <a:xfrm>
-            <a:off x="548640" y="2011680"/>
-            <a:ext cx="7955279" cy="3840480"/>
-          </a:xfrm>
-          <a:prstGeom prst="roundRect">
+              <a:t>Tunjukkan dekonstruksi variabel penyebab lintas 4M dan buktikan temuan empiris keterpisahan data (data silo) di lapangan.</a:t>
+            </a:r>
+          </a:p>
+        </p:txBody>
+      </p:sp>
+      <p:sp>
+        <p:nvSpPr>
+          <p:cNvPr id="7" name="TextBox 6"/>
+          <p:cNvSpPr txBox="1"/>
+          <p:nvPr/>
+        </p:nvSpPr>
+        <p:spPr>
+          <a:xfrm>
+            <a:off x="548640" y="6419088"/>
+            <a:ext cx="11091672" cy="219456"/>
+          </a:xfrm>
+          <a:prstGeom prst="rect">
+            <a:avLst/>
+          </a:prstGeom>
+          <a:noFill/>
+        </p:spPr>
+        <p:txBody>
+          <a:bodyPr wrap="square" lIns="0" tIns="0" rIns="0" bIns="0">
+            <a:spAutoFit/>
+          </a:bodyPr>
+          <a:lstStyle/>
+          <a:p>
+            <a:r>
+              <a:rPr sz="850">
+                <a:solidFill>
+                  <a:srgbClr val="6E6E82"/>
+                </a:solidFill>
+                <a:latin typeface="Arial"/>
+              </a:rPr>
+              <a:t>IAKA 2026 — Kerangka Presentasi Peserta  ·  DSS SIRINE 4.0 Unit Cetak Pita Cukai</a:t>
+            </a:r>
+          </a:p>
+        </p:txBody>
+      </p:sp>
+      <p:sp>
+        <p:nvSpPr>
+          <p:cNvPr id="8" name="Rectangle 7"/>
+          <p:cNvSpPr/>
+          <p:nvPr/>
+        </p:nvSpPr>
+        <p:spPr>
+          <a:xfrm>
+            <a:off x="548640" y="1755648"/>
+            <a:ext cx="5394960" cy="329184"/>
+          </a:xfrm>
+          <a:prstGeom prst="rect">
             <a:avLst/>
           </a:prstGeom>
           <a:solidFill>
-            <a:srgbClr val="F8F6FE"/>
+            <a:srgbClr val="20288F"/>
           </a:solidFill>
-          <a:ln w="12700">
-            <a:solidFill>
-              <a:srgbClr val="D9CEF7"/>
-            </a:solidFill>
+          <a:ln>
+            <a:noFill/>
           </a:ln>
         </p:spPr>
         <p:style>
@@ -7734,100 +8245,734 @@
           </a:fontRef>
         </p:style>
         <p:txBody>
-          <a:bodyPr rtlCol="0" anchor="ctr" wrap="square" lIns="228600" rIns="228600" tIns="228600" bIns="182880"/>
+          <a:bodyPr rtlCol="0" anchor="ctr" tIns="36576" bIns="36576"/>
           <a:lstStyle/>
           <a:p>
             <a:pPr algn="ctr"/>
             <a:r>
-              <a:rPr sz="1300" b="1">
+              <a:rPr sz="1050" b="1">
+                <a:solidFill>
+                  <a:srgbClr val="FFFFFF"/>
+                </a:solidFill>
+                <a:latin typeface="Arial"/>
+              </a:rPr>
+              <a:t>1. METODE ANALISIS: DIAGRAM TULANG IKAN (FISHBONE 4M)</a:t>
+            </a:r>
+          </a:p>
+        </p:txBody>
+      </p:sp>
+      <p:sp>
+        <p:nvSpPr>
+          <p:cNvPr id="9" name="Rounded Rectangle 8"/>
+          <p:cNvSpPr/>
+          <p:nvPr/>
+        </p:nvSpPr>
+        <p:spPr>
+          <a:xfrm>
+            <a:off x="548640" y="2084831"/>
+            <a:ext cx="5394960" cy="3730752"/>
+          </a:xfrm>
+          <a:prstGeom prst="roundRect">
+            <a:avLst/>
+          </a:prstGeom>
+          <a:solidFill>
+            <a:srgbClr val="F4F7FE"/>
+          </a:solidFill>
+          <a:ln>
+            <a:solidFill>
+              <a:srgbClr val="D2DCF5"/>
+            </a:solidFill>
+          </a:ln>
+        </p:spPr>
+        <p:style>
+          <a:lnRef idx="1">
+            <a:schemeClr val="accent1"/>
+          </a:lnRef>
+          <a:fillRef idx="3">
+            <a:schemeClr val="accent1"/>
+          </a:fillRef>
+          <a:effectRef idx="2">
+            <a:schemeClr val="accent1"/>
+          </a:effectRef>
+          <a:fontRef idx="minor">
+            <a:schemeClr val="lt1"/>
+          </a:fontRef>
+        </p:style>
+        <p:txBody>
+          <a:bodyPr rtlCol="0" anchor="ctr"/>
+          <a:lstStyle/>
+          <a:p>
+            <a:pPr algn="ctr"/>
+          </a:p>
+        </p:txBody>
+      </p:sp>
+      <p:sp>
+        <p:nvSpPr>
+          <p:cNvPr id="10" name="Rounded Rectangle 9"/>
+          <p:cNvSpPr/>
+          <p:nvPr/>
+        </p:nvSpPr>
+        <p:spPr>
+          <a:xfrm>
+            <a:off x="658368" y="2157984"/>
+            <a:ext cx="5175504" cy="1874519"/>
+          </a:xfrm>
+          <a:prstGeom prst="roundRect">
+            <a:avLst/>
+          </a:prstGeom>
+          <a:solidFill>
+            <a:srgbClr val="FFFFFF"/>
+          </a:solidFill>
+          <a:ln>
+            <a:solidFill>
+              <a:srgbClr val="D2DCF5"/>
+            </a:solidFill>
+          </a:ln>
+        </p:spPr>
+        <p:style>
+          <a:lnRef idx="1">
+            <a:schemeClr val="accent1"/>
+          </a:lnRef>
+          <a:fillRef idx="3">
+            <a:schemeClr val="accent1"/>
+          </a:fillRef>
+          <a:effectRef idx="2">
+            <a:schemeClr val="accent1"/>
+          </a:effectRef>
+          <a:fontRef idx="minor">
+            <a:schemeClr val="lt1"/>
+          </a:fontRef>
+        </p:style>
+        <p:txBody>
+          <a:bodyPr rtlCol="0" anchor="ctr"/>
+          <a:lstStyle/>
+          <a:p>
+            <a:pPr algn="ctr"/>
+          </a:p>
+        </p:txBody>
+      </p:sp>
+      <p:pic>
+        <p:nvPicPr>
+          <p:cNvPr id="11" name="Picture 10" descr="image.png"/>
+          <p:cNvPicPr>
+            <a:picLocks noChangeAspect="1"/>
+          </p:cNvPicPr>
+          <p:nvPr/>
+        </p:nvPicPr>
+        <p:blipFill>
+          <a:blip r:embed="rId4"/>
+          <a:stretch>
+            <a:fillRect/>
+          </a:stretch>
+        </p:blipFill>
+        <p:spPr>
+          <a:xfrm>
+            <a:off x="731520" y="2212848"/>
+            <a:ext cx="5029200" cy="1755648"/>
+          </a:xfrm>
+          <a:prstGeom prst="rect">
+            <a:avLst/>
+          </a:prstGeom>
+        </p:spPr>
+      </p:pic>
+      <p:sp>
+        <p:nvSpPr>
+          <p:cNvPr id="12" name="Rounded Rectangle 11"/>
+          <p:cNvSpPr/>
+          <p:nvPr/>
+        </p:nvSpPr>
+        <p:spPr>
+          <a:xfrm>
+            <a:off x="658368" y="4096512"/>
+            <a:ext cx="5175504" cy="1627632"/>
+          </a:xfrm>
+          <a:prstGeom prst="roundRect">
+            <a:avLst/>
+          </a:prstGeom>
+          <a:solidFill>
+            <a:srgbClr val="FFFFFF"/>
+          </a:solidFill>
+          <a:ln>
+            <a:solidFill>
+              <a:srgbClr val="D9CEF7"/>
+            </a:solidFill>
+          </a:ln>
+        </p:spPr>
+        <p:style>
+          <a:lnRef idx="1">
+            <a:schemeClr val="accent1"/>
+          </a:lnRef>
+          <a:fillRef idx="3">
+            <a:schemeClr val="accent1"/>
+          </a:fillRef>
+          <a:effectRef idx="2">
+            <a:schemeClr val="accent1"/>
+          </a:effectRef>
+          <a:fontRef idx="minor">
+            <a:schemeClr val="lt1"/>
+          </a:fontRef>
+        </p:style>
+        <p:txBody>
+          <a:bodyPr rtlCol="0" anchor="ctr" wrap="square"/>
+          <a:lstStyle/>
+          <a:p>
+            <a:pPr algn="ctr">
+              <a:spcAft>
+                <a:spcPts val="200"/>
+              </a:spcAft>
+            </a:pPr>
+            <a:r>
+              <a:rPr sz="850" b="1">
+                <a:solidFill>
+                  <a:srgbClr val="20288F"/>
+                </a:solidFill>
+                <a:latin typeface="Arial"/>
+              </a:rPr>
+              <a:t>RINGKASAN DEKONSTRUKSI 4 PILAR FISHBONE DI LAPANGAN:</a:t>
+            </a:r>
+          </a:p>
+          <a:p>
+            <a:pPr>
+              <a:spcAft>
+                <a:spcPts val="150"/>
+              </a:spcAft>
+            </a:pPr>
+            <a:r>
+              <a:rPr sz="780" b="1">
                 <a:solidFill>
                   <a:srgbClr val="6A2CC9"/>
                 </a:solidFill>
                 <a:latin typeface="Arial"/>
               </a:rPr>
-              <a:t>Yang harus disampaikan</a:t>
+              <a:t>• MAN &amp; METHOD: </a:t>
+            </a:r>
+            <a:r>
+              <a:rPr sz="780" b="0">
+                <a:solidFill>
+                  <a:srgbClr val="2A2A3D"/>
+                </a:solidFill>
+                <a:latin typeface="Arial"/>
+              </a:rPr>
+              <a:t>Kelelahan visual shift malam (23–07) &amp; belum ada standar digital setting awal (make-ready) -&gt; afval awal tinggi per PO.</a:t>
             </a:r>
           </a:p>
           <a:p>
             <a:pPr>
-              <a:spcBef>
-                <a:spcPts val="1200"/>
-              </a:spcBef>
-            </a:pPr>
-            <a:r>
-              <a:rPr sz="1100">
+              <a:spcAft>
+                <a:spcPts val="150"/>
+              </a:spcAft>
+            </a:pPr>
+            <a:r>
+              <a:rPr sz="780" b="1">
+                <a:solidFill>
+                  <a:srgbClr val="C62828"/>
+                </a:solidFill>
+                <a:latin typeface="Arial"/>
+              </a:rPr>
+              <a:t>• MACHINE &amp; MATERIAL: </a:t>
+            </a:r>
+            <a:r>
+              <a:rPr sz="780" b="0">
                 <a:solidFill>
                   <a:srgbClr val="2A2A3D"/>
                 </a:solidFill>
                 <a:latin typeface="Arial"/>
               </a:rPr>
-              <a:t>•  Metode analisis: 5 Why atau Fishbone (cukup satu gambar ringkas).</a:t>
+              <a:t>Penurunan performa rol karet mengeras/licin, blanket fatigue, penjepit silinder melemah, &amp; kertas higroskopis rentan gelombang (plooi).</a:t>
             </a:r>
           </a:p>
           <a:p>
             <a:pPr>
-              <a:spcBef>
-                <a:spcPts val="1200"/>
-              </a:spcBef>
-            </a:pPr>
-            <a:r>
-              <a:rPr sz="1100">
+              <a:spcAft>
+                <a:spcPts val="150"/>
+              </a:spcAft>
+            </a:pPr>
+            <a:r>
+              <a:rPr sz="780" b="1">
+                <a:solidFill>
+                  <a:srgbClr val="20288F"/>
+                </a:solidFill>
+                <a:latin typeface="Arial"/>
+              </a:rPr>
+              <a:t>• AKIBAT OPERASIONAL: </a:t>
+            </a:r>
+            <a:r>
+              <a:rPr sz="780" b="1">
+                <a:solidFill>
+                  <a:srgbClr val="C62828"/>
+                </a:solidFill>
+                <a:latin typeface="Arial"/>
+              </a:rPr>
+              <a:t>Inschiet rata-rata 4,61% (Puncak Q4: 5,11% | Kerugian Rp 24,56 Miliar/Tahun | Downtime &gt; 8 jam akibat inspeksi acak bergilir).</a:t>
+            </a:r>
+          </a:p>
+        </p:txBody>
+      </p:sp>
+      <p:sp>
+        <p:nvSpPr>
+          <p:cNvPr id="13" name="Rectangle 12"/>
+          <p:cNvSpPr/>
+          <p:nvPr/>
+        </p:nvSpPr>
+        <p:spPr>
+          <a:xfrm>
+            <a:off x="6199632" y="1755648"/>
+            <a:ext cx="5440680" cy="329184"/>
+          </a:xfrm>
+          <a:prstGeom prst="rect">
+            <a:avLst/>
+          </a:prstGeom>
+          <a:solidFill>
+            <a:srgbClr val="6A2CC9"/>
+          </a:solidFill>
+          <a:ln>
+            <a:noFill/>
+          </a:ln>
+        </p:spPr>
+        <p:style>
+          <a:lnRef idx="1">
+            <a:schemeClr val="accent1"/>
+          </a:lnRef>
+          <a:fillRef idx="3">
+            <a:schemeClr val="accent1"/>
+          </a:fillRef>
+          <a:effectRef idx="2">
+            <a:schemeClr val="accent1"/>
+          </a:effectRef>
+          <a:fontRef idx="minor">
+            <a:schemeClr val="lt1"/>
+          </a:fontRef>
+        </p:style>
+        <p:txBody>
+          <a:bodyPr rtlCol="0" anchor="ctr" tIns="36576" bIns="36576"/>
+          <a:lstStyle/>
+          <a:p>
+            <a:pPr algn="ctr"/>
+            <a:r>
+              <a:rPr sz="1050" b="1">
+                <a:solidFill>
+                  <a:srgbClr val="FFFFFF"/>
+                </a:solidFill>
+                <a:latin typeface="Arial"/>
+              </a:rPr>
+              <a:t>2. TEMUAN FAKTA &amp; BUKTI EMPIRIS LAPANGAN (DATA SILO)</a:t>
+            </a:r>
+          </a:p>
+        </p:txBody>
+      </p:sp>
+      <p:sp>
+        <p:nvSpPr>
+          <p:cNvPr id="14" name="Rounded Rectangle 13"/>
+          <p:cNvSpPr/>
+          <p:nvPr/>
+        </p:nvSpPr>
+        <p:spPr>
+          <a:xfrm>
+            <a:off x="6199632" y="2084831"/>
+            <a:ext cx="5440680" cy="3730752"/>
+          </a:xfrm>
+          <a:prstGeom prst="roundRect">
+            <a:avLst/>
+          </a:prstGeom>
+          <a:solidFill>
+            <a:srgbClr val="F8F6FE"/>
+          </a:solidFill>
+          <a:ln>
+            <a:solidFill>
+              <a:srgbClr val="D9CEF7"/>
+            </a:solidFill>
+          </a:ln>
+        </p:spPr>
+        <p:style>
+          <a:lnRef idx="1">
+            <a:schemeClr val="accent1"/>
+          </a:lnRef>
+          <a:fillRef idx="3">
+            <a:schemeClr val="accent1"/>
+          </a:fillRef>
+          <a:effectRef idx="2">
+            <a:schemeClr val="accent1"/>
+          </a:effectRef>
+          <a:fontRef idx="minor">
+            <a:schemeClr val="lt1"/>
+          </a:fontRef>
+        </p:style>
+        <p:txBody>
+          <a:bodyPr rtlCol="0" anchor="ctr"/>
+          <a:lstStyle/>
+          <a:p>
+            <a:pPr algn="ctr"/>
+          </a:p>
+        </p:txBody>
+      </p:sp>
+      <p:sp>
+        <p:nvSpPr>
+          <p:cNvPr id="15" name="Rounded Rectangle 14"/>
+          <p:cNvSpPr/>
+          <p:nvPr/>
+        </p:nvSpPr>
+        <p:spPr>
+          <a:xfrm>
+            <a:off x="6327648" y="2157984"/>
+            <a:ext cx="5184648" cy="1078992"/>
+          </a:xfrm>
+          <a:prstGeom prst="roundRect">
+            <a:avLst/>
+          </a:prstGeom>
+          <a:solidFill>
+            <a:srgbClr val="FFFFFF"/>
+          </a:solidFill>
+          <a:ln>
+            <a:solidFill>
+              <a:srgbClr val="D2DCF5"/>
+            </a:solidFill>
+          </a:ln>
+        </p:spPr>
+        <p:style>
+          <a:lnRef idx="1">
+            <a:schemeClr val="accent1"/>
+          </a:lnRef>
+          <a:fillRef idx="3">
+            <a:schemeClr val="accent1"/>
+          </a:fillRef>
+          <a:effectRef idx="2">
+            <a:schemeClr val="accent1"/>
+          </a:effectRef>
+          <a:fontRef idx="minor">
+            <a:schemeClr val="lt1"/>
+          </a:fontRef>
+        </p:style>
+        <p:txBody>
+          <a:bodyPr rtlCol="0" anchor="ctr" wrap="square"/>
+          <a:lstStyle/>
+          <a:p>
+            <a:pPr algn="ctr">
+              <a:spcAft>
+                <a:spcPts val="200"/>
+              </a:spcAft>
+            </a:pPr>
+            <a:r>
+              <a:rPr sz="900" b="1">
+                <a:solidFill>
+                  <a:srgbClr val="20288F"/>
+                </a:solidFill>
+                <a:latin typeface="Arial"/>
+              </a:rPr>
+              <a:t>BUKTI 1: Data Transaksi SAP Terkunci Mentah (Dormant Data)</a:t>
+            </a:r>
+          </a:p>
+          <a:p>
+            <a:pPr>
+              <a:spcAft>
+                <a:spcPts val="200"/>
+              </a:spcAft>
+            </a:pPr>
+            <a:r>
+              <a:rPr sz="800" b="1">
+                <a:solidFill>
+                  <a:srgbClr val="20288F"/>
+                </a:solidFill>
+                <a:latin typeface="Arial"/>
+              </a:rPr>
+              <a:t>• Kondisi Sistem: </a:t>
+            </a:r>
+            <a:r>
+              <a:rPr sz="800">
                 <a:solidFill>
                   <a:srgbClr val="2A2A3D"/>
                 </a:solidFill>
                 <a:latin typeface="Arial"/>
               </a:rPr>
-              <a:t>•  Akar masalah utama yang akan diselesaikan.</a:t>
+              <a:t>Modul SAP ZPPRSIPPC0012 memuat data PO &amp; hasil cetak, tetapi tersaji dalam tabel CSV mentah puluhan kolom di PC kantor.</a:t>
+            </a:r>
+          </a:p>
+          <a:p>
+            <a:r>
+              <a:rPr sz="800" b="1">
+                <a:solidFill>
+                  <a:srgbClr val="20288F"/>
+                </a:solidFill>
+                <a:latin typeface="Arial"/>
+              </a:rPr>
+              <a:t>• Fakta Lapangan: </a:t>
+            </a:r>
+            <a:r>
+              <a:rPr sz="800">
+                <a:solidFill>
+                  <a:srgbClr val="2A2A3D"/>
+                </a:solidFill>
+                <a:latin typeface="Arial"/>
+              </a:rPr>
+              <a:t>Data pasif dan tidak bisa diolah langsung di meja mesin; pengawas tidak memiliki visualisasi tren performa harian per mesin.</a:t>
+            </a:r>
+          </a:p>
+        </p:txBody>
+      </p:sp>
+      <p:sp>
+        <p:nvSpPr>
+          <p:cNvPr id="16" name="Rounded Rectangle 15"/>
+          <p:cNvSpPr/>
+          <p:nvPr/>
+        </p:nvSpPr>
+        <p:spPr>
+          <a:xfrm>
+            <a:off x="6327648" y="3291840"/>
+            <a:ext cx="5184648" cy="1078992"/>
+          </a:xfrm>
+          <a:prstGeom prst="roundRect">
+            <a:avLst/>
+          </a:prstGeom>
+          <a:solidFill>
+            <a:srgbClr val="FFFFFF"/>
+          </a:solidFill>
+          <a:ln>
+            <a:solidFill>
+              <a:srgbClr val="D9CEF7"/>
+            </a:solidFill>
+          </a:ln>
+        </p:spPr>
+        <p:style>
+          <a:lnRef idx="1">
+            <a:schemeClr val="accent1"/>
+          </a:lnRef>
+          <a:fillRef idx="3">
+            <a:schemeClr val="accent1"/>
+          </a:fillRef>
+          <a:effectRef idx="2">
+            <a:schemeClr val="accent1"/>
+          </a:effectRef>
+          <a:fontRef idx="minor">
+            <a:schemeClr val="lt1"/>
+          </a:fontRef>
+        </p:style>
+        <p:txBody>
+          <a:bodyPr rtlCol="0" anchor="ctr" wrap="square"/>
+          <a:lstStyle/>
+          <a:p>
+            <a:pPr algn="ctr">
+              <a:spcAft>
+                <a:spcPts val="200"/>
+              </a:spcAft>
+            </a:pPr>
+            <a:r>
+              <a:rPr sz="900" b="1">
+                <a:solidFill>
+                  <a:srgbClr val="6A2CC9"/>
+                </a:solidFill>
+                <a:latin typeface="Arial"/>
+              </a:rPr>
+              <a:t>BUKTI 2: Data Mutu QC Hanya Ringkasan Global (Attribution Blindness)</a:t>
             </a:r>
           </a:p>
           <a:p>
             <a:pPr>
-              <a:spcBef>
-                <a:spcPts val="1200"/>
-              </a:spcBef>
-            </a:pPr>
-            <a:r>
-              <a:rPr sz="1100">
+              <a:spcAft>
+                <a:spcPts val="200"/>
+              </a:spcAft>
+            </a:pPr>
+            <a:r>
+              <a:rPr sz="800" b="1">
+                <a:solidFill>
+                  <a:srgbClr val="6A2CC9"/>
+                </a:solidFill>
+                <a:latin typeface="Arial"/>
+              </a:rPr>
+              <a:t>• Kondisi Sistem: </a:t>
+            </a:r>
+            <a:r>
+              <a:rPr sz="800">
                 <a:solidFill>
                   <a:srgbClr val="2A2A3D"/>
                 </a:solidFill>
                 <a:latin typeface="Arial"/>
               </a:rPr>
-              <a:t>•  Temuan / bukti yang mendukung akar masalah tersebut.</a:t>
-            </a:r>
-          </a:p>
-        </p:txBody>
-      </p:sp>
-      <p:sp>
-        <p:nvSpPr>
-          <p:cNvPr id="8" name="TextBox 7"/>
-          <p:cNvSpPr txBox="1"/>
-          <p:nvPr/>
-        </p:nvSpPr>
-        <p:spPr>
-          <a:xfrm>
-            <a:off x="548640" y="6419088"/>
-            <a:ext cx="11091672" cy="219456"/>
-          </a:xfrm>
-          <a:prstGeom prst="rect">
-            <a:avLst/>
-          </a:prstGeom>
-          <a:noFill/>
-        </p:spPr>
-        <p:txBody>
-          <a:bodyPr wrap="square" lIns="0" tIns="0" rIns="0" bIns="0">
-            <a:spAutoFit/>
-          </a:bodyPr>
-          <a:lstStyle/>
-          <a:p>
-            <a:r>
-              <a:rPr sz="850">
-                <a:solidFill>
-                  <a:srgbClr val="6E6E82"/>
-                </a:solidFill>
-                <a:latin typeface="Arial"/>
-              </a:rPr>
-              <a:t>Ganti poin di atas dengan konten proyek Anda (grafik, tabel, foto, atau diagram).  ·  IAKA 2026 — Kerangka Presentasi Peserta</a:t>
+              <a:t>Laporan QC Verifikasi mencatat lembar cacat per jenis (blobor, noda, dll), namun hanya sebagai total akumulasi unit global.</a:t>
+            </a:r>
+          </a:p>
+          <a:p>
+            <a:r>
+              <a:rPr sz="800" b="1">
+                <a:solidFill>
+                  <a:srgbClr val="6A2CC9"/>
+                </a:solidFill>
+                <a:latin typeface="Arial"/>
+              </a:rPr>
+              <a:t>• Fakta Lapangan: </a:t>
+            </a:r>
+            <a:r>
+              <a:rPr sz="800">
+                <a:solidFill>
+                  <a:srgbClr val="2A2A3D"/>
+                </a:solidFill>
+                <a:latin typeface="Arial"/>
+              </a:rPr>
+              <a:t>Ketiadaan nomor mesin, PO, &amp; shift -&gt; Kebutaan atribusi: teknisi tidak tahu mesin target dan pembinaan operator bias.</a:t>
+            </a:r>
+          </a:p>
+        </p:txBody>
+      </p:sp>
+      <p:sp>
+        <p:nvSpPr>
+          <p:cNvPr id="17" name="Rounded Rectangle 16"/>
+          <p:cNvSpPr/>
+          <p:nvPr/>
+        </p:nvSpPr>
+        <p:spPr>
+          <a:xfrm>
+            <a:off x="6327648" y="4425696"/>
+            <a:ext cx="5184648" cy="1298448"/>
+          </a:xfrm>
+          <a:prstGeom prst="roundRect">
+            <a:avLst/>
+          </a:prstGeom>
+          <a:solidFill>
+            <a:srgbClr val="FFFFFF"/>
+          </a:solidFill>
+          <a:ln>
+            <a:solidFill>
+              <a:srgbClr val="F5C2C2"/>
+            </a:solidFill>
+          </a:ln>
+        </p:spPr>
+        <p:style>
+          <a:lnRef idx="1">
+            <a:schemeClr val="accent1"/>
+          </a:lnRef>
+          <a:fillRef idx="3">
+            <a:schemeClr val="accent1"/>
+          </a:fillRef>
+          <a:effectRef idx="2">
+            <a:schemeClr val="accent1"/>
+          </a:effectRef>
+          <a:fontRef idx="minor">
+            <a:schemeClr val="lt1"/>
+          </a:fontRef>
+        </p:style>
+        <p:txBody>
+          <a:bodyPr rtlCol="0" anchor="ctr" wrap="square"/>
+          <a:lstStyle/>
+          <a:p>
+            <a:pPr algn="ctr">
+              <a:spcAft>
+                <a:spcPts val="200"/>
+              </a:spcAft>
+            </a:pPr>
+            <a:r>
+              <a:rPr sz="900" b="1">
+                <a:solidFill>
+                  <a:srgbClr val="C62828"/>
+                </a:solidFill>
+                <a:latin typeface="Arial"/>
+              </a:rPr>
+              <a:t>BUKTI 3: Data Penugasan Terperangkap di Kertas (The Paper Trap)</a:t>
+            </a:r>
+          </a:p>
+          <a:p>
+            <a:pPr>
+              <a:spcAft>
+                <a:spcPts val="200"/>
+              </a:spcAft>
+            </a:pPr>
+            <a:r>
+              <a:rPr sz="800" b="1">
+                <a:solidFill>
+                  <a:srgbClr val="C62828"/>
+                </a:solidFill>
+                <a:latin typeface="Arial"/>
+              </a:rPr>
+              <a:t>• Kondisi Sistem: </a:t>
+            </a:r>
+            <a:r>
+              <a:rPr sz="800">
+                <a:solidFill>
+                  <a:srgbClr val="2A2A3D"/>
+                </a:solidFill>
+                <a:latin typeface="Arial"/>
+              </a:rPr>
+              <a:t>Nomor mesin, PO, shift, nama operator, &amp; hasil cetak (LK) ditulis manual dengan pulpen pada buku folio fisik di meja mesin.</a:t>
+            </a:r>
+          </a:p>
+          <a:p>
+            <a:r>
+              <a:rPr sz="800" b="1">
+                <a:solidFill>
+                  <a:srgbClr val="C62828"/>
+                </a:solidFill>
+                <a:latin typeface="Arial"/>
+              </a:rPr>
+              <a:t>• Fakta Lapangan: </a:t>
+            </a:r>
+            <a:r>
+              <a:rPr sz="800">
+                <a:solidFill>
+                  <a:srgbClr val="2A2A3D"/>
+                </a:solidFill>
+                <a:latin typeface="Arial"/>
+              </a:rPr>
+              <a:t>Buku fisik terisolasi &amp; baru direkap kuartalan saat penilaian pegawai; data rawan hilang/rusak terkena tinta/air, dan feedback kinerja tertunda berbulan-bulan.</a:t>
+            </a:r>
+          </a:p>
+        </p:txBody>
+      </p:sp>
+      <p:sp>
+        <p:nvSpPr>
+          <p:cNvPr id="18" name="Rounded Rectangle 17"/>
+          <p:cNvSpPr/>
+          <p:nvPr/>
+        </p:nvSpPr>
+        <p:spPr>
+          <a:xfrm>
+            <a:off x="548640" y="5888736"/>
+            <a:ext cx="11091672" cy="457200"/>
+          </a:xfrm>
+          <a:prstGeom prst="roundRect">
+            <a:avLst/>
+          </a:prstGeom>
+          <a:solidFill>
+            <a:srgbClr val="F4F7FE"/>
+          </a:solidFill>
+          <a:ln>
+            <a:solidFill>
+              <a:srgbClr val="20288F"/>
+            </a:solidFill>
+          </a:ln>
+        </p:spPr>
+        <p:style>
+          <a:lnRef idx="1">
+            <a:schemeClr val="accent1"/>
+          </a:lnRef>
+          <a:fillRef idx="3">
+            <a:schemeClr val="accent1"/>
+          </a:fillRef>
+          <a:effectRef idx="2">
+            <a:schemeClr val="accent1"/>
+          </a:effectRef>
+          <a:fontRef idx="minor">
+            <a:schemeClr val="lt1"/>
+          </a:fontRef>
+        </p:style>
+        <p:txBody>
+          <a:bodyPr rtlCol="0" anchor="ctr" wrap="square" lIns="109728" rIns="109728" tIns="36576" bIns="36576"/>
+          <a:lstStyle/>
+          <a:p>
+            <a:pPr algn="ctr"/>
+            <a:r>
+              <a:rPr sz="880" b="1">
+                <a:solidFill>
+                  <a:srgbClr val="20288F"/>
+                </a:solidFill>
+                <a:latin typeface="Arial"/>
+              </a:rPr>
+              <a:t>• Business Insight:  </a:t>
+            </a:r>
+            <a:r>
+              <a:rPr sz="880">
+                <a:solidFill>
+                  <a:srgbClr val="2A2A3D"/>
+                </a:solidFill>
+                <a:latin typeface="Arial"/>
+              </a:rPr>
+              <a:t>Penyebab utama tingginya inschiet bukan ketiadaan SOP, melainkan terputusnya aliran data (Data Silo) antara SAP di kantor, modul QC Verifikasi, dan buku folio di meja mesin. Tanpa integrasi data, perbaikan mesin tetap spekulatif (&gt; 8 jam) dan pembinaan operator terhambat.</a:t>
             </a:r>
           </a:p>
         </p:txBody>
@@ -7841,6 +8986,1251 @@
 </file>
 
 <file path=ppt/slides/slide7.xml><?xml version="1.0" encoding="utf-8"?>
+<p:sld xmlns:a="http://schemas.openxmlformats.org/drawingml/2006/main" xmlns:p="http://schemas.openxmlformats.org/presentationml/2006/main" xmlns:r="http://schemas.openxmlformats.org/officeDocument/2006/relationships">
+  <p:cSld>
+    <p:spTree>
+      <p:nvGrpSpPr>
+        <p:cNvPr id="1" name=""/>
+        <p:cNvGrpSpPr/>
+        <p:nvPr/>
+      </p:nvGrpSpPr>
+      <p:grpSpPr/>
+      <p:pic>
+        <p:nvPicPr>
+          <p:cNvPr id="2" name="Picture 1" descr="image.png"/>
+          <p:cNvPicPr>
+            <a:picLocks noChangeAspect="1"/>
+          </p:cNvPicPr>
+          <p:nvPr/>
+        </p:nvPicPr>
+        <p:blipFill>
+          <a:blip r:embed="rId2"/>
+          <a:stretch>
+            <a:fillRect/>
+          </a:stretch>
+        </p:blipFill>
+        <p:spPr>
+          <a:xfrm>
+            <a:off x="-107899" y="-179222"/>
+            <a:ext cx="1448409" cy="814730"/>
+          </a:xfrm>
+          <a:prstGeom prst="rect">
+            <a:avLst/>
+          </a:prstGeom>
+        </p:spPr>
+      </p:pic>
+      <p:pic>
+        <p:nvPicPr>
+          <p:cNvPr id="3" name="Picture 2" descr="image.png"/>
+          <p:cNvPicPr>
+            <a:picLocks noChangeAspect="1"/>
+          </p:cNvPicPr>
+          <p:nvPr/>
+        </p:nvPicPr>
+        <p:blipFill>
+          <a:blip r:embed="rId3"/>
+          <a:stretch>
+            <a:fillRect/>
+          </a:stretch>
+        </p:blipFill>
+        <p:spPr>
+          <a:xfrm>
+            <a:off x="11055096" y="11887"/>
+            <a:ext cx="1140256" cy="634593"/>
+          </a:xfrm>
+          <a:prstGeom prst="rect">
+            <a:avLst/>
+          </a:prstGeom>
+        </p:spPr>
+      </p:pic>
+      <p:sp>
+        <p:nvSpPr>
+          <p:cNvPr id="4" name="Rounded Rectangle 3"/>
+          <p:cNvSpPr/>
+          <p:nvPr/>
+        </p:nvSpPr>
+        <p:spPr>
+          <a:xfrm>
+            <a:off x="548640" y="594360"/>
+            <a:ext cx="731520" cy="658368"/>
+          </a:xfrm>
+          <a:prstGeom prst="roundRect">
+            <a:avLst/>
+          </a:prstGeom>
+          <a:solidFill>
+            <a:srgbClr val="6A2CC9"/>
+          </a:solidFill>
+          <a:ln>
+            <a:noFill/>
+          </a:ln>
+        </p:spPr>
+        <p:style>
+          <a:lnRef idx="1">
+            <a:schemeClr val="accent1"/>
+          </a:lnRef>
+          <a:fillRef idx="3">
+            <a:schemeClr val="accent1"/>
+          </a:fillRef>
+          <a:effectRef idx="2">
+            <a:schemeClr val="accent1"/>
+          </a:effectRef>
+          <a:fontRef idx="minor">
+            <a:schemeClr val="lt1"/>
+          </a:fontRef>
+        </p:style>
+        <p:txBody>
+          <a:bodyPr rtlCol="0" anchor="ctr" wrap="none" lIns="0" tIns="0" rIns="0" bIns="0"/>
+          <a:lstStyle/>
+          <a:p>
+            <a:pPr algn="ctr"/>
+            <a:r>
+              <a:rPr sz="2000" b="1">
+                <a:solidFill>
+                  <a:srgbClr val="FFFFFF"/>
+                </a:solidFill>
+                <a:latin typeface="Arial"/>
+              </a:rPr>
+              <a:t>03.2</a:t>
+            </a:r>
+          </a:p>
+        </p:txBody>
+      </p:sp>
+      <p:sp>
+        <p:nvSpPr>
+          <p:cNvPr id="5" name="TextBox 4"/>
+          <p:cNvSpPr txBox="1"/>
+          <p:nvPr/>
+        </p:nvSpPr>
+        <p:spPr>
+          <a:xfrm>
+            <a:off x="1417320" y="548640"/>
+            <a:ext cx="9326880" cy="731520"/>
+          </a:xfrm>
+          <a:prstGeom prst="rect">
+            <a:avLst/>
+          </a:prstGeom>
+          <a:noFill/>
+        </p:spPr>
+        <p:txBody>
+          <a:bodyPr wrap="square" lIns="0" tIns="0" rIns="0" bIns="0">
+            <a:spAutoFit/>
+          </a:bodyPr>
+          <a:lstStyle/>
+          <a:p>
+            <a:pPr algn="l"/>
+            <a:r>
+              <a:rPr sz="2400" b="1">
+                <a:solidFill>
+                  <a:srgbClr val="20288F"/>
+                </a:solidFill>
+                <a:latin typeface="Arial"/>
+              </a:rPr>
+              <a:t>Analisis Penyebab: Rantai Kausalitas 5-Why &amp; Akar Masalah</a:t>
+            </a:r>
+          </a:p>
+        </p:txBody>
+      </p:sp>
+      <p:sp>
+        <p:nvSpPr>
+          <p:cNvPr id="6" name="TextBox 5"/>
+          <p:cNvSpPr txBox="1"/>
+          <p:nvPr/>
+        </p:nvSpPr>
+        <p:spPr>
+          <a:xfrm>
+            <a:off x="548640" y="1353312"/>
+            <a:ext cx="10789920" cy="347472"/>
+          </a:xfrm>
+          <a:prstGeom prst="rect">
+            <a:avLst/>
+          </a:prstGeom>
+          <a:noFill/>
+        </p:spPr>
+        <p:txBody>
+          <a:bodyPr wrap="square" lIns="0" tIns="0" rIns="0" bIns="0">
+            <a:spAutoFit/>
+          </a:bodyPr>
+          <a:lstStyle/>
+          <a:p>
+            <a:r>
+              <a:rPr sz="1150" b="1">
+                <a:solidFill>
+                  <a:srgbClr val="6A2CC9"/>
+                </a:solidFill>
+                <a:latin typeface="Arial"/>
+              </a:rPr>
+              <a:t>Tujuan bagian ini:  </a:t>
+            </a:r>
+            <a:r>
+              <a:rPr sz="1150" b="0">
+                <a:solidFill>
+                  <a:srgbClr val="2A2A3D"/>
+                </a:solidFill>
+                <a:latin typeface="Arial"/>
+              </a:rPr>
+              <a:t>Buktikan penelusuran kausalitas berjenjang (5-Why) dan rumuskan akar masalah utama yang akan diserang oleh solusi.</a:t>
+            </a:r>
+          </a:p>
+        </p:txBody>
+      </p:sp>
+      <p:sp>
+        <p:nvSpPr>
+          <p:cNvPr id="7" name="TextBox 6"/>
+          <p:cNvSpPr txBox="1"/>
+          <p:nvPr/>
+        </p:nvSpPr>
+        <p:spPr>
+          <a:xfrm>
+            <a:off x="548640" y="6419088"/>
+            <a:ext cx="11091672" cy="219456"/>
+          </a:xfrm>
+          <a:prstGeom prst="rect">
+            <a:avLst/>
+          </a:prstGeom>
+          <a:noFill/>
+        </p:spPr>
+        <p:txBody>
+          <a:bodyPr wrap="square" lIns="0" tIns="0" rIns="0" bIns="0">
+            <a:spAutoFit/>
+          </a:bodyPr>
+          <a:lstStyle/>
+          <a:p>
+            <a:r>
+              <a:rPr sz="850">
+                <a:solidFill>
+                  <a:srgbClr val="6E6E82"/>
+                </a:solidFill>
+                <a:latin typeface="Arial"/>
+              </a:rPr>
+              <a:t>IAKA 2026 — Kerangka Presentasi Peserta  ·  DSS SIRINE 4.0 Unit Cetak Pita Cukai</a:t>
+            </a:r>
+          </a:p>
+        </p:txBody>
+      </p:sp>
+      <p:sp>
+        <p:nvSpPr>
+          <p:cNvPr id="8" name="Rectangle 7"/>
+          <p:cNvSpPr/>
+          <p:nvPr/>
+        </p:nvSpPr>
+        <p:spPr>
+          <a:xfrm>
+            <a:off x="548640" y="1755648"/>
+            <a:ext cx="5577840" cy="329184"/>
+          </a:xfrm>
+          <a:prstGeom prst="rect">
+            <a:avLst/>
+          </a:prstGeom>
+          <a:solidFill>
+            <a:srgbClr val="20288F"/>
+          </a:solidFill>
+          <a:ln>
+            <a:noFill/>
+          </a:ln>
+        </p:spPr>
+        <p:style>
+          <a:lnRef idx="1">
+            <a:schemeClr val="accent1"/>
+          </a:lnRef>
+          <a:fillRef idx="3">
+            <a:schemeClr val="accent1"/>
+          </a:fillRef>
+          <a:effectRef idx="2">
+            <a:schemeClr val="accent1"/>
+          </a:effectRef>
+          <a:fontRef idx="minor">
+            <a:schemeClr val="lt1"/>
+          </a:fontRef>
+        </p:style>
+        <p:txBody>
+          <a:bodyPr rtlCol="0" anchor="ctr" tIns="36576" bIns="36576"/>
+          <a:lstStyle/>
+          <a:p>
+            <a:pPr algn="ctr"/>
+            <a:r>
+              <a:rPr sz="1050" b="1">
+                <a:solidFill>
+                  <a:srgbClr val="FFFFFF"/>
+                </a:solidFill>
+                <a:latin typeface="Arial"/>
+              </a:rPr>
+              <a:t>1. METODE ANALISIS: PENELUSURAN KAUSALITAS 5-WHY</a:t>
+            </a:r>
+          </a:p>
+        </p:txBody>
+      </p:sp>
+      <p:sp>
+        <p:nvSpPr>
+          <p:cNvPr id="9" name="Rounded Rectangle 8"/>
+          <p:cNvSpPr/>
+          <p:nvPr/>
+        </p:nvSpPr>
+        <p:spPr>
+          <a:xfrm>
+            <a:off x="548640" y="2084831"/>
+            <a:ext cx="5577840" cy="3730752"/>
+          </a:xfrm>
+          <a:prstGeom prst="roundRect">
+            <a:avLst/>
+          </a:prstGeom>
+          <a:solidFill>
+            <a:srgbClr val="F4F7FE"/>
+          </a:solidFill>
+          <a:ln>
+            <a:solidFill>
+              <a:srgbClr val="D2DCF5"/>
+            </a:solidFill>
+          </a:ln>
+        </p:spPr>
+        <p:style>
+          <a:lnRef idx="1">
+            <a:schemeClr val="accent1"/>
+          </a:lnRef>
+          <a:fillRef idx="3">
+            <a:schemeClr val="accent1"/>
+          </a:fillRef>
+          <a:effectRef idx="2">
+            <a:schemeClr val="accent1"/>
+          </a:effectRef>
+          <a:fontRef idx="minor">
+            <a:schemeClr val="lt1"/>
+          </a:fontRef>
+        </p:style>
+        <p:txBody>
+          <a:bodyPr rtlCol="0" anchor="ctr"/>
+          <a:lstStyle/>
+          <a:p>
+            <a:pPr algn="ctr"/>
+          </a:p>
+        </p:txBody>
+      </p:sp>
+      <p:sp>
+        <p:nvSpPr>
+          <p:cNvPr id="10" name="Rounded Rectangle 9"/>
+          <p:cNvSpPr/>
+          <p:nvPr/>
+        </p:nvSpPr>
+        <p:spPr>
+          <a:xfrm>
+            <a:off x="658368" y="2157984"/>
+            <a:ext cx="5358384" cy="658368"/>
+          </a:xfrm>
+          <a:prstGeom prst="roundRect">
+            <a:avLst/>
+          </a:prstGeom>
+          <a:solidFill>
+            <a:srgbClr val="FFFFFF"/>
+          </a:solidFill>
+          <a:ln>
+            <a:solidFill>
+              <a:srgbClr val="D2DCF5"/>
+            </a:solidFill>
+          </a:ln>
+        </p:spPr>
+        <p:style>
+          <a:lnRef idx="1">
+            <a:schemeClr val="accent1"/>
+          </a:lnRef>
+          <a:fillRef idx="3">
+            <a:schemeClr val="accent1"/>
+          </a:fillRef>
+          <a:effectRef idx="2">
+            <a:schemeClr val="accent1"/>
+          </a:effectRef>
+          <a:fontRef idx="minor">
+            <a:schemeClr val="lt1"/>
+          </a:fontRef>
+        </p:style>
+        <p:txBody>
+          <a:bodyPr rtlCol="0" anchor="ctr" wrap="square" lIns="73152" rIns="73152" tIns="27432" bIns="27432"/>
+          <a:lstStyle/>
+          <a:p>
+            <a:pPr algn="ctr">
+              <a:spcAft>
+                <a:spcPts val="150"/>
+              </a:spcAft>
+            </a:pPr>
+            <a:r>
+              <a:rPr sz="780" b="1">
+                <a:solidFill>
+                  <a:srgbClr val="20288F"/>
+                </a:solidFill>
+                <a:latin typeface="Arial"/>
+              </a:rPr>
+              <a:t>[WHY 1] </a:t>
+            </a:r>
+            <a:r>
+              <a:rPr sz="780" b="1">
+                <a:solidFill>
+                  <a:srgbClr val="2A2A3D"/>
+                </a:solidFill>
+                <a:latin typeface="Arial"/>
+              </a:rPr>
+              <a:t>Mengapa inschiet berfluktuasi tinggi pada rata-rata 4,61% (puncak 5,11%)?</a:t>
+            </a:r>
+          </a:p>
+          <a:p>
+            <a:pPr>
+              <a:spcAft>
+                <a:spcPts val="150"/>
+              </a:spcAft>
+            </a:pPr>
+            <a:r>
+              <a:rPr sz="780" b="1">
+                <a:solidFill>
+                  <a:srgbClr val="20288F"/>
+                </a:solidFill>
+                <a:latin typeface="Arial"/>
+              </a:rPr>
+              <a:t>➔ </a:t>
+            </a:r>
+            <a:r>
+              <a:rPr sz="780" b="0">
+                <a:solidFill>
+                  <a:srgbClr val="2A2A3D"/>
+                </a:solidFill>
+                <a:latin typeface="Arial"/>
+              </a:rPr>
+              <a:t>Tindakan servis mesin &amp; coaching operator sering terlambat dan tidak tepat sasaran.</a:t>
+            </a:r>
+          </a:p>
+          <a:p>
+            <a:r>
+              <a:rPr sz="700" i="1">
+                <a:solidFill>
+                  <a:srgbClr val="6E6E82"/>
+                </a:solidFill>
+                <a:latin typeface="Arial"/>
+              </a:rPr>
+              <a:t>   [Bukti: Fluktuasi kuartalan Q1 (4,72%) s.d. Q4 (5,11%) — Sumber: SAP ZPPRSIPPC0012]</a:t>
+            </a:r>
+          </a:p>
+        </p:txBody>
+      </p:sp>
+      <p:sp>
+        <p:nvSpPr>
+          <p:cNvPr id="11" name="Rounded Rectangle 10"/>
+          <p:cNvSpPr/>
+          <p:nvPr/>
+        </p:nvSpPr>
+        <p:spPr>
+          <a:xfrm>
+            <a:off x="658368" y="2843784"/>
+            <a:ext cx="5358384" cy="658368"/>
+          </a:xfrm>
+          <a:prstGeom prst="roundRect">
+            <a:avLst/>
+          </a:prstGeom>
+          <a:solidFill>
+            <a:srgbClr val="FFFFFF"/>
+          </a:solidFill>
+          <a:ln>
+            <a:solidFill>
+              <a:srgbClr val="D2DCF5"/>
+            </a:solidFill>
+          </a:ln>
+        </p:spPr>
+        <p:style>
+          <a:lnRef idx="1">
+            <a:schemeClr val="accent1"/>
+          </a:lnRef>
+          <a:fillRef idx="3">
+            <a:schemeClr val="accent1"/>
+          </a:fillRef>
+          <a:effectRef idx="2">
+            <a:schemeClr val="accent1"/>
+          </a:effectRef>
+          <a:fontRef idx="minor">
+            <a:schemeClr val="lt1"/>
+          </a:fontRef>
+        </p:style>
+        <p:txBody>
+          <a:bodyPr rtlCol="0" anchor="ctr" wrap="square" lIns="73152" rIns="73152" tIns="27432" bIns="27432"/>
+          <a:lstStyle/>
+          <a:p>
+            <a:pPr algn="ctr">
+              <a:spcAft>
+                <a:spcPts val="150"/>
+              </a:spcAft>
+            </a:pPr>
+            <a:r>
+              <a:rPr sz="780" b="1">
+                <a:solidFill>
+                  <a:srgbClr val="20288F"/>
+                </a:solidFill>
+                <a:latin typeface="Arial"/>
+              </a:rPr>
+              <a:t>[WHY 2] </a:t>
+            </a:r>
+            <a:r>
+              <a:rPr sz="780" b="1">
+                <a:solidFill>
+                  <a:srgbClr val="2A2A3D"/>
+                </a:solidFill>
+                <a:latin typeface="Arial"/>
+              </a:rPr>
+              <a:t>Mengapa perbaikan mesin &amp; pembinaan operator tidak tepat sasaran?</a:t>
+            </a:r>
+          </a:p>
+          <a:p>
+            <a:pPr>
+              <a:spcAft>
+                <a:spcPts val="150"/>
+              </a:spcAft>
+            </a:pPr>
+            <a:r>
+              <a:rPr sz="780" b="1">
+                <a:solidFill>
+                  <a:srgbClr val="20288F"/>
+                </a:solidFill>
+                <a:latin typeface="Arial"/>
+              </a:rPr>
+              <a:t>➔ </a:t>
+            </a:r>
+            <a:r>
+              <a:rPr sz="780" b="0">
+                <a:solidFill>
+                  <a:srgbClr val="2A2A3D"/>
+                </a:solidFill>
+                <a:latin typeface="Arial"/>
+              </a:rPr>
+              <a:t>Teknisi &amp; pengawas tidak tahu pasti mesin mana sumber masalah &amp; apakah faktor mesin/shift.</a:t>
+            </a:r>
+          </a:p>
+          <a:p>
+            <a:r>
+              <a:rPr sz="700" i="1">
+                <a:solidFill>
+                  <a:srgbClr val="6E6E82"/>
+                </a:solidFill>
+                <a:latin typeface="Arial"/>
+              </a:rPr>
+              <a:t>   [Bukti: Kasus penelusuran blobor acak ke 6 mesin pada Juni 2025 dengan downtime &gt; 8 jam]</a:t>
+            </a:r>
+          </a:p>
+        </p:txBody>
+      </p:sp>
+      <p:sp>
+        <p:nvSpPr>
+          <p:cNvPr id="12" name="Rounded Rectangle 11"/>
+          <p:cNvSpPr/>
+          <p:nvPr/>
+        </p:nvSpPr>
+        <p:spPr>
+          <a:xfrm>
+            <a:off x="658368" y="3529584"/>
+            <a:ext cx="5358384" cy="658368"/>
+          </a:xfrm>
+          <a:prstGeom prst="roundRect">
+            <a:avLst/>
+          </a:prstGeom>
+          <a:solidFill>
+            <a:srgbClr val="FFFFFF"/>
+          </a:solidFill>
+          <a:ln>
+            <a:solidFill>
+              <a:srgbClr val="D9CEF7"/>
+            </a:solidFill>
+          </a:ln>
+        </p:spPr>
+        <p:style>
+          <a:lnRef idx="1">
+            <a:schemeClr val="accent1"/>
+          </a:lnRef>
+          <a:fillRef idx="3">
+            <a:schemeClr val="accent1"/>
+          </a:fillRef>
+          <a:effectRef idx="2">
+            <a:schemeClr val="accent1"/>
+          </a:effectRef>
+          <a:fontRef idx="minor">
+            <a:schemeClr val="lt1"/>
+          </a:fontRef>
+        </p:style>
+        <p:txBody>
+          <a:bodyPr rtlCol="0" anchor="ctr" wrap="square" lIns="73152" rIns="73152" tIns="27432" bIns="27432"/>
+          <a:lstStyle/>
+          <a:p>
+            <a:pPr algn="ctr">
+              <a:spcAft>
+                <a:spcPts val="150"/>
+              </a:spcAft>
+            </a:pPr>
+            <a:r>
+              <a:rPr sz="780" b="1">
+                <a:solidFill>
+                  <a:srgbClr val="6A2CC9"/>
+                </a:solidFill>
+                <a:latin typeface="Arial"/>
+              </a:rPr>
+              <a:t>[WHY 3] </a:t>
+            </a:r>
+            <a:r>
+              <a:rPr sz="780" b="1">
+                <a:solidFill>
+                  <a:srgbClr val="2A2A3D"/>
+                </a:solidFill>
+                <a:latin typeface="Arial"/>
+              </a:rPr>
+              <a:t>Mengapa tidak diketahui mesin mana dan shift mana yang bermasalah?</a:t>
+            </a:r>
+          </a:p>
+          <a:p>
+            <a:pPr>
+              <a:spcAft>
+                <a:spcPts val="150"/>
+              </a:spcAft>
+            </a:pPr>
+            <a:r>
+              <a:rPr sz="780" b="1">
+                <a:solidFill>
+                  <a:srgbClr val="6A2CC9"/>
+                </a:solidFill>
+                <a:latin typeface="Arial"/>
+              </a:rPr>
+              <a:t>➔ </a:t>
+            </a:r>
+            <a:r>
+              <a:rPr sz="780" b="0">
+                <a:solidFill>
+                  <a:srgbClr val="2A2A3D"/>
+                </a:solidFill>
+                <a:latin typeface="Arial"/>
+              </a:rPr>
+              <a:t>Data jenis kerusakan QC tidak terhubung dengan data penugasan operasional (mesin, shift, PO).</a:t>
+            </a:r>
+          </a:p>
+          <a:p>
+            <a:r>
+              <a:rPr sz="700" i="1">
+                <a:solidFill>
+                  <a:srgbClr val="6E6E82"/>
+                </a:solidFill>
+                <a:latin typeface="Arial"/>
+              </a:rPr>
+              <a:t>   [Bukti: Laporan QC Verifikasi hanya menyajikan total kerusakan general di level unit]</a:t>
+            </a:r>
+          </a:p>
+        </p:txBody>
+      </p:sp>
+      <p:sp>
+        <p:nvSpPr>
+          <p:cNvPr id="13" name="Rounded Rectangle 12"/>
+          <p:cNvSpPr/>
+          <p:nvPr/>
+        </p:nvSpPr>
+        <p:spPr>
+          <a:xfrm>
+            <a:off x="658368" y="4215384"/>
+            <a:ext cx="5358384" cy="658368"/>
+          </a:xfrm>
+          <a:prstGeom prst="roundRect">
+            <a:avLst/>
+          </a:prstGeom>
+          <a:solidFill>
+            <a:srgbClr val="FFFFFF"/>
+          </a:solidFill>
+          <a:ln>
+            <a:solidFill>
+              <a:srgbClr val="D9CEF7"/>
+            </a:solidFill>
+          </a:ln>
+        </p:spPr>
+        <p:style>
+          <a:lnRef idx="1">
+            <a:schemeClr val="accent1"/>
+          </a:lnRef>
+          <a:fillRef idx="3">
+            <a:schemeClr val="accent1"/>
+          </a:fillRef>
+          <a:effectRef idx="2">
+            <a:schemeClr val="accent1"/>
+          </a:effectRef>
+          <a:fontRef idx="minor">
+            <a:schemeClr val="lt1"/>
+          </a:fontRef>
+        </p:style>
+        <p:txBody>
+          <a:bodyPr rtlCol="0" anchor="ctr" wrap="square" lIns="73152" rIns="73152" tIns="27432" bIns="27432"/>
+          <a:lstStyle/>
+          <a:p>
+            <a:pPr algn="ctr">
+              <a:spcAft>
+                <a:spcPts val="150"/>
+              </a:spcAft>
+            </a:pPr>
+            <a:r>
+              <a:rPr sz="780" b="1">
+                <a:solidFill>
+                  <a:srgbClr val="6A2CC9"/>
+                </a:solidFill>
+                <a:latin typeface="Arial"/>
+              </a:rPr>
+              <a:t>[WHY 4] </a:t>
+            </a:r>
+            <a:r>
+              <a:rPr sz="780" b="1">
+                <a:solidFill>
+                  <a:srgbClr val="2A2A3D"/>
+                </a:solidFill>
+                <a:latin typeface="Arial"/>
+              </a:rPr>
+              <a:t>Mengapa data kerusakan dan penugasan operasional tidak terhubung?</a:t>
+            </a:r>
+          </a:p>
+          <a:p>
+            <a:pPr>
+              <a:spcAft>
+                <a:spcPts val="150"/>
+              </a:spcAft>
+            </a:pPr>
+            <a:r>
+              <a:rPr sz="780" b="1">
+                <a:solidFill>
+                  <a:srgbClr val="6A2CC9"/>
+                </a:solidFill>
+                <a:latin typeface="Arial"/>
+              </a:rPr>
+              <a:t>➔ </a:t>
+            </a:r>
+            <a:r>
+              <a:rPr sz="780" b="0">
+                <a:solidFill>
+                  <a:srgbClr val="2A2A3D"/>
+                </a:solidFill>
+                <a:latin typeface="Arial"/>
+              </a:rPr>
+              <a:t>Terjadi Data Silo: data mutu di SAP/QC, penugasan dicatat manual di buku folio meja mesin.</a:t>
+            </a:r>
+          </a:p>
+          <a:p>
+            <a:r>
+              <a:rPr sz="700" i="1">
+                <a:solidFill>
+                  <a:srgbClr val="6E6E82"/>
+                </a:solidFill>
+                <a:latin typeface="Arial"/>
+              </a:rPr>
+              <a:t>   [Bukti: Tabel CSV mentah SAP ZPPRSIPPC0012 vs Buku Folio Fisik Meja Mesin]</a:t>
+            </a:r>
+          </a:p>
+        </p:txBody>
+      </p:sp>
+      <p:sp>
+        <p:nvSpPr>
+          <p:cNvPr id="14" name="Rounded Rectangle 13"/>
+          <p:cNvSpPr/>
+          <p:nvPr/>
+        </p:nvSpPr>
+        <p:spPr>
+          <a:xfrm>
+            <a:off x="658368" y="4901184"/>
+            <a:ext cx="5358384" cy="841248"/>
+          </a:xfrm>
+          <a:prstGeom prst="roundRect">
+            <a:avLst/>
+          </a:prstGeom>
+          <a:solidFill>
+            <a:srgbClr val="FFFFFF"/>
+          </a:solidFill>
+          <a:ln>
+            <a:solidFill>
+              <a:srgbClr val="F5C2C2"/>
+            </a:solidFill>
+          </a:ln>
+        </p:spPr>
+        <p:style>
+          <a:lnRef idx="1">
+            <a:schemeClr val="accent1"/>
+          </a:lnRef>
+          <a:fillRef idx="3">
+            <a:schemeClr val="accent1"/>
+          </a:fillRef>
+          <a:effectRef idx="2">
+            <a:schemeClr val="accent1"/>
+          </a:effectRef>
+          <a:fontRef idx="minor">
+            <a:schemeClr val="lt1"/>
+          </a:fontRef>
+        </p:style>
+        <p:txBody>
+          <a:bodyPr rtlCol="0" anchor="ctr" wrap="square" lIns="73152" rIns="73152" tIns="27432" bIns="27432"/>
+          <a:lstStyle/>
+          <a:p>
+            <a:pPr algn="ctr">
+              <a:spcAft>
+                <a:spcPts val="150"/>
+              </a:spcAft>
+            </a:pPr>
+            <a:r>
+              <a:rPr sz="780" b="1">
+                <a:solidFill>
+                  <a:srgbClr val="C62828"/>
+                </a:solidFill>
+                <a:latin typeface="Arial"/>
+              </a:rPr>
+              <a:t>[WHY 5 (ROOT CAUSE)] </a:t>
+            </a:r>
+            <a:r>
+              <a:rPr sz="780" b="1">
+                <a:solidFill>
+                  <a:srgbClr val="2A2A3D"/>
+                </a:solidFill>
+                <a:latin typeface="Arial"/>
+              </a:rPr>
+              <a:t>Mengapa data terpisah dan dicatat secara manual di buku folio?</a:t>
+            </a:r>
+          </a:p>
+          <a:p>
+            <a:pPr>
+              <a:spcAft>
+                <a:spcPts val="150"/>
+              </a:spcAft>
+            </a:pPr>
+            <a:r>
+              <a:rPr sz="780" b="1">
+                <a:solidFill>
+                  <a:srgbClr val="C62828"/>
+                </a:solidFill>
+                <a:latin typeface="Arial"/>
+              </a:rPr>
+              <a:t>➔ </a:t>
+            </a:r>
+            <a:r>
+              <a:rPr sz="780" b="1">
+                <a:solidFill>
+                  <a:srgbClr val="C62828"/>
+                </a:solidFill>
+                <a:latin typeface="Arial"/>
+              </a:rPr>
+              <a:t>Ketiadaan Decision Support System (DSS) terpadu yang mendigitalisasi input PO di lapangan &amp; menghubungkannya real-time ke data mutu per mesin &amp; shift.</a:t>
+            </a:r>
+          </a:p>
+          <a:p>
+            <a:r>
+              <a:rPr sz="700" i="1">
+                <a:solidFill>
+                  <a:srgbClr val="C62828"/>
+                </a:solidFill>
+                <a:latin typeface="Arial"/>
+              </a:rPr>
+              <a:t>   [Status: Akar Masalah Fundamental yang Belum Pernah Diselesaikan di Unit Cetak]</a:t>
+            </a:r>
+          </a:p>
+        </p:txBody>
+      </p:sp>
+      <p:sp>
+        <p:nvSpPr>
+          <p:cNvPr id="15" name="Rectangle 14"/>
+          <p:cNvSpPr/>
+          <p:nvPr/>
+        </p:nvSpPr>
+        <p:spPr>
+          <a:xfrm>
+            <a:off x="6382512" y="1755648"/>
+            <a:ext cx="5257800" cy="329184"/>
+          </a:xfrm>
+          <a:prstGeom prst="rect">
+            <a:avLst/>
+          </a:prstGeom>
+          <a:solidFill>
+            <a:srgbClr val="6A2CC9"/>
+          </a:solidFill>
+          <a:ln>
+            <a:noFill/>
+          </a:ln>
+        </p:spPr>
+        <p:style>
+          <a:lnRef idx="1">
+            <a:schemeClr val="accent1"/>
+          </a:lnRef>
+          <a:fillRef idx="3">
+            <a:schemeClr val="accent1"/>
+          </a:fillRef>
+          <a:effectRef idx="2">
+            <a:schemeClr val="accent1"/>
+          </a:effectRef>
+          <a:fontRef idx="minor">
+            <a:schemeClr val="lt1"/>
+          </a:fontRef>
+        </p:style>
+        <p:txBody>
+          <a:bodyPr rtlCol="0" anchor="ctr" tIns="36576" bIns="36576"/>
+          <a:lstStyle/>
+          <a:p>
+            <a:pPr algn="ctr"/>
+            <a:r>
+              <a:rPr sz="1050" b="1">
+                <a:solidFill>
+                  <a:srgbClr val="FFFFFF"/>
+                </a:solidFill>
+                <a:latin typeface="Arial"/>
+              </a:rPr>
+              <a:t>2. AKAR MASALAH UTAMA &amp; JEMBATAN MENUJU SOLUSI</a:t>
+            </a:r>
+          </a:p>
+        </p:txBody>
+      </p:sp>
+      <p:sp>
+        <p:nvSpPr>
+          <p:cNvPr id="16" name="Rounded Rectangle 15"/>
+          <p:cNvSpPr/>
+          <p:nvPr/>
+        </p:nvSpPr>
+        <p:spPr>
+          <a:xfrm>
+            <a:off x="6382512" y="2084831"/>
+            <a:ext cx="5257800" cy="3730752"/>
+          </a:xfrm>
+          <a:prstGeom prst="roundRect">
+            <a:avLst/>
+          </a:prstGeom>
+          <a:solidFill>
+            <a:srgbClr val="F8F6FE"/>
+          </a:solidFill>
+          <a:ln>
+            <a:solidFill>
+              <a:srgbClr val="D9CEF7"/>
+            </a:solidFill>
+          </a:ln>
+        </p:spPr>
+        <p:style>
+          <a:lnRef idx="1">
+            <a:schemeClr val="accent1"/>
+          </a:lnRef>
+          <a:fillRef idx="3">
+            <a:schemeClr val="accent1"/>
+          </a:fillRef>
+          <a:effectRef idx="2">
+            <a:schemeClr val="accent1"/>
+          </a:effectRef>
+          <a:fontRef idx="minor">
+            <a:schemeClr val="lt1"/>
+          </a:fontRef>
+        </p:style>
+        <p:txBody>
+          <a:bodyPr rtlCol="0" anchor="ctr"/>
+          <a:lstStyle/>
+          <a:p>
+            <a:pPr algn="ctr"/>
+          </a:p>
+        </p:txBody>
+      </p:sp>
+      <p:sp>
+        <p:nvSpPr>
+          <p:cNvPr id="17" name="Rounded Rectangle 16"/>
+          <p:cNvSpPr/>
+          <p:nvPr/>
+        </p:nvSpPr>
+        <p:spPr>
+          <a:xfrm>
+            <a:off x="6492240" y="2157984"/>
+            <a:ext cx="5038344" cy="1536192"/>
+          </a:xfrm>
+          <a:prstGeom prst="roundRect">
+            <a:avLst/>
+          </a:prstGeom>
+          <a:solidFill>
+            <a:srgbClr val="FFF5F5"/>
+          </a:solidFill>
+          <a:ln>
+            <a:solidFill>
+              <a:srgbClr val="C62828"/>
+            </a:solidFill>
+          </a:ln>
+        </p:spPr>
+        <p:style>
+          <a:lnRef idx="1">
+            <a:schemeClr val="accent1"/>
+          </a:lnRef>
+          <a:fillRef idx="3">
+            <a:schemeClr val="accent1"/>
+          </a:fillRef>
+          <a:effectRef idx="2">
+            <a:schemeClr val="accent1"/>
+          </a:effectRef>
+          <a:fontRef idx="minor">
+            <a:schemeClr val="lt1"/>
+          </a:fontRef>
+        </p:style>
+        <p:txBody>
+          <a:bodyPr rtlCol="0" anchor="ctr" wrap="square" lIns="109728" rIns="109728" tIns="54864" bIns="54864"/>
+          <a:lstStyle/>
+          <a:p>
+            <a:pPr algn="ctr">
+              <a:spcAft>
+                <a:spcPts val="300"/>
+              </a:spcAft>
+            </a:pPr>
+            <a:r>
+              <a:rPr sz="950" b="1">
+                <a:solidFill>
+                  <a:srgbClr val="C62828"/>
+                </a:solidFill>
+                <a:latin typeface="Arial"/>
+              </a:rPr>
+              <a:t>RUMUSAN AKAR MASALAH UTAMA (CORE ROOT CAUSE):</a:t>
+            </a:r>
+          </a:p>
+          <a:p>
+            <a:pPr>
+              <a:spcAft>
+                <a:spcPts val="300"/>
+              </a:spcAft>
+            </a:pPr>
+            <a:r>
+              <a:rPr sz="860" b="1" i="1">
+                <a:solidFill>
+                  <a:srgbClr val="2A2A3D"/>
+                </a:solidFill>
+                <a:latin typeface="Arial"/>
+              </a:rPr>
+              <a:t>“Ketiadaan sistem pendukung keputusan (Decision Support System) yang terintegrasi secara real-time untuk mendigitalisasi rekam jejak produksi per PO di lapangan, serta menghubungkan data kuantitas dan jenis kerusakan secara spesifik ke tingkat mesin dan kondisi operasional (shift/tim kerja).”</a:t>
+            </a:r>
+          </a:p>
+          <a:p>
+            <a:r>
+              <a:rPr sz="780" b="1">
+                <a:solidFill>
+                  <a:srgbClr val="2E7D32"/>
+                </a:solidFill>
+                <a:latin typeface="Arial"/>
+              </a:rPr>
+              <a:t>✓ Status: Tervalidasi 100% via Audit Alur Kerja Unit Cetak 2025</a:t>
+            </a:r>
+          </a:p>
+        </p:txBody>
+      </p:sp>
+      <p:sp>
+        <p:nvSpPr>
+          <p:cNvPr id="18" name="Rounded Rectangle 17"/>
+          <p:cNvSpPr/>
+          <p:nvPr/>
+        </p:nvSpPr>
+        <p:spPr>
+          <a:xfrm>
+            <a:off x="6492240" y="3767328"/>
+            <a:ext cx="5038344" cy="1956816"/>
+          </a:xfrm>
+          <a:prstGeom prst="roundRect">
+            <a:avLst/>
+          </a:prstGeom>
+          <a:solidFill>
+            <a:srgbClr val="FFFFFF"/>
+          </a:solidFill>
+          <a:ln>
+            <a:solidFill>
+              <a:srgbClr val="6A2CC9"/>
+            </a:solidFill>
+          </a:ln>
+        </p:spPr>
+        <p:style>
+          <a:lnRef idx="1">
+            <a:schemeClr val="accent1"/>
+          </a:lnRef>
+          <a:fillRef idx="3">
+            <a:schemeClr val="accent1"/>
+          </a:fillRef>
+          <a:effectRef idx="2">
+            <a:schemeClr val="accent1"/>
+          </a:effectRef>
+          <a:fontRef idx="minor">
+            <a:schemeClr val="lt1"/>
+          </a:fontRef>
+        </p:style>
+        <p:txBody>
+          <a:bodyPr rtlCol="0" anchor="ctr" wrap="square" lIns="109728" rIns="109728" tIns="54864" bIns="54864"/>
+          <a:lstStyle/>
+          <a:p>
+            <a:pPr algn="ctr">
+              <a:spcAft>
+                <a:spcPts val="300"/>
+              </a:spcAft>
+            </a:pPr>
+            <a:r>
+              <a:rPr sz="919" b="1">
+                <a:solidFill>
+                  <a:srgbClr val="6A2CC9"/>
+                </a:solidFill>
+                <a:latin typeface="Arial"/>
+              </a:rPr>
+              <a:t>JEMBATAN LOGIKA SEBAB-AKIBAT MENUJU SOLUSI (POINT 04):</a:t>
+            </a:r>
+          </a:p>
+          <a:p>
+            <a:pPr>
+              <a:spcAft>
+                <a:spcPts val="200"/>
+              </a:spcAft>
+            </a:pPr>
+            <a:r>
+              <a:rPr sz="780" b="1">
+                <a:solidFill>
+                  <a:srgbClr val="6A2CC9"/>
+                </a:solidFill>
+                <a:latin typeface="Arial"/>
+              </a:rPr>
+              <a:t>• 1. Akar Masalah: </a:t>
+            </a:r>
+            <a:r>
+              <a:rPr sz="780" b="0">
+                <a:solidFill>
+                  <a:srgbClr val="2A2A3D"/>
+                </a:solidFill>
+                <a:latin typeface="Arial"/>
+              </a:rPr>
+              <a:t>Ketiadaan DSS terpadu per PO, Mesin, &amp; Shift kerja.</a:t>
+            </a:r>
+          </a:p>
+          <a:p>
+            <a:pPr>
+              <a:spcAft>
+                <a:spcPts val="200"/>
+              </a:spcAft>
+            </a:pPr>
+            <a:r>
+              <a:rPr sz="780" b="1">
+                <a:solidFill>
+                  <a:srgbClr val="20288F"/>
+                </a:solidFill>
+                <a:latin typeface="Arial"/>
+              </a:rPr>
+              <a:t>• 2. Gejala Lapangan: </a:t>
+            </a:r>
+            <a:r>
+              <a:rPr sz="780" b="0">
+                <a:solidFill>
+                  <a:srgbClr val="2A2A3D"/>
+                </a:solidFill>
+                <a:latin typeface="Arial"/>
+              </a:rPr>
+              <a:t>Data Silo -&gt; Maintenance spekulatif (&gt; 8 jam) &amp; evaluasi tertunda.</a:t>
+            </a:r>
+          </a:p>
+          <a:p>
+            <a:pPr>
+              <a:spcAft>
+                <a:spcPts val="200"/>
+              </a:spcAft>
+            </a:pPr>
+            <a:r>
+              <a:rPr sz="780" b="1">
+                <a:solidFill>
+                  <a:srgbClr val="C62828"/>
+                </a:solidFill>
+                <a:latin typeface="Arial"/>
+              </a:rPr>
+              <a:t>• 3. Dampak Terukur: </a:t>
+            </a:r>
+            <a:r>
+              <a:rPr sz="780" b="0">
+                <a:solidFill>
+                  <a:srgbClr val="2A2A3D"/>
+                </a:solidFill>
+                <a:latin typeface="Arial"/>
+              </a:rPr>
+              <a:t>Inschiet 4,61% (Potensi pemborosan biaya Rp 24,56 Miliar/Tahun).</a:t>
+            </a:r>
+          </a:p>
+          <a:p>
+            <a:pPr>
+              <a:spcAft>
+                <a:spcPts val="200"/>
+              </a:spcAft>
+            </a:pPr>
+            <a:r>
+              <a:rPr sz="780" b="1">
+                <a:solidFill>
+                  <a:srgbClr val="2E7D32"/>
+                </a:solidFill>
+                <a:latin typeface="Arial"/>
+              </a:rPr>
+              <a:t>• 4. Sasaran Solusi DSS SIRINE 4.0: </a:t>
+            </a:r>
+            <a:r>
+              <a:rPr sz="780" b="1">
+                <a:solidFill>
+                  <a:srgbClr val="2E7D32"/>
+                </a:solidFill>
+                <a:latin typeface="Arial"/>
+              </a:rPr>
+              <a:t>Menghadirkan Arsitektur Dua Lapisan (Form Input Digital &lt; 30 detik + 6 Modul Preskriptif) untuk menyerang langsung akar masalah Why 5.</a:t>
+            </a:r>
+          </a:p>
+        </p:txBody>
+      </p:sp>
+      <p:sp>
+        <p:nvSpPr>
+          <p:cNvPr id="19" name="Rounded Rectangle 18"/>
+          <p:cNvSpPr/>
+          <p:nvPr/>
+        </p:nvSpPr>
+        <p:spPr>
+          <a:xfrm>
+            <a:off x="548640" y="5888736"/>
+            <a:ext cx="11091672" cy="457200"/>
+          </a:xfrm>
+          <a:prstGeom prst="roundRect">
+            <a:avLst/>
+          </a:prstGeom>
+          <a:solidFill>
+            <a:srgbClr val="F8F6FE"/>
+          </a:solidFill>
+          <a:ln>
+            <a:solidFill>
+              <a:srgbClr val="6A2CC9"/>
+            </a:solidFill>
+          </a:ln>
+        </p:spPr>
+        <p:style>
+          <a:lnRef idx="1">
+            <a:schemeClr val="accent1"/>
+          </a:lnRef>
+          <a:fillRef idx="3">
+            <a:schemeClr val="accent1"/>
+          </a:fillRef>
+          <a:effectRef idx="2">
+            <a:schemeClr val="accent1"/>
+          </a:effectRef>
+          <a:fontRef idx="minor">
+            <a:schemeClr val="lt1"/>
+          </a:fontRef>
+        </p:style>
+        <p:txBody>
+          <a:bodyPr rtlCol="0" anchor="ctr" wrap="square" lIns="109728" rIns="109728" tIns="36576" bIns="36576"/>
+          <a:lstStyle/>
+          <a:p>
+            <a:pPr algn="ctr"/>
+            <a:r>
+              <a:rPr sz="880" b="1">
+                <a:solidFill>
+                  <a:srgbClr val="6A2CC9"/>
+                </a:solidFill>
+                <a:latin typeface="Arial"/>
+              </a:rPr>
+              <a:t>• Keterkaitan dengan Solusi:  </a:t>
+            </a:r>
+            <a:r>
+              <a:rPr sz="880">
+                <a:solidFill>
+                  <a:srgbClr val="2A2A3D"/>
+                </a:solidFill>
+                <a:latin typeface="Arial"/>
+              </a:rPr>
+              <a:t>Inovasi DSS SIRINE 4.0 pada Point 04 secara presisi menyerang akar masalah Why 5: meruntuhkan Data Silo melalui integrasi otomatis Lapisan 1 (Input Digital Lapangan) dan Lapisan 2 (Dasbor Preskriptif Per Mesin &amp; Per Shift) guna mengeliminasi spekulasi teknis.</a:t>
+            </a:r>
+          </a:p>
+        </p:txBody>
+      </p:sp>
+    </p:spTree>
+  </p:cSld>
+  <p:clrMapOvr>
+    <a:masterClrMapping/>
+  </p:clrMapOvr>
+</p:sld>
+</file>
+
+<file path=ppt/slides/slide8.xml><?xml version="1.0" encoding="utf-8"?>
 <p:sld xmlns:a="http://schemas.openxmlformats.org/drawingml/2006/main" xmlns:r="http://schemas.openxmlformats.org/officeDocument/2006/relationships" xmlns:p="http://schemas.openxmlformats.org/presentationml/2006/main">
   <p:cSld name="Slide 6">
     <p:bg>
@@ -8318,7 +10708,7 @@
 </p:sld>
 </file>
 
-<file path=ppt/slides/slide8.xml><?xml version="1.0" encoding="utf-8"?>
+<file path=ppt/slides/slide9.xml><?xml version="1.0" encoding="utf-8"?>
 <p:sld xmlns:a="http://schemas.openxmlformats.org/drawingml/2006/main" xmlns:r="http://schemas.openxmlformats.org/officeDocument/2006/relationships" xmlns:p="http://schemas.openxmlformats.org/presentationml/2006/main">
   <p:cSld name="Slide 7">
     <p:bg>
@@ -8786,484 +11176,6 @@
             <a:extLst>
               <a:ext uri="{FF2B5EF4-FFF2-40B4-BE49-F238E27FC236}">
                 <a16:creationId xmlns:a16="http://schemas.microsoft.com/office/drawing/2014/main" id="{E3189091-A826-254D-C3B7-80DAB4A39AF5}"/>
-              </a:ext>
-            </a:extLst>
-          </p:cNvPr>
-          <p:cNvPicPr>
-            <a:picLocks noChangeAspect="1"/>
-          </p:cNvPicPr>
-          <p:nvPr/>
-        </p:nvPicPr>
-        <p:blipFill>
-          <a:blip r:embed="rId4"/>
-          <a:stretch>
-            <a:fillRect/>
-          </a:stretch>
-        </p:blipFill>
-        <p:spPr>
-          <a:xfrm>
-            <a:off x="-108068" y="-179554"/>
-            <a:ext cx="1448261" cy="814647"/>
-          </a:xfrm>
-          <a:prstGeom prst="rect">
-            <a:avLst/>
-          </a:prstGeom>
-        </p:spPr>
-      </p:pic>
-    </p:spTree>
-  </p:cSld>
-  <p:clrMapOvr>
-    <a:masterClrMapping/>
-  </p:clrMapOvr>
-</p:sld>
-</file>
-
-<file path=ppt/slides/slide9.xml><?xml version="1.0" encoding="utf-8"?>
-<p:sld xmlns:a="http://schemas.openxmlformats.org/drawingml/2006/main" xmlns:r="http://schemas.openxmlformats.org/officeDocument/2006/relationships" xmlns:p="http://schemas.openxmlformats.org/presentationml/2006/main">
-  <p:cSld name="Slide 8">
-    <p:bg>
-      <p:bgPr>
-        <a:solidFill>
-          <a:srgbClr val="FFFFFF"/>
-        </a:solidFill>
-        <a:effectLst/>
-      </p:bgPr>
-    </p:bg>
-    <p:spTree>
-      <p:nvGrpSpPr>
-        <p:cNvPr id="1" name=""/>
-        <p:cNvGrpSpPr/>
-        <p:nvPr/>
-      </p:nvGrpSpPr>
-      <p:grpSpPr>
-        <a:xfrm>
-          <a:off x="0" y="0"/>
-          <a:ext cx="0" cy="0"/>
-          <a:chOff x="0" y="0"/>
-          <a:chExt cx="0" cy="0"/>
-        </a:xfrm>
-      </p:grpSpPr>
-      <p:sp>
-        <p:nvSpPr>
-          <p:cNvPr id="3" name="Shape 1"/>
-          <p:cNvSpPr/>
-          <p:nvPr/>
-        </p:nvSpPr>
-        <p:spPr>
-          <a:xfrm>
-            <a:off x="548640" y="619299"/>
-            <a:ext cx="731520" cy="731520"/>
-          </a:xfrm>
-          <a:prstGeom prst="ellipse">
-            <a:avLst/>
-          </a:prstGeom>
-          <a:solidFill>
-            <a:srgbClr val="6A2CC9"/>
-          </a:solidFill>
-          <a:ln/>
-          <a:effectLst>
-            <a:outerShdw blurRad="101600" dist="25400" dir="5400000" algn="bl" rotWithShape="0">
-              <a:srgbClr val="6A2CC9">
-                <a:alpha val="28000"/>
-              </a:srgbClr>
-            </a:outerShdw>
-          </a:effectLst>
-        </p:spPr>
-      </p:sp>
-      <p:sp>
-        <p:nvSpPr>
-          <p:cNvPr id="4" name="Text 2"/>
-          <p:cNvSpPr/>
-          <p:nvPr/>
-        </p:nvSpPr>
-        <p:spPr>
-          <a:xfrm>
-            <a:off x="548640" y="619299"/>
-            <a:ext cx="731520" cy="731520"/>
-          </a:xfrm>
-          <a:prstGeom prst="rect">
-            <a:avLst/>
-          </a:prstGeom>
-          <a:noFill/>
-          <a:ln/>
-        </p:spPr>
-        <p:txBody>
-          <a:bodyPr wrap="square" lIns="0" tIns="0" rIns="0" bIns="0" rtlCol="0" anchor="ctr"/>
-          <a:lstStyle/>
-          <a:p>
-            <a:pPr marL="0" indent="0" algn="ctr">
-              <a:buNone/>
-            </a:pPr>
-            <a:r>
-              <a:rPr lang="en-US" sz="2200" b="1" dirty="0">
-                <a:solidFill>
-                  <a:srgbClr val="FFFFFF"/>
-                </a:solidFill>
-                <a:latin typeface="Arial" pitchFamily="34" charset="0"/>
-                <a:ea typeface="Arial" pitchFamily="34" charset="-122"/>
-                <a:cs typeface="Arial" pitchFamily="34" charset="-120"/>
-              </a:rPr>
-              <a:t>06</a:t>
-            </a:r>
-            <a:endParaRPr lang="en-US" sz="2200" dirty="0"/>
-          </a:p>
-        </p:txBody>
-      </p:sp>
-      <p:sp>
-        <p:nvSpPr>
-          <p:cNvPr id="5" name="Text 3"/>
-          <p:cNvSpPr/>
-          <p:nvPr/>
-        </p:nvSpPr>
-        <p:spPr>
-          <a:xfrm>
-            <a:off x="1463040" y="606829"/>
-            <a:ext cx="7498080" cy="777240"/>
-          </a:xfrm>
-          <a:prstGeom prst="rect">
-            <a:avLst/>
-          </a:prstGeom>
-          <a:noFill/>
-          <a:ln/>
-        </p:spPr>
-        <p:txBody>
-          <a:bodyPr wrap="square" lIns="0" tIns="0" rIns="0" bIns="0" rtlCol="0" anchor="ctr"/>
-          <a:lstStyle/>
-          <a:p>
-            <a:pPr marL="0" indent="0">
-              <a:buNone/>
-            </a:pPr>
-            <a:r>
-              <a:rPr lang="en-US" sz="3400" b="1" dirty="0">
-                <a:solidFill>
-                  <a:srgbClr val="20288F"/>
-                </a:solidFill>
-                <a:latin typeface="Arial" pitchFamily="34" charset="0"/>
-                <a:ea typeface="Arial" pitchFamily="34" charset="-122"/>
-                <a:cs typeface="Arial" pitchFamily="34" charset="-120"/>
-              </a:rPr>
-              <a:t>Dampak</a:t>
-            </a:r>
-            <a:endParaRPr lang="en-US" sz="3400" dirty="0"/>
-          </a:p>
-        </p:txBody>
-      </p:sp>
-      <p:sp>
-        <p:nvSpPr>
-          <p:cNvPr id="8" name="Text 6"/>
-          <p:cNvSpPr/>
-          <p:nvPr/>
-        </p:nvSpPr>
-        <p:spPr>
-          <a:xfrm>
-            <a:off x="548640" y="1417320"/>
-            <a:ext cx="8229600" cy="548640"/>
-          </a:xfrm>
-          <a:prstGeom prst="rect">
-            <a:avLst/>
-          </a:prstGeom>
-          <a:noFill/>
-          <a:ln/>
-        </p:spPr>
-        <p:txBody>
-          <a:bodyPr wrap="square" lIns="0" tIns="0" rIns="0" bIns="0" rtlCol="0" anchor="ctr"/>
-          <a:lstStyle/>
-          <a:p>
-            <a:pPr marL="0" indent="0">
-              <a:buNone/>
-            </a:pPr>
-            <a:r>
-              <a:rPr lang="en-US" sz="1450" b="1" i="1" dirty="0">
-                <a:solidFill>
-                  <a:srgbClr val="6A2CC9"/>
-                </a:solidFill>
-                <a:latin typeface="Arial" pitchFamily="34" charset="0"/>
-                <a:ea typeface="Arial" pitchFamily="34" charset="-122"/>
-                <a:cs typeface="Arial" pitchFamily="34" charset="-120"/>
-              </a:rPr>
-              <a:t>Tujuan bagian ini:  </a:t>
-            </a:r>
-            <a:r>
-              <a:rPr lang="en-US" sz="1450" i="1" dirty="0">
-                <a:solidFill>
-                  <a:srgbClr val="33334D"/>
-                </a:solidFill>
-                <a:latin typeface="Arial" pitchFamily="34" charset="0"/>
-                <a:ea typeface="Arial" pitchFamily="34" charset="-122"/>
-                <a:cs typeface="Arial" pitchFamily="34" charset="-120"/>
-              </a:rPr>
-              <a:t>Sajikan dampak yang sudah tervalidasi — finansial dan non-finansial.</a:t>
-            </a:r>
-            <a:endParaRPr lang="en-US" sz="1450" dirty="0"/>
-          </a:p>
-        </p:txBody>
-      </p:sp>
-      <p:sp>
-        <p:nvSpPr>
-          <p:cNvPr id="9" name="Shape 7"/>
-          <p:cNvSpPr/>
-          <p:nvPr/>
-        </p:nvSpPr>
-        <p:spPr>
-          <a:xfrm>
-            <a:off x="548640" y="2148840"/>
-            <a:ext cx="7955280" cy="3703320"/>
-          </a:xfrm>
-          <a:prstGeom prst="roundRect">
-            <a:avLst>
-              <a:gd name="adj" fmla="val 2963"/>
-            </a:avLst>
-          </a:prstGeom>
-          <a:solidFill>
-            <a:srgbClr val="F5F1FF"/>
-          </a:solidFill>
-          <a:ln w="12700">
-            <a:solidFill>
-              <a:srgbClr val="EFE7FF"/>
-            </a:solidFill>
-            <a:prstDash val="solid"/>
-          </a:ln>
-          <a:effectLst>
-            <a:outerShdw blurRad="101600" dist="25400" dir="5400000" algn="bl" rotWithShape="0">
-              <a:srgbClr val="C9BEE8">
-                <a:alpha val="30000"/>
-              </a:srgbClr>
-            </a:outerShdw>
-          </a:effectLst>
-        </p:spPr>
-      </p:sp>
-      <p:sp>
-        <p:nvSpPr>
-          <p:cNvPr id="10" name="Text 8"/>
-          <p:cNvSpPr/>
-          <p:nvPr/>
-        </p:nvSpPr>
-        <p:spPr>
-          <a:xfrm>
-            <a:off x="868680" y="2377440"/>
-            <a:ext cx="7315200" cy="365760"/>
-          </a:xfrm>
-          <a:prstGeom prst="rect">
-            <a:avLst/>
-          </a:prstGeom>
-          <a:noFill/>
-          <a:ln/>
-        </p:spPr>
-        <p:txBody>
-          <a:bodyPr wrap="square" lIns="0" tIns="0" rIns="0" bIns="0" rtlCol="0" anchor="ctr"/>
-          <a:lstStyle/>
-          <a:p>
-            <a:pPr marL="0" indent="0">
-              <a:buNone/>
-            </a:pPr>
-            <a:r>
-              <a:rPr lang="en-US" sz="1600" b="1" dirty="0">
-                <a:solidFill>
-                  <a:srgbClr val="6A2CC9"/>
-                </a:solidFill>
-                <a:latin typeface="Arial" pitchFamily="34" charset="0"/>
-                <a:ea typeface="Arial" pitchFamily="34" charset="-122"/>
-                <a:cs typeface="Arial" pitchFamily="34" charset="-120"/>
-              </a:rPr>
-              <a:t>Yang harus disampaikan</a:t>
-            </a:r>
-            <a:endParaRPr lang="en-US" sz="1600" dirty="0"/>
-          </a:p>
-        </p:txBody>
-      </p:sp>
-      <p:sp>
-        <p:nvSpPr>
-          <p:cNvPr id="11" name="Text 9"/>
-          <p:cNvSpPr/>
-          <p:nvPr/>
-        </p:nvSpPr>
-        <p:spPr>
-          <a:xfrm>
-            <a:off x="914400" y="2880360"/>
-            <a:ext cx="7223760" cy="2697480"/>
-          </a:xfrm>
-          <a:prstGeom prst="rect">
-            <a:avLst/>
-          </a:prstGeom>
-          <a:noFill/>
-          <a:ln/>
-        </p:spPr>
-        <p:txBody>
-          <a:bodyPr wrap="square" lIns="0" tIns="0" rIns="0" bIns="0" rtlCol="0" anchor="t"/>
-          <a:lstStyle/>
-          <a:p>
-            <a:pPr marL="203200" indent="-203200">
-              <a:lnSpc>
-                <a:spcPct val="105000"/>
-              </a:lnSpc>
-              <a:spcAft>
-                <a:spcPts val="1200"/>
-              </a:spcAft>
-              <a:buSzPct val="100000"/>
-              <a:buChar char="•"/>
-            </a:pPr>
-            <a:r>
-              <a:rPr lang="en-US" sz="1450" dirty="0">
-                <a:solidFill>
-                  <a:srgbClr val="33334D"/>
-                </a:solidFill>
-                <a:latin typeface="Arial" pitchFamily="34" charset="0"/>
-                <a:ea typeface="Arial" pitchFamily="34" charset="-122"/>
-                <a:cs typeface="Arial" pitchFamily="34" charset="-120"/>
-              </a:rPr>
-              <a:t>Cost saving / cost avoidance / revenue, diukur vs baseline terverifikasi.</a:t>
-            </a:r>
-            <a:endParaRPr lang="en-US" sz="1450" dirty="0"/>
-          </a:p>
-          <a:p>
-            <a:pPr marL="203200" indent="-203200">
-              <a:lnSpc>
-                <a:spcPct val="105000"/>
-              </a:lnSpc>
-              <a:spcAft>
-                <a:spcPts val="1200"/>
-              </a:spcAft>
-              <a:buSzPct val="100000"/>
-              <a:buChar char="•"/>
-            </a:pPr>
-            <a:r>
-              <a:rPr lang="en-US" sz="1450" dirty="0">
-                <a:solidFill>
-                  <a:srgbClr val="33334D"/>
-                </a:solidFill>
-                <a:latin typeface="Arial" pitchFamily="34" charset="0"/>
-                <a:ea typeface="Arial" pitchFamily="34" charset="-122"/>
-                <a:cs typeface="Arial" pitchFamily="34" charset="-120"/>
-              </a:rPr>
-              <a:t>Nilai bersih &amp; payback period .</a:t>
-            </a:r>
-            <a:endParaRPr lang="en-US" sz="1450" dirty="0"/>
-          </a:p>
-          <a:p>
-            <a:pPr marL="203200" indent="-203200">
-              <a:lnSpc>
-                <a:spcPct val="105000"/>
-              </a:lnSpc>
-              <a:spcAft>
-                <a:spcPts val="1200"/>
-              </a:spcAft>
-              <a:buSzPct val="100000"/>
-              <a:buChar char="•"/>
-            </a:pPr>
-            <a:r>
-              <a:rPr lang="en-US" sz="1450" dirty="0">
-                <a:solidFill>
-                  <a:srgbClr val="33334D"/>
-                </a:solidFill>
-                <a:latin typeface="Arial" pitchFamily="34" charset="0"/>
-                <a:ea typeface="Arial" pitchFamily="34" charset="-122"/>
-                <a:cs typeface="Arial" pitchFamily="34" charset="-120"/>
-              </a:rPr>
-              <a:t>Dampak non-finansial: mutu, K3L, kepatuhan, kepuasan pengguna.</a:t>
-            </a:r>
-            <a:endParaRPr lang="en-US" sz="1450" dirty="0"/>
-          </a:p>
-          <a:p>
-            <a:pPr marL="203200" indent="-203200">
-              <a:lnSpc>
-                <a:spcPct val="105000"/>
-              </a:lnSpc>
-              <a:spcAft>
-                <a:spcPts val="1200"/>
-              </a:spcAft>
-              <a:buSzPct val="100000"/>
-              <a:buChar char="•"/>
-            </a:pPr>
-            <a:r>
-              <a:rPr lang="en-US" sz="1450" dirty="0">
-                <a:solidFill>
-                  <a:srgbClr val="33334D"/>
-                </a:solidFill>
-                <a:latin typeface="Arial" pitchFamily="34" charset="0"/>
-                <a:ea typeface="Arial" pitchFamily="34" charset="-122"/>
-                <a:cs typeface="Arial" pitchFamily="34" charset="-120"/>
-              </a:rPr>
-              <a:t>Keterkaitan dengan strategi perusahaan &amp; potensi replikasi.</a:t>
-            </a:r>
-            <a:endParaRPr lang="en-US" sz="1450" dirty="0"/>
-          </a:p>
-        </p:txBody>
-      </p:sp>
-      <p:sp>
-        <p:nvSpPr>
-          <p:cNvPr id="12" name="Text 10"/>
-          <p:cNvSpPr/>
-          <p:nvPr/>
-        </p:nvSpPr>
-        <p:spPr>
-          <a:xfrm>
-            <a:off x="548640" y="6400800"/>
-            <a:ext cx="11094415" cy="274320"/>
-          </a:xfrm>
-          <a:prstGeom prst="rect">
-            <a:avLst/>
-          </a:prstGeom>
-          <a:noFill/>
-          <a:ln/>
-        </p:spPr>
-        <p:txBody>
-          <a:bodyPr wrap="square" lIns="0" tIns="0" rIns="0" bIns="0" rtlCol="0" anchor="ctr"/>
-          <a:lstStyle/>
-          <a:p>
-            <a:pPr marL="0" indent="0" algn="l">
-              <a:buNone/>
-            </a:pPr>
-            <a:r>
-              <a:rPr lang="en-US" sz="950" i="1" dirty="0">
-                <a:solidFill>
-                  <a:srgbClr val="8A8A9A"/>
-                </a:solidFill>
-                <a:latin typeface="Arial" pitchFamily="34" charset="0"/>
-                <a:ea typeface="Arial" pitchFamily="34" charset="-122"/>
-                <a:cs typeface="Arial" pitchFamily="34" charset="-120"/>
-              </a:rPr>
-              <a:t>Ganti poin di atas dengan konten proyek Anda (grafik, tabel, foto, atau diagram).  ·  IAKA 2026 — Kerangka Presentasi Peserta</a:t>
-            </a:r>
-            <a:endParaRPr lang="en-US" sz="950" dirty="0"/>
-          </a:p>
-        </p:txBody>
-      </p:sp>
-      <p:pic>
-        <p:nvPicPr>
-          <p:cNvPr id="14" name="Picture 13">
-            <a:extLst>
-              <a:ext uri="{FF2B5EF4-FFF2-40B4-BE49-F238E27FC236}">
-                <a16:creationId xmlns:a16="http://schemas.microsoft.com/office/drawing/2014/main" id="{113CABC3-586E-7F22-C24E-7E3D7593E669}"/>
-              </a:ext>
-            </a:extLst>
-          </p:cNvPr>
-          <p:cNvPicPr>
-            <a:picLocks noChangeAspect="1"/>
-          </p:cNvPicPr>
-          <p:nvPr/>
-        </p:nvPicPr>
-        <p:blipFill>
-          <a:blip r:embed="rId3"/>
-          <a:stretch>
-            <a:fillRect/>
-          </a:stretch>
-        </p:blipFill>
-        <p:spPr>
-          <a:xfrm>
-            <a:off x="11056239" y="11533"/>
-            <a:ext cx="1140374" cy="634767"/>
-          </a:xfrm>
-          <a:prstGeom prst="rect">
-            <a:avLst/>
-          </a:prstGeom>
-        </p:spPr>
-      </p:pic>
-      <p:pic>
-        <p:nvPicPr>
-          <p:cNvPr id="16" name="Picture 15">
-            <a:extLst>
-              <a:ext uri="{FF2B5EF4-FFF2-40B4-BE49-F238E27FC236}">
-                <a16:creationId xmlns:a16="http://schemas.microsoft.com/office/drawing/2014/main" id="{A9D540F0-33FD-3602-4087-CD7695575FC6}"/>
               </a:ext>
             </a:extLst>
           </p:cNvPr>
